--- a/output/Salesforce的SAAS产业.pptx
+++ b/output/Salesforce的SAAS产业.pptx
@@ -15,6 +15,10 @@
     <p:sldId id="263" r:id="rId14"/>
     <p:sldId id="264" r:id="rId15"/>
     <p:sldId id="265" r:id="rId16"/>
+    <p:sldId id="266" r:id="rId17"/>
+    <p:sldId id="267" r:id="rId18"/>
+    <p:sldId id="268" r:id="rId19"/>
+    <p:sldId id="269" r:id="rId20"/>
   </p:sldIdLst>
   <p:sldSz cx="12191695" cy="6858000" type="screen4x3"/>
   <p:notesSz cx="6858000" cy="9144000"/>
@@ -3763,6 +3767,6058 @@
         <p:spPr>
           <a:xfrm>
             <a:off x="0" y="0"/>
+            <a:ext cx="12191695" cy="1078992"/>
+          </a:xfrm>
+          <a:prstGeom prst="rect">
+            <a:avLst/>
+          </a:prstGeom>
+          <a:solidFill>
+            <a:srgbClr val="FFFFFF"/>
+          </a:solidFill>
+          <a:ln>
+            <a:noFill/>
+          </a:ln>
+          <a:effectLst/>
+        </p:spPr>
+        <p:style>
+          <a:lnRef idx="1">
+            <a:schemeClr val="accent1"/>
+          </a:lnRef>
+          <a:fillRef idx="3">
+            <a:schemeClr val="accent1"/>
+          </a:fillRef>
+          <a:effectRef idx="2">
+            <a:schemeClr val="accent1"/>
+          </a:effectRef>
+          <a:fontRef idx="minor">
+            <a:schemeClr val="lt1"/>
+          </a:fontRef>
+        </p:style>
+        <p:txBody>
+          <a:bodyPr rtlCol="0" anchor="ctr"/>
+          <a:lstStyle/>
+          <a:p>
+            <a:pPr algn="ctr"/>
+          </a:p>
+        </p:txBody>
+      </p:sp>
+      <p:sp>
+        <p:nvSpPr>
+          <p:cNvPr id="3" name="Rectangle 2"/>
+          <p:cNvSpPr/>
+          <p:nvPr/>
+        </p:nvSpPr>
+        <p:spPr>
+          <a:xfrm>
+            <a:off x="548640" y="310896"/>
+            <a:ext cx="109728" cy="457200"/>
+          </a:xfrm>
+          <a:prstGeom prst="rect">
+            <a:avLst/>
+          </a:prstGeom>
+          <a:solidFill>
+            <a:srgbClr val="1B6EF3"/>
+          </a:solidFill>
+          <a:ln>
+            <a:noFill/>
+          </a:ln>
+          <a:effectLst/>
+        </p:spPr>
+        <p:style>
+          <a:lnRef idx="1">
+            <a:schemeClr val="accent1"/>
+          </a:lnRef>
+          <a:fillRef idx="3">
+            <a:schemeClr val="accent1"/>
+          </a:fillRef>
+          <a:effectRef idx="2">
+            <a:schemeClr val="accent1"/>
+          </a:effectRef>
+          <a:fontRef idx="minor">
+            <a:schemeClr val="lt1"/>
+          </a:fontRef>
+        </p:style>
+        <p:txBody>
+          <a:bodyPr rtlCol="0" anchor="ctr"/>
+          <a:lstStyle/>
+          <a:p>
+            <a:pPr algn="ctr"/>
+          </a:p>
+        </p:txBody>
+      </p:sp>
+      <p:sp>
+        <p:nvSpPr>
+          <p:cNvPr id="4" name="TextBox 3"/>
+          <p:cNvSpPr txBox="1"/>
+          <p:nvPr/>
+        </p:nvSpPr>
+        <p:spPr>
+          <a:xfrm>
+            <a:off x="777240" y="237744"/>
+            <a:ext cx="9601200" cy="292608"/>
+          </a:xfrm>
+          <a:prstGeom prst="rect">
+            <a:avLst/>
+          </a:prstGeom>
+          <a:noFill/>
+        </p:spPr>
+        <p:txBody>
+          <a:bodyPr wrap="square" anchor="t" lIns="0" rIns="0" tIns="0" bIns="0">
+            <a:spAutoFit/>
+          </a:bodyPr>
+          <a:lstStyle/>
+          <a:p>
+            <a:pPr algn="l">
+              <a:lnSpc>
+                <a:spcPct val="100000"/>
+              </a:lnSpc>
+              <a:spcBef>
+                <a:spcPts val="0"/>
+              </a:spcBef>
+              <a:spcAft>
+                <a:spcPts val="600"/>
+              </a:spcAft>
+            </a:pPr>
+            <a:r>
+              <a:rPr sz="1150" b="1" i="0">
+                <a:solidFill>
+                  <a:srgbClr val="1B6EF3"/>
+                </a:solidFill>
+                <a:latin typeface="Microsoft YaHei"/>
+              </a:rPr>
+              <a:t>08 竞争格局</a:t>
+            </a:r>
+          </a:p>
+        </p:txBody>
+      </p:sp>
+      <p:sp>
+        <p:nvSpPr>
+          <p:cNvPr id="5" name="TextBox 4"/>
+          <p:cNvSpPr txBox="1"/>
+          <p:nvPr/>
+        </p:nvSpPr>
+        <p:spPr>
+          <a:xfrm>
+            <a:off x="777240" y="475488"/>
+            <a:ext cx="10332720" cy="457200"/>
+          </a:xfrm>
+          <a:prstGeom prst="rect">
+            <a:avLst/>
+          </a:prstGeom>
+          <a:noFill/>
+        </p:spPr>
+        <p:txBody>
+          <a:bodyPr wrap="square" anchor="t" lIns="0" rIns="0" tIns="0" bIns="0">
+            <a:spAutoFit/>
+          </a:bodyPr>
+          <a:lstStyle/>
+          <a:p>
+            <a:pPr algn="l">
+              <a:lnSpc>
+                <a:spcPct val="100000"/>
+              </a:lnSpc>
+              <a:spcBef>
+                <a:spcPts val="0"/>
+              </a:spcBef>
+              <a:spcAft>
+                <a:spcPts val="600"/>
+              </a:spcAft>
+            </a:pPr>
+            <a:r>
+              <a:rPr sz="2200" b="1" i="0">
+                <a:solidFill>
+                  <a:srgbClr val="0B1F33"/>
+                </a:solidFill>
+                <a:latin typeface="Microsoft YaHei"/>
+              </a:rPr>
+              <a:t>应用层 Agent 化的多强竞争</a:t>
+            </a:r>
+          </a:p>
+        </p:txBody>
+      </p:sp>
+      <p:sp>
+        <p:nvSpPr>
+          <p:cNvPr id="6" name="TextBox 5"/>
+          <p:cNvSpPr txBox="1"/>
+          <p:nvPr/>
+        </p:nvSpPr>
+        <p:spPr>
+          <a:xfrm>
+            <a:off x="10911535" y="384048"/>
+            <a:ext cx="822960" cy="365760"/>
+          </a:xfrm>
+          <a:prstGeom prst="rect">
+            <a:avLst/>
+          </a:prstGeom>
+          <a:noFill/>
+        </p:spPr>
+        <p:txBody>
+          <a:bodyPr wrap="square" anchor="t" lIns="0" rIns="0" tIns="0" bIns="0">
+            <a:spAutoFit/>
+          </a:bodyPr>
+          <a:lstStyle/>
+          <a:p>
+            <a:pPr algn="r">
+              <a:lnSpc>
+                <a:spcPct val="100000"/>
+              </a:lnSpc>
+              <a:spcBef>
+                <a:spcPts val="0"/>
+              </a:spcBef>
+              <a:spcAft>
+                <a:spcPts val="600"/>
+              </a:spcAft>
+            </a:pPr>
+            <a:r>
+              <a:rPr sz="1700" b="1" i="0">
+                <a:solidFill>
+                  <a:srgbClr val="1B6EF3"/>
+                </a:solidFill>
+                <a:latin typeface="Microsoft YaHei"/>
+              </a:rPr>
+              <a:t>10</a:t>
+            </a:r>
+            <a:r>
+              <a:rPr sz="1100" b="0" i="0">
+                <a:solidFill>
+                  <a:srgbClr val="8A98A6"/>
+                </a:solidFill>
+                <a:latin typeface="Microsoft YaHei"/>
+              </a:rPr>
+              <a:t> / 14</a:t>
+            </a:r>
+          </a:p>
+        </p:txBody>
+      </p:sp>
+      <p:sp>
+        <p:nvSpPr>
+          <p:cNvPr id="7" name="Rectangle 6"/>
+          <p:cNvSpPr/>
+          <p:nvPr/>
+        </p:nvSpPr>
+        <p:spPr>
+          <a:xfrm>
+            <a:off x="0" y="1078992"/>
+            <a:ext cx="12191695" cy="15240"/>
+          </a:xfrm>
+          <a:prstGeom prst="rect">
+            <a:avLst/>
+          </a:prstGeom>
+          <a:solidFill>
+            <a:srgbClr val="D7DEE6"/>
+          </a:solidFill>
+          <a:ln>
+            <a:noFill/>
+          </a:ln>
+          <a:effectLst/>
+        </p:spPr>
+        <p:style>
+          <a:lnRef idx="1">
+            <a:schemeClr val="accent1"/>
+          </a:lnRef>
+          <a:fillRef idx="3">
+            <a:schemeClr val="accent1"/>
+          </a:fillRef>
+          <a:effectRef idx="2">
+            <a:schemeClr val="accent1"/>
+          </a:effectRef>
+          <a:fontRef idx="minor">
+            <a:schemeClr val="lt1"/>
+          </a:fontRef>
+        </p:style>
+        <p:txBody>
+          <a:bodyPr rtlCol="0" anchor="ctr"/>
+          <a:lstStyle/>
+          <a:p>
+            <a:pPr algn="ctr"/>
+          </a:p>
+        </p:txBody>
+      </p:sp>
+      <p:sp>
+        <p:nvSpPr>
+          <p:cNvPr id="8" name="Rectangle 7"/>
+          <p:cNvSpPr/>
+          <p:nvPr/>
+        </p:nvSpPr>
+        <p:spPr>
+          <a:xfrm>
+            <a:off x="0" y="6565392"/>
+            <a:ext cx="12191695" cy="292608"/>
+          </a:xfrm>
+          <a:prstGeom prst="rect">
+            <a:avLst/>
+          </a:prstGeom>
+          <a:solidFill>
+            <a:srgbClr val="0B1F33"/>
+          </a:solidFill>
+          <a:ln>
+            <a:noFill/>
+          </a:ln>
+          <a:effectLst/>
+        </p:spPr>
+        <p:style>
+          <a:lnRef idx="1">
+            <a:schemeClr val="accent1"/>
+          </a:lnRef>
+          <a:fillRef idx="3">
+            <a:schemeClr val="accent1"/>
+          </a:fillRef>
+          <a:effectRef idx="2">
+            <a:schemeClr val="accent1"/>
+          </a:effectRef>
+          <a:fontRef idx="minor">
+            <a:schemeClr val="lt1"/>
+          </a:fontRef>
+        </p:style>
+        <p:txBody>
+          <a:bodyPr rtlCol="0" anchor="ctr"/>
+          <a:lstStyle/>
+          <a:p>
+            <a:pPr algn="ctr"/>
+          </a:p>
+        </p:txBody>
+      </p:sp>
+      <p:sp>
+        <p:nvSpPr>
+          <p:cNvPr id="9" name="TextBox 8"/>
+          <p:cNvSpPr txBox="1"/>
+          <p:nvPr/>
+        </p:nvSpPr>
+        <p:spPr>
+          <a:xfrm>
+            <a:off x="548640" y="6583680"/>
+            <a:ext cx="8229600" cy="256032"/>
+          </a:xfrm>
+          <a:prstGeom prst="rect">
+            <a:avLst/>
+          </a:prstGeom>
+          <a:noFill/>
+        </p:spPr>
+        <p:txBody>
+          <a:bodyPr wrap="square" anchor="ctr" lIns="0" rIns="0" tIns="0" bIns="0">
+            <a:spAutoFit/>
+          </a:bodyPr>
+          <a:lstStyle/>
+          <a:p>
+            <a:pPr algn="l">
+              <a:lnSpc>
+                <a:spcPct val="100000"/>
+              </a:lnSpc>
+              <a:spcBef>
+                <a:spcPts val="0"/>
+              </a:spcBef>
+              <a:spcAft>
+                <a:spcPts val="600"/>
+              </a:spcAft>
+            </a:pPr>
+            <a:r>
+              <a:rPr sz="850" b="0" i="0">
+                <a:solidFill>
+                  <a:srgbClr val="C2CEDB"/>
+                </a:solidFill>
+                <a:latin typeface="Microsoft YaHei"/>
+              </a:rPr>
+              <a:t>AI 产业六层模型 · 应用层 · Salesforce</a:t>
+            </a:r>
+          </a:p>
+        </p:txBody>
+      </p:sp>
+      <p:sp>
+        <p:nvSpPr>
+          <p:cNvPr id="10" name="TextBox 9"/>
+          <p:cNvSpPr txBox="1"/>
+          <p:nvPr/>
+        </p:nvSpPr>
+        <p:spPr>
+          <a:xfrm>
+            <a:off x="777240" y="1207008"/>
+            <a:ext cx="10607040" cy="502920"/>
+          </a:xfrm>
+          <a:prstGeom prst="rect">
+            <a:avLst/>
+          </a:prstGeom>
+          <a:noFill/>
+        </p:spPr>
+        <p:txBody>
+          <a:bodyPr wrap="square" anchor="t" lIns="0" rIns="0" tIns="0" bIns="0">
+            <a:spAutoFit/>
+          </a:bodyPr>
+          <a:lstStyle/>
+          <a:p>
+            <a:pPr algn="l">
+              <a:lnSpc>
+                <a:spcPct val="110000"/>
+              </a:lnSpc>
+              <a:spcBef>
+                <a:spcPts val="0"/>
+              </a:spcBef>
+              <a:spcAft>
+                <a:spcPts val="600"/>
+              </a:spcAft>
+            </a:pPr>
+            <a:r>
+              <a:rPr sz="1300" b="0" i="0">
+                <a:solidFill>
+                  <a:srgbClr val="5B6B7B"/>
+                </a:solidFill>
+                <a:latin typeface="Microsoft YaHei"/>
+              </a:rPr>
+              <a:t>对手从办公生态、工作流、ERP 三个方向做 Agent 化，Salesforce 以客户数据 + 信任突围。</a:t>
+            </a:r>
+          </a:p>
+        </p:txBody>
+      </p:sp>
+      <p:sp>
+        <p:nvSpPr>
+          <p:cNvPr id="11" name="Rounded Rectangle 10"/>
+          <p:cNvSpPr/>
+          <p:nvPr/>
+        </p:nvSpPr>
+        <p:spPr>
+          <a:xfrm>
+            <a:off x="777240" y="1783080"/>
+            <a:ext cx="5120640" cy="2272284"/>
+          </a:xfrm>
+          <a:prstGeom prst="roundRect">
+            <a:avLst>
+              <a:gd name="adj" fmla="val 6000"/>
+            </a:avLst>
+          </a:prstGeom>
+          <a:solidFill>
+            <a:srgbClr val="FFFFFF"/>
+          </a:solidFill>
+          <a:ln w="9525">
+            <a:solidFill>
+              <a:srgbClr val="D7DEE6"/>
+            </a:solidFill>
+          </a:ln>
+          <a:effectLst/>
+          <a:effectLst>
+            <a:outerShdw blurRad="90000" dist="40000" dir="5400000" rotWithShape="0">
+              <a:srgbClr val="0B1F33">
+                <a:alpha val="18000"/>
+              </a:srgbClr>
+            </a:outerShdw>
+          </a:effectLst>
+        </p:spPr>
+        <p:style>
+          <a:lnRef idx="1">
+            <a:schemeClr val="accent1"/>
+          </a:lnRef>
+          <a:fillRef idx="3">
+            <a:schemeClr val="accent1"/>
+          </a:fillRef>
+          <a:effectRef idx="2">
+            <a:schemeClr val="accent1"/>
+          </a:effectRef>
+          <a:fontRef idx="minor">
+            <a:schemeClr val="lt1"/>
+          </a:fontRef>
+        </p:style>
+        <p:txBody>
+          <a:bodyPr rtlCol="0" anchor="ctr"/>
+          <a:lstStyle/>
+          <a:p>
+            <a:pPr algn="ctr"/>
+          </a:p>
+        </p:txBody>
+      </p:sp>
+      <p:sp>
+        <p:nvSpPr>
+          <p:cNvPr id="12" name="Rounded Rectangle 11"/>
+          <p:cNvSpPr/>
+          <p:nvPr/>
+        </p:nvSpPr>
+        <p:spPr>
+          <a:xfrm>
+            <a:off x="777240" y="1783080"/>
+            <a:ext cx="91440" cy="2272284"/>
+          </a:xfrm>
+          <a:prstGeom prst="roundRect">
+            <a:avLst>
+              <a:gd name="adj" fmla="val 6000"/>
+            </a:avLst>
+          </a:prstGeom>
+          <a:solidFill>
+            <a:srgbClr val="1B6EF3"/>
+          </a:solidFill>
+          <a:ln>
+            <a:noFill/>
+          </a:ln>
+          <a:effectLst/>
+        </p:spPr>
+        <p:style>
+          <a:lnRef idx="1">
+            <a:schemeClr val="accent1"/>
+          </a:lnRef>
+          <a:fillRef idx="3">
+            <a:schemeClr val="accent1"/>
+          </a:fillRef>
+          <a:effectRef idx="2">
+            <a:schemeClr val="accent1"/>
+          </a:effectRef>
+          <a:fontRef idx="minor">
+            <a:schemeClr val="lt1"/>
+          </a:fontRef>
+        </p:style>
+        <p:txBody>
+          <a:bodyPr rtlCol="0" anchor="ctr"/>
+          <a:lstStyle/>
+          <a:p>
+            <a:pPr algn="ctr"/>
+          </a:p>
+        </p:txBody>
+      </p:sp>
+      <p:sp>
+        <p:nvSpPr>
+          <p:cNvPr id="13" name="TextBox 12"/>
+          <p:cNvSpPr txBox="1"/>
+          <p:nvPr/>
+        </p:nvSpPr>
+        <p:spPr>
+          <a:xfrm>
+            <a:off x="1097280" y="1965960"/>
+            <a:ext cx="4572000" cy="320040"/>
+          </a:xfrm>
+          <a:prstGeom prst="rect">
+            <a:avLst/>
+          </a:prstGeom>
+          <a:noFill/>
+        </p:spPr>
+        <p:txBody>
+          <a:bodyPr wrap="square" anchor="t" lIns="0" rIns="0" tIns="0" bIns="0">
+            <a:spAutoFit/>
+          </a:bodyPr>
+          <a:lstStyle/>
+          <a:p>
+            <a:pPr algn="l">
+              <a:lnSpc>
+                <a:spcPct val="100000"/>
+              </a:lnSpc>
+              <a:spcBef>
+                <a:spcPts val="0"/>
+              </a:spcBef>
+              <a:spcAft>
+                <a:spcPts val="600"/>
+              </a:spcAft>
+            </a:pPr>
+            <a:r>
+              <a:rPr sz="1200" b="1" i="0">
+                <a:solidFill>
+                  <a:srgbClr val="1B6EF3"/>
+                </a:solidFill>
+                <a:latin typeface="Microsoft YaHei"/>
+              </a:rPr>
+              <a:t>微软 Dynamics</a:t>
+            </a:r>
+          </a:p>
+        </p:txBody>
+      </p:sp>
+      <p:sp>
+        <p:nvSpPr>
+          <p:cNvPr id="14" name="TextBox 13"/>
+          <p:cNvSpPr txBox="1"/>
+          <p:nvPr/>
+        </p:nvSpPr>
+        <p:spPr>
+          <a:xfrm>
+            <a:off x="1097280" y="2276856"/>
+            <a:ext cx="4572000" cy="457200"/>
+          </a:xfrm>
+          <a:prstGeom prst="rect">
+            <a:avLst/>
+          </a:prstGeom>
+          <a:noFill/>
+        </p:spPr>
+        <p:txBody>
+          <a:bodyPr wrap="square" anchor="t" lIns="0" rIns="0" tIns="0" bIns="0">
+            <a:spAutoFit/>
+          </a:bodyPr>
+          <a:lstStyle/>
+          <a:p>
+            <a:pPr algn="l">
+              <a:lnSpc>
+                <a:spcPct val="100000"/>
+              </a:lnSpc>
+              <a:spcBef>
+                <a:spcPts val="0"/>
+              </a:spcBef>
+              <a:spcAft>
+                <a:spcPts val="600"/>
+              </a:spcAft>
+            </a:pPr>
+            <a:r>
+              <a:rPr sz="1900" b="1" i="0">
+                <a:solidFill>
+                  <a:srgbClr val="0B1F33"/>
+                </a:solidFill>
+                <a:latin typeface="Microsoft YaHei"/>
+              </a:rPr>
+              <a:t>Copilot 全家桶</a:t>
+            </a:r>
+          </a:p>
+        </p:txBody>
+      </p:sp>
+      <p:sp>
+        <p:nvSpPr>
+          <p:cNvPr id="15" name="TextBox 14"/>
+          <p:cNvSpPr txBox="1"/>
+          <p:nvPr/>
+        </p:nvSpPr>
+        <p:spPr>
+          <a:xfrm>
+            <a:off x="1097280" y="2807208"/>
+            <a:ext cx="4572000" cy="1083564"/>
+          </a:xfrm>
+          <a:prstGeom prst="rect">
+            <a:avLst/>
+          </a:prstGeom>
+          <a:noFill/>
+        </p:spPr>
+        <p:txBody>
+          <a:bodyPr wrap="square" anchor="t" lIns="0" rIns="0" tIns="0" bIns="0">
+            <a:spAutoFit/>
+          </a:bodyPr>
+          <a:lstStyle/>
+          <a:p>
+            <a:pPr algn="l">
+              <a:lnSpc>
+                <a:spcPct val="120000"/>
+              </a:lnSpc>
+              <a:spcBef>
+                <a:spcPts val="0"/>
+              </a:spcBef>
+              <a:spcAft>
+                <a:spcPts val="600"/>
+              </a:spcAft>
+            </a:pPr>
+            <a:r>
+              <a:rPr sz="1200" b="0" i="0">
+                <a:solidFill>
+                  <a:srgbClr val="5B6B7B"/>
+                </a:solidFill>
+                <a:latin typeface="Microsoft YaHei"/>
+              </a:rPr>
+              <a:t>办公生态 + Dynamics，办公场景集成强</a:t>
+            </a:r>
+          </a:p>
+        </p:txBody>
+      </p:sp>
+      <p:sp>
+        <p:nvSpPr>
+          <p:cNvPr id="16" name="Rounded Rectangle 15"/>
+          <p:cNvSpPr/>
+          <p:nvPr/>
+        </p:nvSpPr>
+        <p:spPr>
+          <a:xfrm>
+            <a:off x="6263640" y="1783080"/>
+            <a:ext cx="5120640" cy="2272284"/>
+          </a:xfrm>
+          <a:prstGeom prst="roundRect">
+            <a:avLst>
+              <a:gd name="adj" fmla="val 6000"/>
+            </a:avLst>
+          </a:prstGeom>
+          <a:solidFill>
+            <a:srgbClr val="FFFFFF"/>
+          </a:solidFill>
+          <a:ln w="9525">
+            <a:solidFill>
+              <a:srgbClr val="D7DEE6"/>
+            </a:solidFill>
+          </a:ln>
+          <a:effectLst/>
+          <a:effectLst>
+            <a:outerShdw blurRad="90000" dist="40000" dir="5400000" rotWithShape="0">
+              <a:srgbClr val="0B1F33">
+                <a:alpha val="18000"/>
+              </a:srgbClr>
+            </a:outerShdw>
+          </a:effectLst>
+        </p:spPr>
+        <p:style>
+          <a:lnRef idx="1">
+            <a:schemeClr val="accent1"/>
+          </a:lnRef>
+          <a:fillRef idx="3">
+            <a:schemeClr val="accent1"/>
+          </a:fillRef>
+          <a:effectRef idx="2">
+            <a:schemeClr val="accent1"/>
+          </a:effectRef>
+          <a:fontRef idx="minor">
+            <a:schemeClr val="lt1"/>
+          </a:fontRef>
+        </p:style>
+        <p:txBody>
+          <a:bodyPr rtlCol="0" anchor="ctr"/>
+          <a:lstStyle/>
+          <a:p>
+            <a:pPr algn="ctr"/>
+          </a:p>
+        </p:txBody>
+      </p:sp>
+      <p:sp>
+        <p:nvSpPr>
+          <p:cNvPr id="17" name="Rounded Rectangle 16"/>
+          <p:cNvSpPr/>
+          <p:nvPr/>
+        </p:nvSpPr>
+        <p:spPr>
+          <a:xfrm>
+            <a:off x="6263640" y="1783080"/>
+            <a:ext cx="91440" cy="2272284"/>
+          </a:xfrm>
+          <a:prstGeom prst="roundRect">
+            <a:avLst>
+              <a:gd name="adj" fmla="val 6000"/>
+            </a:avLst>
+          </a:prstGeom>
+          <a:solidFill>
+            <a:srgbClr val="14B8A6"/>
+          </a:solidFill>
+          <a:ln>
+            <a:noFill/>
+          </a:ln>
+          <a:effectLst/>
+        </p:spPr>
+        <p:style>
+          <a:lnRef idx="1">
+            <a:schemeClr val="accent1"/>
+          </a:lnRef>
+          <a:fillRef idx="3">
+            <a:schemeClr val="accent1"/>
+          </a:fillRef>
+          <a:effectRef idx="2">
+            <a:schemeClr val="accent1"/>
+          </a:effectRef>
+          <a:fontRef idx="minor">
+            <a:schemeClr val="lt1"/>
+          </a:fontRef>
+        </p:style>
+        <p:txBody>
+          <a:bodyPr rtlCol="0" anchor="ctr"/>
+          <a:lstStyle/>
+          <a:p>
+            <a:pPr algn="ctr"/>
+          </a:p>
+        </p:txBody>
+      </p:sp>
+      <p:sp>
+        <p:nvSpPr>
+          <p:cNvPr id="18" name="TextBox 17"/>
+          <p:cNvSpPr txBox="1"/>
+          <p:nvPr/>
+        </p:nvSpPr>
+        <p:spPr>
+          <a:xfrm>
+            <a:off x="6583680" y="1965960"/>
+            <a:ext cx="4572000" cy="320040"/>
+          </a:xfrm>
+          <a:prstGeom prst="rect">
+            <a:avLst/>
+          </a:prstGeom>
+          <a:noFill/>
+        </p:spPr>
+        <p:txBody>
+          <a:bodyPr wrap="square" anchor="t" lIns="0" rIns="0" tIns="0" bIns="0">
+            <a:spAutoFit/>
+          </a:bodyPr>
+          <a:lstStyle/>
+          <a:p>
+            <a:pPr algn="l">
+              <a:lnSpc>
+                <a:spcPct val="100000"/>
+              </a:lnSpc>
+              <a:spcBef>
+                <a:spcPts val="0"/>
+              </a:spcBef>
+              <a:spcAft>
+                <a:spcPts val="600"/>
+              </a:spcAft>
+            </a:pPr>
+            <a:r>
+              <a:rPr sz="1200" b="1" i="0">
+                <a:solidFill>
+                  <a:srgbClr val="14B8A6"/>
+                </a:solidFill>
+                <a:latin typeface="Microsoft YaHei"/>
+              </a:rPr>
+              <a:t>ServiceNow</a:t>
+            </a:r>
+          </a:p>
+        </p:txBody>
+      </p:sp>
+      <p:sp>
+        <p:nvSpPr>
+          <p:cNvPr id="19" name="TextBox 18"/>
+          <p:cNvSpPr txBox="1"/>
+          <p:nvPr/>
+        </p:nvSpPr>
+        <p:spPr>
+          <a:xfrm>
+            <a:off x="6583680" y="2276856"/>
+            <a:ext cx="4572000" cy="457200"/>
+          </a:xfrm>
+          <a:prstGeom prst="rect">
+            <a:avLst/>
+          </a:prstGeom>
+          <a:noFill/>
+        </p:spPr>
+        <p:txBody>
+          <a:bodyPr wrap="square" anchor="t" lIns="0" rIns="0" tIns="0" bIns="0">
+            <a:spAutoFit/>
+          </a:bodyPr>
+          <a:lstStyle/>
+          <a:p>
+            <a:pPr algn="l">
+              <a:lnSpc>
+                <a:spcPct val="100000"/>
+              </a:lnSpc>
+              <a:spcBef>
+                <a:spcPts val="0"/>
+              </a:spcBef>
+              <a:spcAft>
+                <a:spcPts val="600"/>
+              </a:spcAft>
+            </a:pPr>
+            <a:r>
+              <a:rPr sz="1900" b="1" i="0">
+                <a:solidFill>
+                  <a:srgbClr val="0B1F33"/>
+                </a:solidFill>
+                <a:latin typeface="Microsoft YaHei"/>
+              </a:rPr>
+              <a:t>工作流 Agent</a:t>
+            </a:r>
+          </a:p>
+        </p:txBody>
+      </p:sp>
+      <p:sp>
+        <p:nvSpPr>
+          <p:cNvPr id="20" name="TextBox 19"/>
+          <p:cNvSpPr txBox="1"/>
+          <p:nvPr/>
+        </p:nvSpPr>
+        <p:spPr>
+          <a:xfrm>
+            <a:off x="6583680" y="2807208"/>
+            <a:ext cx="4572000" cy="1083564"/>
+          </a:xfrm>
+          <a:prstGeom prst="rect">
+            <a:avLst/>
+          </a:prstGeom>
+          <a:noFill/>
+        </p:spPr>
+        <p:txBody>
+          <a:bodyPr wrap="square" anchor="t" lIns="0" rIns="0" tIns="0" bIns="0">
+            <a:spAutoFit/>
+          </a:bodyPr>
+          <a:lstStyle/>
+          <a:p>
+            <a:pPr algn="l">
+              <a:lnSpc>
+                <a:spcPct val="120000"/>
+              </a:lnSpc>
+              <a:spcBef>
+                <a:spcPts val="0"/>
+              </a:spcBef>
+              <a:spcAft>
+                <a:spcPts val="600"/>
+              </a:spcAft>
+            </a:pPr>
+            <a:r>
+              <a:rPr sz="1200" b="0" i="0">
+                <a:solidFill>
+                  <a:srgbClr val="5B6B7B"/>
+                </a:solidFill>
+                <a:latin typeface="Microsoft YaHei"/>
+              </a:rPr>
+              <a:t>IT/企业工作流自动化，Agent 化激进</a:t>
+            </a:r>
+          </a:p>
+        </p:txBody>
+      </p:sp>
+      <p:sp>
+        <p:nvSpPr>
+          <p:cNvPr id="21" name="Rounded Rectangle 20"/>
+          <p:cNvSpPr/>
+          <p:nvPr/>
+        </p:nvSpPr>
+        <p:spPr>
+          <a:xfrm>
+            <a:off x="777240" y="4311396"/>
+            <a:ext cx="5120640" cy="2272284"/>
+          </a:xfrm>
+          <a:prstGeom prst="roundRect">
+            <a:avLst>
+              <a:gd name="adj" fmla="val 6000"/>
+            </a:avLst>
+          </a:prstGeom>
+          <a:solidFill>
+            <a:srgbClr val="FFFFFF"/>
+          </a:solidFill>
+          <a:ln w="9525">
+            <a:solidFill>
+              <a:srgbClr val="D7DEE6"/>
+            </a:solidFill>
+          </a:ln>
+          <a:effectLst/>
+          <a:effectLst>
+            <a:outerShdw blurRad="90000" dist="40000" dir="5400000" rotWithShape="0">
+              <a:srgbClr val="0B1F33">
+                <a:alpha val="18000"/>
+              </a:srgbClr>
+            </a:outerShdw>
+          </a:effectLst>
+        </p:spPr>
+        <p:style>
+          <a:lnRef idx="1">
+            <a:schemeClr val="accent1"/>
+          </a:lnRef>
+          <a:fillRef idx="3">
+            <a:schemeClr val="accent1"/>
+          </a:fillRef>
+          <a:effectRef idx="2">
+            <a:schemeClr val="accent1"/>
+          </a:effectRef>
+          <a:fontRef idx="minor">
+            <a:schemeClr val="lt1"/>
+          </a:fontRef>
+        </p:style>
+        <p:txBody>
+          <a:bodyPr rtlCol="0" anchor="ctr"/>
+          <a:lstStyle/>
+          <a:p>
+            <a:pPr algn="ctr"/>
+          </a:p>
+        </p:txBody>
+      </p:sp>
+      <p:sp>
+        <p:nvSpPr>
+          <p:cNvPr id="22" name="Rounded Rectangle 21"/>
+          <p:cNvSpPr/>
+          <p:nvPr/>
+        </p:nvSpPr>
+        <p:spPr>
+          <a:xfrm>
+            <a:off x="777240" y="4311396"/>
+            <a:ext cx="91440" cy="2272284"/>
+          </a:xfrm>
+          <a:prstGeom prst="roundRect">
+            <a:avLst>
+              <a:gd name="adj" fmla="val 6000"/>
+            </a:avLst>
+          </a:prstGeom>
+          <a:solidFill>
+            <a:srgbClr val="7C5CFF"/>
+          </a:solidFill>
+          <a:ln>
+            <a:noFill/>
+          </a:ln>
+          <a:effectLst/>
+        </p:spPr>
+        <p:style>
+          <a:lnRef idx="1">
+            <a:schemeClr val="accent1"/>
+          </a:lnRef>
+          <a:fillRef idx="3">
+            <a:schemeClr val="accent1"/>
+          </a:fillRef>
+          <a:effectRef idx="2">
+            <a:schemeClr val="accent1"/>
+          </a:effectRef>
+          <a:fontRef idx="minor">
+            <a:schemeClr val="lt1"/>
+          </a:fontRef>
+        </p:style>
+        <p:txBody>
+          <a:bodyPr rtlCol="0" anchor="ctr"/>
+          <a:lstStyle/>
+          <a:p>
+            <a:pPr algn="ctr"/>
+          </a:p>
+        </p:txBody>
+      </p:sp>
+      <p:sp>
+        <p:nvSpPr>
+          <p:cNvPr id="23" name="TextBox 22"/>
+          <p:cNvSpPr txBox="1"/>
+          <p:nvPr/>
+        </p:nvSpPr>
+        <p:spPr>
+          <a:xfrm>
+            <a:off x="1097280" y="4494276"/>
+            <a:ext cx="4572000" cy="320040"/>
+          </a:xfrm>
+          <a:prstGeom prst="rect">
+            <a:avLst/>
+          </a:prstGeom>
+          <a:noFill/>
+        </p:spPr>
+        <p:txBody>
+          <a:bodyPr wrap="square" anchor="t" lIns="0" rIns="0" tIns="0" bIns="0">
+            <a:spAutoFit/>
+          </a:bodyPr>
+          <a:lstStyle/>
+          <a:p>
+            <a:pPr algn="l">
+              <a:lnSpc>
+                <a:spcPct val="100000"/>
+              </a:lnSpc>
+              <a:spcBef>
+                <a:spcPts val="0"/>
+              </a:spcBef>
+              <a:spcAft>
+                <a:spcPts val="600"/>
+              </a:spcAft>
+            </a:pPr>
+            <a:r>
+              <a:rPr sz="1200" b="1" i="0">
+                <a:solidFill>
+                  <a:srgbClr val="7C5CFF"/>
+                </a:solidFill>
+                <a:latin typeface="Microsoft YaHei"/>
+              </a:rPr>
+              <a:t>SAP/Oracle</a:t>
+            </a:r>
+          </a:p>
+        </p:txBody>
+      </p:sp>
+      <p:sp>
+        <p:nvSpPr>
+          <p:cNvPr id="24" name="TextBox 23"/>
+          <p:cNvSpPr txBox="1"/>
+          <p:nvPr/>
+        </p:nvSpPr>
+        <p:spPr>
+          <a:xfrm>
+            <a:off x="1097280" y="4805172"/>
+            <a:ext cx="4572000" cy="457200"/>
+          </a:xfrm>
+          <a:prstGeom prst="rect">
+            <a:avLst/>
+          </a:prstGeom>
+          <a:noFill/>
+        </p:spPr>
+        <p:txBody>
+          <a:bodyPr wrap="square" anchor="t" lIns="0" rIns="0" tIns="0" bIns="0">
+            <a:spAutoFit/>
+          </a:bodyPr>
+          <a:lstStyle/>
+          <a:p>
+            <a:pPr algn="l">
+              <a:lnSpc>
+                <a:spcPct val="100000"/>
+              </a:lnSpc>
+              <a:spcBef>
+                <a:spcPts val="0"/>
+              </a:spcBef>
+              <a:spcAft>
+                <a:spcPts val="600"/>
+              </a:spcAft>
+            </a:pPr>
+            <a:r>
+              <a:rPr sz="1900" b="1" i="0">
+                <a:solidFill>
+                  <a:srgbClr val="0B1F33"/>
+                </a:solidFill>
+                <a:latin typeface="Microsoft YaHei"/>
+              </a:rPr>
+              <a:t>ERP + AI</a:t>
+            </a:r>
+          </a:p>
+        </p:txBody>
+      </p:sp>
+      <p:sp>
+        <p:nvSpPr>
+          <p:cNvPr id="25" name="TextBox 24"/>
+          <p:cNvSpPr txBox="1"/>
+          <p:nvPr/>
+        </p:nvSpPr>
+        <p:spPr>
+          <a:xfrm>
+            <a:off x="1097280" y="5335524"/>
+            <a:ext cx="4572000" cy="1083564"/>
+          </a:xfrm>
+          <a:prstGeom prst="rect">
+            <a:avLst/>
+          </a:prstGeom>
+          <a:noFill/>
+        </p:spPr>
+        <p:txBody>
+          <a:bodyPr wrap="square" anchor="t" lIns="0" rIns="0" tIns="0" bIns="0">
+            <a:spAutoFit/>
+          </a:bodyPr>
+          <a:lstStyle/>
+          <a:p>
+            <a:pPr algn="l">
+              <a:lnSpc>
+                <a:spcPct val="120000"/>
+              </a:lnSpc>
+              <a:spcBef>
+                <a:spcPts val="0"/>
+              </a:spcBef>
+              <a:spcAft>
+                <a:spcPts val="600"/>
+              </a:spcAft>
+            </a:pPr>
+            <a:r>
+              <a:rPr sz="1200" b="0" i="0">
+                <a:solidFill>
+                  <a:srgbClr val="5B6B7B"/>
+                </a:solidFill>
+                <a:latin typeface="Microsoft YaHei"/>
+              </a:rPr>
+              <a:t>从 ERP 侧做业务 AI，数据纵深强</a:t>
+            </a:r>
+          </a:p>
+        </p:txBody>
+      </p:sp>
+      <p:sp>
+        <p:nvSpPr>
+          <p:cNvPr id="26" name="Rounded Rectangle 25"/>
+          <p:cNvSpPr/>
+          <p:nvPr/>
+        </p:nvSpPr>
+        <p:spPr>
+          <a:xfrm>
+            <a:off x="6263640" y="4311396"/>
+            <a:ext cx="5120640" cy="2272284"/>
+          </a:xfrm>
+          <a:prstGeom prst="roundRect">
+            <a:avLst>
+              <a:gd name="adj" fmla="val 6000"/>
+            </a:avLst>
+          </a:prstGeom>
+          <a:solidFill>
+            <a:srgbClr val="FFFFFF"/>
+          </a:solidFill>
+          <a:ln w="9525">
+            <a:solidFill>
+              <a:srgbClr val="D7DEE6"/>
+            </a:solidFill>
+          </a:ln>
+          <a:effectLst/>
+          <a:effectLst>
+            <a:outerShdw blurRad="90000" dist="40000" dir="5400000" rotWithShape="0">
+              <a:srgbClr val="0B1F33">
+                <a:alpha val="18000"/>
+              </a:srgbClr>
+            </a:outerShdw>
+          </a:effectLst>
+        </p:spPr>
+        <p:style>
+          <a:lnRef idx="1">
+            <a:schemeClr val="accent1"/>
+          </a:lnRef>
+          <a:fillRef idx="3">
+            <a:schemeClr val="accent1"/>
+          </a:fillRef>
+          <a:effectRef idx="2">
+            <a:schemeClr val="accent1"/>
+          </a:effectRef>
+          <a:fontRef idx="minor">
+            <a:schemeClr val="lt1"/>
+          </a:fontRef>
+        </p:style>
+        <p:txBody>
+          <a:bodyPr rtlCol="0" anchor="ctr"/>
+          <a:lstStyle/>
+          <a:p>
+            <a:pPr algn="ctr"/>
+          </a:p>
+        </p:txBody>
+      </p:sp>
+      <p:sp>
+        <p:nvSpPr>
+          <p:cNvPr id="27" name="Rounded Rectangle 26"/>
+          <p:cNvSpPr/>
+          <p:nvPr/>
+        </p:nvSpPr>
+        <p:spPr>
+          <a:xfrm>
+            <a:off x="6263640" y="4311396"/>
+            <a:ext cx="91440" cy="2272284"/>
+          </a:xfrm>
+          <a:prstGeom prst="roundRect">
+            <a:avLst>
+              <a:gd name="adj" fmla="val 6000"/>
+            </a:avLst>
+          </a:prstGeom>
+          <a:solidFill>
+            <a:srgbClr val="F59E0B"/>
+          </a:solidFill>
+          <a:ln>
+            <a:noFill/>
+          </a:ln>
+          <a:effectLst/>
+        </p:spPr>
+        <p:style>
+          <a:lnRef idx="1">
+            <a:schemeClr val="accent1"/>
+          </a:lnRef>
+          <a:fillRef idx="3">
+            <a:schemeClr val="accent1"/>
+          </a:fillRef>
+          <a:effectRef idx="2">
+            <a:schemeClr val="accent1"/>
+          </a:effectRef>
+          <a:fontRef idx="minor">
+            <a:schemeClr val="lt1"/>
+          </a:fontRef>
+        </p:style>
+        <p:txBody>
+          <a:bodyPr rtlCol="0" anchor="ctr"/>
+          <a:lstStyle/>
+          <a:p>
+            <a:pPr algn="ctr"/>
+          </a:p>
+        </p:txBody>
+      </p:sp>
+      <p:sp>
+        <p:nvSpPr>
+          <p:cNvPr id="28" name="TextBox 27"/>
+          <p:cNvSpPr txBox="1"/>
+          <p:nvPr/>
+        </p:nvSpPr>
+        <p:spPr>
+          <a:xfrm>
+            <a:off x="6583680" y="4494276"/>
+            <a:ext cx="4572000" cy="320040"/>
+          </a:xfrm>
+          <a:prstGeom prst="rect">
+            <a:avLst/>
+          </a:prstGeom>
+          <a:noFill/>
+        </p:spPr>
+        <p:txBody>
+          <a:bodyPr wrap="square" anchor="t" lIns="0" rIns="0" tIns="0" bIns="0">
+            <a:spAutoFit/>
+          </a:bodyPr>
+          <a:lstStyle/>
+          <a:p>
+            <a:pPr algn="l">
+              <a:lnSpc>
+                <a:spcPct val="100000"/>
+              </a:lnSpc>
+              <a:spcBef>
+                <a:spcPts val="0"/>
+              </a:spcBef>
+              <a:spcAft>
+                <a:spcPts val="600"/>
+              </a:spcAft>
+            </a:pPr>
+            <a:r>
+              <a:rPr sz="1200" b="1" i="0">
+                <a:solidFill>
+                  <a:srgbClr val="F59E0B"/>
+                </a:solidFill>
+                <a:latin typeface="Microsoft YaHei"/>
+              </a:rPr>
+              <a:t>Salesforce 定位</a:t>
+            </a:r>
+          </a:p>
+        </p:txBody>
+      </p:sp>
+      <p:sp>
+        <p:nvSpPr>
+          <p:cNvPr id="29" name="TextBox 28"/>
+          <p:cNvSpPr txBox="1"/>
+          <p:nvPr/>
+        </p:nvSpPr>
+        <p:spPr>
+          <a:xfrm>
+            <a:off x="6583680" y="4805172"/>
+            <a:ext cx="4572000" cy="457200"/>
+          </a:xfrm>
+          <a:prstGeom prst="rect">
+            <a:avLst/>
+          </a:prstGeom>
+          <a:noFill/>
+        </p:spPr>
+        <p:txBody>
+          <a:bodyPr wrap="square" anchor="t" lIns="0" rIns="0" tIns="0" bIns="0">
+            <a:spAutoFit/>
+          </a:bodyPr>
+          <a:lstStyle/>
+          <a:p>
+            <a:pPr algn="l">
+              <a:lnSpc>
+                <a:spcPct val="100000"/>
+              </a:lnSpc>
+              <a:spcBef>
+                <a:spcPts val="0"/>
+              </a:spcBef>
+              <a:spcAft>
+                <a:spcPts val="600"/>
+              </a:spcAft>
+            </a:pPr>
+            <a:r>
+              <a:rPr sz="1900" b="1" i="0">
+                <a:solidFill>
+                  <a:srgbClr val="0B1F33"/>
+                </a:solidFill>
+                <a:latin typeface="Microsoft YaHei"/>
+              </a:rPr>
+              <a:t>数据+Agentforce</a:t>
+            </a:r>
+          </a:p>
+        </p:txBody>
+      </p:sp>
+      <p:sp>
+        <p:nvSpPr>
+          <p:cNvPr id="30" name="TextBox 29"/>
+          <p:cNvSpPr txBox="1"/>
+          <p:nvPr/>
+        </p:nvSpPr>
+        <p:spPr>
+          <a:xfrm>
+            <a:off x="6583680" y="5335524"/>
+            <a:ext cx="4572000" cy="1083564"/>
+          </a:xfrm>
+          <a:prstGeom prst="rect">
+            <a:avLst/>
+          </a:prstGeom>
+          <a:noFill/>
+        </p:spPr>
+        <p:txBody>
+          <a:bodyPr wrap="square" anchor="t" lIns="0" rIns="0" tIns="0" bIns="0">
+            <a:spAutoFit/>
+          </a:bodyPr>
+          <a:lstStyle/>
+          <a:p>
+            <a:pPr algn="l">
+              <a:lnSpc>
+                <a:spcPct val="120000"/>
+              </a:lnSpc>
+              <a:spcBef>
+                <a:spcPts val="0"/>
+              </a:spcBef>
+              <a:spcAft>
+                <a:spcPts val="600"/>
+              </a:spcAft>
+            </a:pPr>
+            <a:r>
+              <a:rPr sz="1200" b="0" i="0">
+                <a:solidFill>
+                  <a:srgbClr val="5B6B7B"/>
+                </a:solidFill>
+                <a:latin typeface="Microsoft YaHei"/>
+              </a:rPr>
+              <a:t>客户数据护城河 + Agentforce + Trust Layer</a:t>
+            </a:r>
+          </a:p>
+        </p:txBody>
+      </p:sp>
+    </p:spTree>
+  </p:cSld>
+  <p:clrMapOvr>
+    <a:masterClrMapping/>
+  </p:clrMapOvr>
+</p:sld>
+</file>
+
+<file path=ppt/slides/slide11.xml><?xml version="1.0" encoding="utf-8"?>
+<p:sld xmlns:a="http://schemas.openxmlformats.org/drawingml/2006/main" xmlns:p="http://schemas.openxmlformats.org/presentationml/2006/main" xmlns:r="http://schemas.openxmlformats.org/officeDocument/2006/relationships">
+  <p:cSld>
+    <p:spTree>
+      <p:nvGrpSpPr>
+        <p:cNvPr id="1" name=""/>
+        <p:cNvGrpSpPr/>
+        <p:nvPr/>
+      </p:nvGrpSpPr>
+      <p:grpSpPr/>
+      <p:sp>
+        <p:nvSpPr>
+          <p:cNvPr id="2" name="Rectangle 1"/>
+          <p:cNvSpPr/>
+          <p:nvPr/>
+        </p:nvSpPr>
+        <p:spPr>
+          <a:xfrm>
+            <a:off x="0" y="0"/>
+            <a:ext cx="12191695" cy="1078992"/>
+          </a:xfrm>
+          <a:prstGeom prst="rect">
+            <a:avLst/>
+          </a:prstGeom>
+          <a:solidFill>
+            <a:srgbClr val="FFFFFF"/>
+          </a:solidFill>
+          <a:ln>
+            <a:noFill/>
+          </a:ln>
+          <a:effectLst/>
+        </p:spPr>
+        <p:style>
+          <a:lnRef idx="1">
+            <a:schemeClr val="accent1"/>
+          </a:lnRef>
+          <a:fillRef idx="3">
+            <a:schemeClr val="accent1"/>
+          </a:fillRef>
+          <a:effectRef idx="2">
+            <a:schemeClr val="accent1"/>
+          </a:effectRef>
+          <a:fontRef idx="minor">
+            <a:schemeClr val="lt1"/>
+          </a:fontRef>
+        </p:style>
+        <p:txBody>
+          <a:bodyPr rtlCol="0" anchor="ctr"/>
+          <a:lstStyle/>
+          <a:p>
+            <a:pPr algn="ctr"/>
+          </a:p>
+        </p:txBody>
+      </p:sp>
+      <p:sp>
+        <p:nvSpPr>
+          <p:cNvPr id="3" name="Rectangle 2"/>
+          <p:cNvSpPr/>
+          <p:nvPr/>
+        </p:nvSpPr>
+        <p:spPr>
+          <a:xfrm>
+            <a:off x="548640" y="310896"/>
+            <a:ext cx="109728" cy="457200"/>
+          </a:xfrm>
+          <a:prstGeom prst="rect">
+            <a:avLst/>
+          </a:prstGeom>
+          <a:solidFill>
+            <a:srgbClr val="1B6EF3"/>
+          </a:solidFill>
+          <a:ln>
+            <a:noFill/>
+          </a:ln>
+          <a:effectLst/>
+        </p:spPr>
+        <p:style>
+          <a:lnRef idx="1">
+            <a:schemeClr val="accent1"/>
+          </a:lnRef>
+          <a:fillRef idx="3">
+            <a:schemeClr val="accent1"/>
+          </a:fillRef>
+          <a:effectRef idx="2">
+            <a:schemeClr val="accent1"/>
+          </a:effectRef>
+          <a:fontRef idx="minor">
+            <a:schemeClr val="lt1"/>
+          </a:fontRef>
+        </p:style>
+        <p:txBody>
+          <a:bodyPr rtlCol="0" anchor="ctr"/>
+          <a:lstStyle/>
+          <a:p>
+            <a:pPr algn="ctr"/>
+          </a:p>
+        </p:txBody>
+      </p:sp>
+      <p:sp>
+        <p:nvSpPr>
+          <p:cNvPr id="4" name="TextBox 3"/>
+          <p:cNvSpPr txBox="1"/>
+          <p:nvPr/>
+        </p:nvSpPr>
+        <p:spPr>
+          <a:xfrm>
+            <a:off x="777240" y="237744"/>
+            <a:ext cx="9601200" cy="292608"/>
+          </a:xfrm>
+          <a:prstGeom prst="rect">
+            <a:avLst/>
+          </a:prstGeom>
+          <a:noFill/>
+        </p:spPr>
+        <p:txBody>
+          <a:bodyPr wrap="square" anchor="t" lIns="0" rIns="0" tIns="0" bIns="0">
+            <a:spAutoFit/>
+          </a:bodyPr>
+          <a:lstStyle/>
+          <a:p>
+            <a:pPr algn="l">
+              <a:lnSpc>
+                <a:spcPct val="100000"/>
+              </a:lnSpc>
+              <a:spcBef>
+                <a:spcPts val="0"/>
+              </a:spcBef>
+              <a:spcAft>
+                <a:spcPts val="600"/>
+              </a:spcAft>
+            </a:pPr>
+            <a:r>
+              <a:rPr sz="1150" b="1" i="0">
+                <a:solidFill>
+                  <a:srgbClr val="1B6EF3"/>
+                </a:solidFill>
+                <a:latin typeface="Microsoft YaHei"/>
+              </a:rPr>
+              <a:t>09 演进路线</a:t>
+            </a:r>
+          </a:p>
+        </p:txBody>
+      </p:sp>
+      <p:sp>
+        <p:nvSpPr>
+          <p:cNvPr id="5" name="TextBox 4"/>
+          <p:cNvSpPr txBox="1"/>
+          <p:nvPr/>
+        </p:nvSpPr>
+        <p:spPr>
+          <a:xfrm>
+            <a:off x="777240" y="475488"/>
+            <a:ext cx="10332720" cy="457200"/>
+          </a:xfrm>
+          <a:prstGeom prst="rect">
+            <a:avLst/>
+          </a:prstGeom>
+          <a:noFill/>
+        </p:spPr>
+        <p:txBody>
+          <a:bodyPr wrap="square" anchor="t" lIns="0" rIns="0" tIns="0" bIns="0">
+            <a:spAutoFit/>
+          </a:bodyPr>
+          <a:lstStyle/>
+          <a:p>
+            <a:pPr algn="l">
+              <a:lnSpc>
+                <a:spcPct val="100000"/>
+              </a:lnSpc>
+              <a:spcBef>
+                <a:spcPts val="0"/>
+              </a:spcBef>
+              <a:spcAft>
+                <a:spcPts val="600"/>
+              </a:spcAft>
+            </a:pPr>
+            <a:r>
+              <a:rPr sz="2200" b="1" i="0">
+                <a:solidFill>
+                  <a:srgbClr val="0B1F33"/>
+                </a:solidFill>
+                <a:latin typeface="Microsoft YaHei"/>
+              </a:rPr>
+              <a:t>从云 CRM 到结果型 Agentic SaaS</a:t>
+            </a:r>
+          </a:p>
+        </p:txBody>
+      </p:sp>
+      <p:sp>
+        <p:nvSpPr>
+          <p:cNvPr id="6" name="TextBox 5"/>
+          <p:cNvSpPr txBox="1"/>
+          <p:nvPr/>
+        </p:nvSpPr>
+        <p:spPr>
+          <a:xfrm>
+            <a:off x="10911535" y="384048"/>
+            <a:ext cx="822960" cy="365760"/>
+          </a:xfrm>
+          <a:prstGeom prst="rect">
+            <a:avLst/>
+          </a:prstGeom>
+          <a:noFill/>
+        </p:spPr>
+        <p:txBody>
+          <a:bodyPr wrap="square" anchor="t" lIns="0" rIns="0" tIns="0" bIns="0">
+            <a:spAutoFit/>
+          </a:bodyPr>
+          <a:lstStyle/>
+          <a:p>
+            <a:pPr algn="r">
+              <a:lnSpc>
+                <a:spcPct val="100000"/>
+              </a:lnSpc>
+              <a:spcBef>
+                <a:spcPts val="0"/>
+              </a:spcBef>
+              <a:spcAft>
+                <a:spcPts val="600"/>
+              </a:spcAft>
+            </a:pPr>
+            <a:r>
+              <a:rPr sz="1700" b="1" i="0">
+                <a:solidFill>
+                  <a:srgbClr val="1B6EF3"/>
+                </a:solidFill>
+                <a:latin typeface="Microsoft YaHei"/>
+              </a:rPr>
+              <a:t>11</a:t>
+            </a:r>
+            <a:r>
+              <a:rPr sz="1100" b="0" i="0">
+                <a:solidFill>
+                  <a:srgbClr val="8A98A6"/>
+                </a:solidFill>
+                <a:latin typeface="Microsoft YaHei"/>
+              </a:rPr>
+              <a:t> / 14</a:t>
+            </a:r>
+          </a:p>
+        </p:txBody>
+      </p:sp>
+      <p:sp>
+        <p:nvSpPr>
+          <p:cNvPr id="7" name="Rectangle 6"/>
+          <p:cNvSpPr/>
+          <p:nvPr/>
+        </p:nvSpPr>
+        <p:spPr>
+          <a:xfrm>
+            <a:off x="0" y="1078992"/>
+            <a:ext cx="12191695" cy="15240"/>
+          </a:xfrm>
+          <a:prstGeom prst="rect">
+            <a:avLst/>
+          </a:prstGeom>
+          <a:solidFill>
+            <a:srgbClr val="D7DEE6"/>
+          </a:solidFill>
+          <a:ln>
+            <a:noFill/>
+          </a:ln>
+          <a:effectLst/>
+        </p:spPr>
+        <p:style>
+          <a:lnRef idx="1">
+            <a:schemeClr val="accent1"/>
+          </a:lnRef>
+          <a:fillRef idx="3">
+            <a:schemeClr val="accent1"/>
+          </a:fillRef>
+          <a:effectRef idx="2">
+            <a:schemeClr val="accent1"/>
+          </a:effectRef>
+          <a:fontRef idx="minor">
+            <a:schemeClr val="lt1"/>
+          </a:fontRef>
+        </p:style>
+        <p:txBody>
+          <a:bodyPr rtlCol="0" anchor="ctr"/>
+          <a:lstStyle/>
+          <a:p>
+            <a:pPr algn="ctr"/>
+          </a:p>
+        </p:txBody>
+      </p:sp>
+      <p:sp>
+        <p:nvSpPr>
+          <p:cNvPr id="8" name="Rectangle 7"/>
+          <p:cNvSpPr/>
+          <p:nvPr/>
+        </p:nvSpPr>
+        <p:spPr>
+          <a:xfrm>
+            <a:off x="0" y="6565392"/>
+            <a:ext cx="12191695" cy="292608"/>
+          </a:xfrm>
+          <a:prstGeom prst="rect">
+            <a:avLst/>
+          </a:prstGeom>
+          <a:solidFill>
+            <a:srgbClr val="0B1F33"/>
+          </a:solidFill>
+          <a:ln>
+            <a:noFill/>
+          </a:ln>
+          <a:effectLst/>
+        </p:spPr>
+        <p:style>
+          <a:lnRef idx="1">
+            <a:schemeClr val="accent1"/>
+          </a:lnRef>
+          <a:fillRef idx="3">
+            <a:schemeClr val="accent1"/>
+          </a:fillRef>
+          <a:effectRef idx="2">
+            <a:schemeClr val="accent1"/>
+          </a:effectRef>
+          <a:fontRef idx="minor">
+            <a:schemeClr val="lt1"/>
+          </a:fontRef>
+        </p:style>
+        <p:txBody>
+          <a:bodyPr rtlCol="0" anchor="ctr"/>
+          <a:lstStyle/>
+          <a:p>
+            <a:pPr algn="ctr"/>
+          </a:p>
+        </p:txBody>
+      </p:sp>
+      <p:sp>
+        <p:nvSpPr>
+          <p:cNvPr id="9" name="TextBox 8"/>
+          <p:cNvSpPr txBox="1"/>
+          <p:nvPr/>
+        </p:nvSpPr>
+        <p:spPr>
+          <a:xfrm>
+            <a:off x="548640" y="6583680"/>
+            <a:ext cx="8229600" cy="256032"/>
+          </a:xfrm>
+          <a:prstGeom prst="rect">
+            <a:avLst/>
+          </a:prstGeom>
+          <a:noFill/>
+        </p:spPr>
+        <p:txBody>
+          <a:bodyPr wrap="square" anchor="ctr" lIns="0" rIns="0" tIns="0" bIns="0">
+            <a:spAutoFit/>
+          </a:bodyPr>
+          <a:lstStyle/>
+          <a:p>
+            <a:pPr algn="l">
+              <a:lnSpc>
+                <a:spcPct val="100000"/>
+              </a:lnSpc>
+              <a:spcBef>
+                <a:spcPts val="0"/>
+              </a:spcBef>
+              <a:spcAft>
+                <a:spcPts val="600"/>
+              </a:spcAft>
+            </a:pPr>
+            <a:r>
+              <a:rPr sz="850" b="0" i="0">
+                <a:solidFill>
+                  <a:srgbClr val="C2CEDB"/>
+                </a:solidFill>
+                <a:latin typeface="Microsoft YaHei"/>
+              </a:rPr>
+              <a:t>AI 产业六层模型 · 应用层 · Salesforce</a:t>
+            </a:r>
+          </a:p>
+        </p:txBody>
+      </p:sp>
+      <p:sp>
+        <p:nvSpPr>
+          <p:cNvPr id="10" name="Rounded Rectangle 9"/>
+          <p:cNvSpPr/>
+          <p:nvPr/>
+        </p:nvSpPr>
+        <p:spPr>
+          <a:xfrm>
+            <a:off x="777240" y="1508760"/>
+            <a:ext cx="2528316" cy="4709160"/>
+          </a:xfrm>
+          <a:prstGeom prst="roundRect">
+            <a:avLst>
+              <a:gd name="adj" fmla="val 6000"/>
+            </a:avLst>
+          </a:prstGeom>
+          <a:solidFill>
+            <a:srgbClr val="FFFFFF"/>
+          </a:solidFill>
+          <a:ln w="9525">
+            <a:solidFill>
+              <a:srgbClr val="D7DEE6"/>
+            </a:solidFill>
+          </a:ln>
+          <a:effectLst/>
+          <a:effectLst>
+            <a:outerShdw blurRad="90000" dist="40000" dir="5400000" rotWithShape="0">
+              <a:srgbClr val="0B1F33">
+                <a:alpha val="18000"/>
+              </a:srgbClr>
+            </a:outerShdw>
+          </a:effectLst>
+        </p:spPr>
+        <p:style>
+          <a:lnRef idx="1">
+            <a:schemeClr val="accent1"/>
+          </a:lnRef>
+          <a:fillRef idx="3">
+            <a:schemeClr val="accent1"/>
+          </a:fillRef>
+          <a:effectRef idx="2">
+            <a:schemeClr val="accent1"/>
+          </a:effectRef>
+          <a:fontRef idx="minor">
+            <a:schemeClr val="lt1"/>
+          </a:fontRef>
+        </p:style>
+        <p:txBody>
+          <a:bodyPr rtlCol="0" anchor="ctr"/>
+          <a:lstStyle/>
+          <a:p>
+            <a:pPr algn="ctr"/>
+          </a:p>
+        </p:txBody>
+      </p:sp>
+      <p:sp>
+        <p:nvSpPr>
+          <p:cNvPr id="11" name="Rounded Rectangle 10"/>
+          <p:cNvSpPr/>
+          <p:nvPr/>
+        </p:nvSpPr>
+        <p:spPr>
+          <a:xfrm>
+            <a:off x="777240" y="1508760"/>
+            <a:ext cx="2528316" cy="914400"/>
+          </a:xfrm>
+          <a:prstGeom prst="roundRect">
+            <a:avLst>
+              <a:gd name="adj" fmla="val 6000"/>
+            </a:avLst>
+          </a:prstGeom>
+          <a:solidFill>
+            <a:srgbClr val="14B8A6"/>
+          </a:solidFill>
+          <a:ln>
+            <a:noFill/>
+          </a:ln>
+          <a:effectLst/>
+        </p:spPr>
+        <p:style>
+          <a:lnRef idx="1">
+            <a:schemeClr val="accent1"/>
+          </a:lnRef>
+          <a:fillRef idx="3">
+            <a:schemeClr val="accent1"/>
+          </a:fillRef>
+          <a:effectRef idx="2">
+            <a:schemeClr val="accent1"/>
+          </a:effectRef>
+          <a:fontRef idx="minor">
+            <a:schemeClr val="lt1"/>
+          </a:fontRef>
+        </p:style>
+        <p:txBody>
+          <a:bodyPr rtlCol="0" anchor="ctr"/>
+          <a:lstStyle/>
+          <a:p>
+            <a:pPr algn="ctr"/>
+          </a:p>
+        </p:txBody>
+      </p:sp>
+      <p:sp>
+        <p:nvSpPr>
+          <p:cNvPr id="12" name="TextBox 11"/>
+          <p:cNvSpPr txBox="1"/>
+          <p:nvPr/>
+        </p:nvSpPr>
+        <p:spPr>
+          <a:xfrm>
+            <a:off x="777240" y="1636776"/>
+            <a:ext cx="2528316" cy="320040"/>
+          </a:xfrm>
+          <a:prstGeom prst="rect">
+            <a:avLst/>
+          </a:prstGeom>
+          <a:noFill/>
+        </p:spPr>
+        <p:txBody>
+          <a:bodyPr wrap="square" anchor="t" lIns="0" rIns="0" tIns="0" bIns="0">
+            <a:spAutoFit/>
+          </a:bodyPr>
+          <a:lstStyle/>
+          <a:p>
+            <a:pPr algn="ctr">
+              <a:lnSpc>
+                <a:spcPct val="100000"/>
+              </a:lnSpc>
+              <a:spcBef>
+                <a:spcPts val="0"/>
+              </a:spcBef>
+              <a:spcAft>
+                <a:spcPts val="600"/>
+              </a:spcAft>
+            </a:pPr>
+            <a:r>
+              <a:rPr sz="1200" b="1" i="0">
+                <a:solidFill>
+                  <a:srgbClr val="FFFFFF"/>
+                </a:solidFill>
+                <a:latin typeface="Microsoft YaHei"/>
+              </a:rPr>
+              <a:t>1999</a:t>
+            </a:r>
+          </a:p>
+        </p:txBody>
+      </p:sp>
+      <p:sp>
+        <p:nvSpPr>
+          <p:cNvPr id="13" name="TextBox 12"/>
+          <p:cNvSpPr txBox="1"/>
+          <p:nvPr/>
+        </p:nvSpPr>
+        <p:spPr>
+          <a:xfrm>
+            <a:off x="777240" y="1929384"/>
+            <a:ext cx="2528316" cy="457200"/>
+          </a:xfrm>
+          <a:prstGeom prst="rect">
+            <a:avLst/>
+          </a:prstGeom>
+          <a:noFill/>
+        </p:spPr>
+        <p:txBody>
+          <a:bodyPr wrap="square" anchor="t" lIns="0" rIns="0" tIns="0" bIns="0">
+            <a:spAutoFit/>
+          </a:bodyPr>
+          <a:lstStyle/>
+          <a:p>
+            <a:pPr algn="ctr">
+              <a:lnSpc>
+                <a:spcPct val="100000"/>
+              </a:lnSpc>
+              <a:spcBef>
+                <a:spcPts val="0"/>
+              </a:spcBef>
+              <a:spcAft>
+                <a:spcPts val="600"/>
+              </a:spcAft>
+            </a:pPr>
+            <a:r>
+              <a:rPr sz="1500" b="1" i="0">
+                <a:solidFill>
+                  <a:srgbClr val="FFFFFF"/>
+                </a:solidFill>
+                <a:latin typeface="Microsoft YaHei"/>
+              </a:rPr>
+              <a:t>云 CRM 开创</a:t>
+            </a:r>
+          </a:p>
+        </p:txBody>
+      </p:sp>
+      <p:sp>
+        <p:nvSpPr>
+          <p:cNvPr id="14" name="TextBox 13"/>
+          <p:cNvSpPr txBox="1"/>
+          <p:nvPr/>
+        </p:nvSpPr>
+        <p:spPr>
+          <a:xfrm>
+            <a:off x="978408" y="2606040"/>
+            <a:ext cx="2125980" cy="2880360"/>
+          </a:xfrm>
+          <a:prstGeom prst="rect">
+            <a:avLst/>
+          </a:prstGeom>
+          <a:noFill/>
+        </p:spPr>
+        <p:txBody>
+          <a:bodyPr wrap="square" anchor="t" lIns="0" rIns="0" tIns="0" bIns="0">
+            <a:spAutoFit/>
+          </a:bodyPr>
+          <a:lstStyle/>
+          <a:p>
+            <a:pPr algn="l">
+              <a:lnSpc>
+                <a:spcPct val="122000"/>
+              </a:lnSpc>
+              <a:spcBef>
+                <a:spcPts val="0"/>
+              </a:spcBef>
+              <a:spcAft>
+                <a:spcPts val="600"/>
+              </a:spcAft>
+            </a:pPr>
+            <a:r>
+              <a:rPr sz="1200" b="0" i="0">
+                <a:solidFill>
+                  <a:srgbClr val="5B6B7B"/>
+                </a:solidFill>
+                <a:latin typeface="Microsoft YaHei"/>
+              </a:rPr>
+              <a:t>SaaS 模式开创者，按席位订阅卖软件</a:t>
+            </a:r>
+          </a:p>
+        </p:txBody>
+      </p:sp>
+      <p:sp>
+        <p:nvSpPr>
+          <p:cNvPr id="15" name="Oval 14"/>
+          <p:cNvSpPr/>
+          <p:nvPr/>
+        </p:nvSpPr>
+        <p:spPr>
+          <a:xfrm>
+            <a:off x="1748790" y="5468112"/>
+            <a:ext cx="585216" cy="585216"/>
+          </a:xfrm>
+          <a:prstGeom prst="ellipse">
+            <a:avLst/>
+          </a:prstGeom>
+          <a:solidFill>
+            <a:srgbClr val="F4F7FB"/>
+          </a:solidFill>
+          <a:ln w="19050">
+            <a:solidFill>
+              <a:srgbClr val="14B8A6"/>
+            </a:solidFill>
+          </a:ln>
+          <a:effectLst/>
+        </p:spPr>
+        <p:style>
+          <a:lnRef idx="1">
+            <a:schemeClr val="accent1"/>
+          </a:lnRef>
+          <a:fillRef idx="3">
+            <a:schemeClr val="accent1"/>
+          </a:fillRef>
+          <a:effectRef idx="2">
+            <a:schemeClr val="accent1"/>
+          </a:effectRef>
+          <a:fontRef idx="minor">
+            <a:schemeClr val="lt1"/>
+          </a:fontRef>
+        </p:style>
+        <p:txBody>
+          <a:bodyPr rtlCol="0" anchor="ctr"/>
+          <a:lstStyle/>
+          <a:p>
+            <a:pPr algn="ctr"/>
+          </a:p>
+        </p:txBody>
+      </p:sp>
+      <p:sp>
+        <p:nvSpPr>
+          <p:cNvPr id="16" name="TextBox 15"/>
+          <p:cNvSpPr txBox="1"/>
+          <p:nvPr/>
+        </p:nvSpPr>
+        <p:spPr>
+          <a:xfrm>
+            <a:off x="1748790" y="5468112"/>
+            <a:ext cx="585216" cy="585216"/>
+          </a:xfrm>
+          <a:prstGeom prst="rect">
+            <a:avLst/>
+          </a:prstGeom>
+          <a:noFill/>
+        </p:spPr>
+        <p:txBody>
+          <a:bodyPr wrap="square" anchor="ctr" lIns="0" rIns="0" tIns="0" bIns="0">
+            <a:spAutoFit/>
+          </a:bodyPr>
+          <a:lstStyle/>
+          <a:p>
+            <a:pPr algn="ctr">
+              <a:lnSpc>
+                <a:spcPct val="100000"/>
+              </a:lnSpc>
+              <a:spcBef>
+                <a:spcPts val="0"/>
+              </a:spcBef>
+              <a:spcAft>
+                <a:spcPts val="600"/>
+              </a:spcAft>
+            </a:pPr>
+            <a:r>
+              <a:rPr sz="2000" b="1" i="0">
+                <a:solidFill>
+                  <a:srgbClr val="14B8A6"/>
+                </a:solidFill>
+                <a:latin typeface="Microsoft YaHei"/>
+              </a:rPr>
+              <a:t>1</a:t>
+            </a:r>
+          </a:p>
+        </p:txBody>
+      </p:sp>
+      <p:sp>
+        <p:nvSpPr>
+          <p:cNvPr id="17" name="TextBox 16"/>
+          <p:cNvSpPr txBox="1"/>
+          <p:nvPr/>
+        </p:nvSpPr>
+        <p:spPr>
+          <a:xfrm>
+            <a:off x="3305556" y="3680460"/>
+            <a:ext cx="164592" cy="365760"/>
+          </a:xfrm>
+          <a:prstGeom prst="rect">
+            <a:avLst/>
+          </a:prstGeom>
+          <a:noFill/>
+        </p:spPr>
+        <p:txBody>
+          <a:bodyPr wrap="square" anchor="t" lIns="0" rIns="0" tIns="0" bIns="0">
+            <a:spAutoFit/>
+          </a:bodyPr>
+          <a:lstStyle/>
+          <a:p>
+            <a:pPr algn="ctr">
+              <a:lnSpc>
+                <a:spcPct val="100000"/>
+              </a:lnSpc>
+              <a:spcBef>
+                <a:spcPts val="0"/>
+              </a:spcBef>
+              <a:spcAft>
+                <a:spcPts val="600"/>
+              </a:spcAft>
+            </a:pPr>
+            <a:r>
+              <a:rPr sz="2200" b="1" i="0">
+                <a:solidFill>
+                  <a:srgbClr val="8A98A6"/>
+                </a:solidFill>
+                <a:latin typeface="Microsoft YaHei"/>
+              </a:rPr>
+              <a:t>›</a:t>
+            </a:r>
+          </a:p>
+        </p:txBody>
+      </p:sp>
+      <p:sp>
+        <p:nvSpPr>
+          <p:cNvPr id="18" name="Rounded Rectangle 17"/>
+          <p:cNvSpPr/>
+          <p:nvPr/>
+        </p:nvSpPr>
+        <p:spPr>
+          <a:xfrm>
+            <a:off x="3470148" y="1508760"/>
+            <a:ext cx="2528316" cy="4709160"/>
+          </a:xfrm>
+          <a:prstGeom prst="roundRect">
+            <a:avLst>
+              <a:gd name="adj" fmla="val 6000"/>
+            </a:avLst>
+          </a:prstGeom>
+          <a:solidFill>
+            <a:srgbClr val="FFFFFF"/>
+          </a:solidFill>
+          <a:ln w="9525">
+            <a:solidFill>
+              <a:srgbClr val="D7DEE6"/>
+            </a:solidFill>
+          </a:ln>
+          <a:effectLst/>
+          <a:effectLst>
+            <a:outerShdw blurRad="90000" dist="40000" dir="5400000" rotWithShape="0">
+              <a:srgbClr val="0B1F33">
+                <a:alpha val="18000"/>
+              </a:srgbClr>
+            </a:outerShdw>
+          </a:effectLst>
+        </p:spPr>
+        <p:style>
+          <a:lnRef idx="1">
+            <a:schemeClr val="accent1"/>
+          </a:lnRef>
+          <a:fillRef idx="3">
+            <a:schemeClr val="accent1"/>
+          </a:fillRef>
+          <a:effectRef idx="2">
+            <a:schemeClr val="accent1"/>
+          </a:effectRef>
+          <a:fontRef idx="minor">
+            <a:schemeClr val="lt1"/>
+          </a:fontRef>
+        </p:style>
+        <p:txBody>
+          <a:bodyPr rtlCol="0" anchor="ctr"/>
+          <a:lstStyle/>
+          <a:p>
+            <a:pPr algn="ctr"/>
+          </a:p>
+        </p:txBody>
+      </p:sp>
+      <p:sp>
+        <p:nvSpPr>
+          <p:cNvPr id="19" name="Rounded Rectangle 18"/>
+          <p:cNvSpPr/>
+          <p:nvPr/>
+        </p:nvSpPr>
+        <p:spPr>
+          <a:xfrm>
+            <a:off x="3470148" y="1508760"/>
+            <a:ext cx="2528316" cy="914400"/>
+          </a:xfrm>
+          <a:prstGeom prst="roundRect">
+            <a:avLst>
+              <a:gd name="adj" fmla="val 6000"/>
+            </a:avLst>
+          </a:prstGeom>
+          <a:solidFill>
+            <a:srgbClr val="1B6EF3"/>
+          </a:solidFill>
+          <a:ln>
+            <a:noFill/>
+          </a:ln>
+          <a:effectLst/>
+        </p:spPr>
+        <p:style>
+          <a:lnRef idx="1">
+            <a:schemeClr val="accent1"/>
+          </a:lnRef>
+          <a:fillRef idx="3">
+            <a:schemeClr val="accent1"/>
+          </a:fillRef>
+          <a:effectRef idx="2">
+            <a:schemeClr val="accent1"/>
+          </a:effectRef>
+          <a:fontRef idx="minor">
+            <a:schemeClr val="lt1"/>
+          </a:fontRef>
+        </p:style>
+        <p:txBody>
+          <a:bodyPr rtlCol="0" anchor="ctr"/>
+          <a:lstStyle/>
+          <a:p>
+            <a:pPr algn="ctr"/>
+          </a:p>
+        </p:txBody>
+      </p:sp>
+      <p:sp>
+        <p:nvSpPr>
+          <p:cNvPr id="20" name="TextBox 19"/>
+          <p:cNvSpPr txBox="1"/>
+          <p:nvPr/>
+        </p:nvSpPr>
+        <p:spPr>
+          <a:xfrm>
+            <a:off x="3470148" y="1636776"/>
+            <a:ext cx="2528316" cy="320040"/>
+          </a:xfrm>
+          <a:prstGeom prst="rect">
+            <a:avLst/>
+          </a:prstGeom>
+          <a:noFill/>
+        </p:spPr>
+        <p:txBody>
+          <a:bodyPr wrap="square" anchor="t" lIns="0" rIns="0" tIns="0" bIns="0">
+            <a:spAutoFit/>
+          </a:bodyPr>
+          <a:lstStyle/>
+          <a:p>
+            <a:pPr algn="ctr">
+              <a:lnSpc>
+                <a:spcPct val="100000"/>
+              </a:lnSpc>
+              <a:spcBef>
+                <a:spcPts val="0"/>
+              </a:spcBef>
+              <a:spcAft>
+                <a:spcPts val="600"/>
+              </a:spcAft>
+            </a:pPr>
+            <a:r>
+              <a:rPr sz="1200" b="1" i="0">
+                <a:solidFill>
+                  <a:srgbClr val="FFFFFF"/>
+                </a:solidFill>
+                <a:latin typeface="Microsoft YaHei"/>
+              </a:rPr>
+              <a:t>2010s</a:t>
+            </a:r>
+          </a:p>
+        </p:txBody>
+      </p:sp>
+      <p:sp>
+        <p:nvSpPr>
+          <p:cNvPr id="21" name="TextBox 20"/>
+          <p:cNvSpPr txBox="1"/>
+          <p:nvPr/>
+        </p:nvSpPr>
+        <p:spPr>
+          <a:xfrm>
+            <a:off x="3470148" y="1929384"/>
+            <a:ext cx="2528316" cy="457200"/>
+          </a:xfrm>
+          <a:prstGeom prst="rect">
+            <a:avLst/>
+          </a:prstGeom>
+          <a:noFill/>
+        </p:spPr>
+        <p:txBody>
+          <a:bodyPr wrap="square" anchor="t" lIns="0" rIns="0" tIns="0" bIns="0">
+            <a:spAutoFit/>
+          </a:bodyPr>
+          <a:lstStyle/>
+          <a:p>
+            <a:pPr algn="ctr">
+              <a:lnSpc>
+                <a:spcPct val="100000"/>
+              </a:lnSpc>
+              <a:spcBef>
+                <a:spcPts val="0"/>
+              </a:spcBef>
+              <a:spcAft>
+                <a:spcPts val="600"/>
+              </a:spcAft>
+            </a:pPr>
+            <a:r>
+              <a:rPr sz="1500" b="1" i="0">
+                <a:solidFill>
+                  <a:srgbClr val="FFFFFF"/>
+                </a:solidFill>
+                <a:latin typeface="Microsoft YaHei"/>
+              </a:rPr>
+              <a:t>Customer 360</a:t>
+            </a:r>
+          </a:p>
+        </p:txBody>
+      </p:sp>
+      <p:sp>
+        <p:nvSpPr>
+          <p:cNvPr id="22" name="TextBox 21"/>
+          <p:cNvSpPr txBox="1"/>
+          <p:nvPr/>
+        </p:nvSpPr>
+        <p:spPr>
+          <a:xfrm>
+            <a:off x="3671316" y="2606040"/>
+            <a:ext cx="2125980" cy="2880360"/>
+          </a:xfrm>
+          <a:prstGeom prst="rect">
+            <a:avLst/>
+          </a:prstGeom>
+          <a:noFill/>
+        </p:spPr>
+        <p:txBody>
+          <a:bodyPr wrap="square" anchor="t" lIns="0" rIns="0" tIns="0" bIns="0">
+            <a:spAutoFit/>
+          </a:bodyPr>
+          <a:lstStyle/>
+          <a:p>
+            <a:pPr algn="l">
+              <a:lnSpc>
+                <a:spcPct val="122000"/>
+              </a:lnSpc>
+              <a:spcBef>
+                <a:spcPts val="0"/>
+              </a:spcBef>
+              <a:spcAft>
+                <a:spcPts val="600"/>
+              </a:spcAft>
+            </a:pPr>
+            <a:r>
+              <a:rPr sz="1200" b="0" i="0">
+                <a:solidFill>
+                  <a:srgbClr val="5B6B7B"/>
+                </a:solidFill>
+                <a:latin typeface="Microsoft YaHei"/>
+              </a:rPr>
+              <a:t>整合销售/服务/营销，Einstein 引入 AI</a:t>
+            </a:r>
+          </a:p>
+        </p:txBody>
+      </p:sp>
+      <p:sp>
+        <p:nvSpPr>
+          <p:cNvPr id="23" name="Oval 22"/>
+          <p:cNvSpPr/>
+          <p:nvPr/>
+        </p:nvSpPr>
+        <p:spPr>
+          <a:xfrm>
+            <a:off x="4441698" y="5468112"/>
+            <a:ext cx="585216" cy="585216"/>
+          </a:xfrm>
+          <a:prstGeom prst="ellipse">
+            <a:avLst/>
+          </a:prstGeom>
+          <a:solidFill>
+            <a:srgbClr val="F4F7FB"/>
+          </a:solidFill>
+          <a:ln w="19050">
+            <a:solidFill>
+              <a:srgbClr val="1B6EF3"/>
+            </a:solidFill>
+          </a:ln>
+          <a:effectLst/>
+        </p:spPr>
+        <p:style>
+          <a:lnRef idx="1">
+            <a:schemeClr val="accent1"/>
+          </a:lnRef>
+          <a:fillRef idx="3">
+            <a:schemeClr val="accent1"/>
+          </a:fillRef>
+          <a:effectRef idx="2">
+            <a:schemeClr val="accent1"/>
+          </a:effectRef>
+          <a:fontRef idx="minor">
+            <a:schemeClr val="lt1"/>
+          </a:fontRef>
+        </p:style>
+        <p:txBody>
+          <a:bodyPr rtlCol="0" anchor="ctr"/>
+          <a:lstStyle/>
+          <a:p>
+            <a:pPr algn="ctr"/>
+          </a:p>
+        </p:txBody>
+      </p:sp>
+      <p:sp>
+        <p:nvSpPr>
+          <p:cNvPr id="24" name="TextBox 23"/>
+          <p:cNvSpPr txBox="1"/>
+          <p:nvPr/>
+        </p:nvSpPr>
+        <p:spPr>
+          <a:xfrm>
+            <a:off x="4441698" y="5468112"/>
+            <a:ext cx="585216" cy="585216"/>
+          </a:xfrm>
+          <a:prstGeom prst="rect">
+            <a:avLst/>
+          </a:prstGeom>
+          <a:noFill/>
+        </p:spPr>
+        <p:txBody>
+          <a:bodyPr wrap="square" anchor="ctr" lIns="0" rIns="0" tIns="0" bIns="0">
+            <a:spAutoFit/>
+          </a:bodyPr>
+          <a:lstStyle/>
+          <a:p>
+            <a:pPr algn="ctr">
+              <a:lnSpc>
+                <a:spcPct val="100000"/>
+              </a:lnSpc>
+              <a:spcBef>
+                <a:spcPts val="0"/>
+              </a:spcBef>
+              <a:spcAft>
+                <a:spcPts val="600"/>
+              </a:spcAft>
+            </a:pPr>
+            <a:r>
+              <a:rPr sz="2000" b="1" i="0">
+                <a:solidFill>
+                  <a:srgbClr val="1B6EF3"/>
+                </a:solidFill>
+                <a:latin typeface="Microsoft YaHei"/>
+              </a:rPr>
+              <a:t>2</a:t>
+            </a:r>
+          </a:p>
+        </p:txBody>
+      </p:sp>
+      <p:sp>
+        <p:nvSpPr>
+          <p:cNvPr id="25" name="TextBox 24"/>
+          <p:cNvSpPr txBox="1"/>
+          <p:nvPr/>
+        </p:nvSpPr>
+        <p:spPr>
+          <a:xfrm>
+            <a:off x="5998464" y="3680460"/>
+            <a:ext cx="164592" cy="365760"/>
+          </a:xfrm>
+          <a:prstGeom prst="rect">
+            <a:avLst/>
+          </a:prstGeom>
+          <a:noFill/>
+        </p:spPr>
+        <p:txBody>
+          <a:bodyPr wrap="square" anchor="t" lIns="0" rIns="0" tIns="0" bIns="0">
+            <a:spAutoFit/>
+          </a:bodyPr>
+          <a:lstStyle/>
+          <a:p>
+            <a:pPr algn="ctr">
+              <a:lnSpc>
+                <a:spcPct val="100000"/>
+              </a:lnSpc>
+              <a:spcBef>
+                <a:spcPts val="0"/>
+              </a:spcBef>
+              <a:spcAft>
+                <a:spcPts val="600"/>
+              </a:spcAft>
+            </a:pPr>
+            <a:r>
+              <a:rPr sz="2200" b="1" i="0">
+                <a:solidFill>
+                  <a:srgbClr val="8A98A6"/>
+                </a:solidFill>
+                <a:latin typeface="Microsoft YaHei"/>
+              </a:rPr>
+              <a:t>›</a:t>
+            </a:r>
+          </a:p>
+        </p:txBody>
+      </p:sp>
+      <p:sp>
+        <p:nvSpPr>
+          <p:cNvPr id="26" name="Rounded Rectangle 25"/>
+          <p:cNvSpPr/>
+          <p:nvPr/>
+        </p:nvSpPr>
+        <p:spPr>
+          <a:xfrm>
+            <a:off x="6163056" y="1508760"/>
+            <a:ext cx="2528316" cy="4709160"/>
+          </a:xfrm>
+          <a:prstGeom prst="roundRect">
+            <a:avLst>
+              <a:gd name="adj" fmla="val 6000"/>
+            </a:avLst>
+          </a:prstGeom>
+          <a:solidFill>
+            <a:srgbClr val="FFFFFF"/>
+          </a:solidFill>
+          <a:ln w="9525">
+            <a:solidFill>
+              <a:srgbClr val="D7DEE6"/>
+            </a:solidFill>
+          </a:ln>
+          <a:effectLst/>
+          <a:effectLst>
+            <a:outerShdw blurRad="90000" dist="40000" dir="5400000" rotWithShape="0">
+              <a:srgbClr val="0B1F33">
+                <a:alpha val="18000"/>
+              </a:srgbClr>
+            </a:outerShdw>
+          </a:effectLst>
+        </p:spPr>
+        <p:style>
+          <a:lnRef idx="1">
+            <a:schemeClr val="accent1"/>
+          </a:lnRef>
+          <a:fillRef idx="3">
+            <a:schemeClr val="accent1"/>
+          </a:fillRef>
+          <a:effectRef idx="2">
+            <a:schemeClr val="accent1"/>
+          </a:effectRef>
+          <a:fontRef idx="minor">
+            <a:schemeClr val="lt1"/>
+          </a:fontRef>
+        </p:style>
+        <p:txBody>
+          <a:bodyPr rtlCol="0" anchor="ctr"/>
+          <a:lstStyle/>
+          <a:p>
+            <a:pPr algn="ctr"/>
+          </a:p>
+        </p:txBody>
+      </p:sp>
+      <p:sp>
+        <p:nvSpPr>
+          <p:cNvPr id="27" name="Rounded Rectangle 26"/>
+          <p:cNvSpPr/>
+          <p:nvPr/>
+        </p:nvSpPr>
+        <p:spPr>
+          <a:xfrm>
+            <a:off x="6163056" y="1508760"/>
+            <a:ext cx="2528316" cy="914400"/>
+          </a:xfrm>
+          <a:prstGeom prst="roundRect">
+            <a:avLst>
+              <a:gd name="adj" fmla="val 6000"/>
+            </a:avLst>
+          </a:prstGeom>
+          <a:solidFill>
+            <a:srgbClr val="7C5CFF"/>
+          </a:solidFill>
+          <a:ln>
+            <a:noFill/>
+          </a:ln>
+          <a:effectLst/>
+        </p:spPr>
+        <p:style>
+          <a:lnRef idx="1">
+            <a:schemeClr val="accent1"/>
+          </a:lnRef>
+          <a:fillRef idx="3">
+            <a:schemeClr val="accent1"/>
+          </a:fillRef>
+          <a:effectRef idx="2">
+            <a:schemeClr val="accent1"/>
+          </a:effectRef>
+          <a:fontRef idx="minor">
+            <a:schemeClr val="lt1"/>
+          </a:fontRef>
+        </p:style>
+        <p:txBody>
+          <a:bodyPr rtlCol="0" anchor="ctr"/>
+          <a:lstStyle/>
+          <a:p>
+            <a:pPr algn="ctr"/>
+          </a:p>
+        </p:txBody>
+      </p:sp>
+      <p:sp>
+        <p:nvSpPr>
+          <p:cNvPr id="28" name="TextBox 27"/>
+          <p:cNvSpPr txBox="1"/>
+          <p:nvPr/>
+        </p:nvSpPr>
+        <p:spPr>
+          <a:xfrm>
+            <a:off x="6163056" y="1636776"/>
+            <a:ext cx="2528316" cy="320040"/>
+          </a:xfrm>
+          <a:prstGeom prst="rect">
+            <a:avLst/>
+          </a:prstGeom>
+          <a:noFill/>
+        </p:spPr>
+        <p:txBody>
+          <a:bodyPr wrap="square" anchor="t" lIns="0" rIns="0" tIns="0" bIns="0">
+            <a:spAutoFit/>
+          </a:bodyPr>
+          <a:lstStyle/>
+          <a:p>
+            <a:pPr algn="ctr">
+              <a:lnSpc>
+                <a:spcPct val="100000"/>
+              </a:lnSpc>
+              <a:spcBef>
+                <a:spcPts val="0"/>
+              </a:spcBef>
+              <a:spcAft>
+                <a:spcPts val="600"/>
+              </a:spcAft>
+            </a:pPr>
+            <a:r>
+              <a:rPr sz="1200" b="1" i="0">
+                <a:solidFill>
+                  <a:srgbClr val="FFFFFF"/>
+                </a:solidFill>
+                <a:latin typeface="Microsoft YaHei"/>
+              </a:rPr>
+              <a:t>2023-24</a:t>
+            </a:r>
+          </a:p>
+        </p:txBody>
+      </p:sp>
+      <p:sp>
+        <p:nvSpPr>
+          <p:cNvPr id="29" name="TextBox 28"/>
+          <p:cNvSpPr txBox="1"/>
+          <p:nvPr/>
+        </p:nvSpPr>
+        <p:spPr>
+          <a:xfrm>
+            <a:off x="6163056" y="1929384"/>
+            <a:ext cx="2528316" cy="457200"/>
+          </a:xfrm>
+          <a:prstGeom prst="rect">
+            <a:avLst/>
+          </a:prstGeom>
+          <a:noFill/>
+        </p:spPr>
+        <p:txBody>
+          <a:bodyPr wrap="square" anchor="t" lIns="0" rIns="0" tIns="0" bIns="0">
+            <a:spAutoFit/>
+          </a:bodyPr>
+          <a:lstStyle/>
+          <a:p>
+            <a:pPr algn="ctr">
+              <a:lnSpc>
+                <a:spcPct val="100000"/>
+              </a:lnSpc>
+              <a:spcBef>
+                <a:spcPts val="0"/>
+              </a:spcBef>
+              <a:spcAft>
+                <a:spcPts val="600"/>
+              </a:spcAft>
+            </a:pPr>
+            <a:r>
+              <a:rPr sz="1500" b="1" i="0">
+                <a:solidFill>
+                  <a:srgbClr val="FFFFFF"/>
+                </a:solidFill>
+                <a:latin typeface="Microsoft YaHei"/>
+              </a:rPr>
+              <a:t>Data Cloud+Agentforce</a:t>
+            </a:r>
+          </a:p>
+        </p:txBody>
+      </p:sp>
+      <p:sp>
+        <p:nvSpPr>
+          <p:cNvPr id="30" name="TextBox 29"/>
+          <p:cNvSpPr txBox="1"/>
+          <p:nvPr/>
+        </p:nvSpPr>
+        <p:spPr>
+          <a:xfrm>
+            <a:off x="6364224" y="2606040"/>
+            <a:ext cx="2125980" cy="2880360"/>
+          </a:xfrm>
+          <a:prstGeom prst="rect">
+            <a:avLst/>
+          </a:prstGeom>
+          <a:noFill/>
+        </p:spPr>
+        <p:txBody>
+          <a:bodyPr wrap="square" anchor="t" lIns="0" rIns="0" tIns="0" bIns="0">
+            <a:spAutoFit/>
+          </a:bodyPr>
+          <a:lstStyle/>
+          <a:p>
+            <a:pPr algn="l">
+              <a:lnSpc>
+                <a:spcPct val="122000"/>
+              </a:lnSpc>
+              <a:spcBef>
+                <a:spcPts val="0"/>
+              </a:spcBef>
+              <a:spcAft>
+                <a:spcPts val="600"/>
+              </a:spcAft>
+            </a:pPr>
+            <a:r>
+              <a:rPr sz="1200" b="0" i="0">
+                <a:solidFill>
+                  <a:srgbClr val="5B6B7B"/>
+                </a:solidFill>
+                <a:latin typeface="Microsoft YaHei"/>
+              </a:rPr>
+              <a:t>统一数据 + 自主 Agent，探索按结果计费</a:t>
+            </a:r>
+          </a:p>
+        </p:txBody>
+      </p:sp>
+      <p:sp>
+        <p:nvSpPr>
+          <p:cNvPr id="31" name="Oval 30"/>
+          <p:cNvSpPr/>
+          <p:nvPr/>
+        </p:nvSpPr>
+        <p:spPr>
+          <a:xfrm>
+            <a:off x="7134606" y="5468112"/>
+            <a:ext cx="585216" cy="585216"/>
+          </a:xfrm>
+          <a:prstGeom prst="ellipse">
+            <a:avLst/>
+          </a:prstGeom>
+          <a:solidFill>
+            <a:srgbClr val="F4F7FB"/>
+          </a:solidFill>
+          <a:ln w="19050">
+            <a:solidFill>
+              <a:srgbClr val="7C5CFF"/>
+            </a:solidFill>
+          </a:ln>
+          <a:effectLst/>
+        </p:spPr>
+        <p:style>
+          <a:lnRef idx="1">
+            <a:schemeClr val="accent1"/>
+          </a:lnRef>
+          <a:fillRef idx="3">
+            <a:schemeClr val="accent1"/>
+          </a:fillRef>
+          <a:effectRef idx="2">
+            <a:schemeClr val="accent1"/>
+          </a:effectRef>
+          <a:fontRef idx="minor">
+            <a:schemeClr val="lt1"/>
+          </a:fontRef>
+        </p:style>
+        <p:txBody>
+          <a:bodyPr rtlCol="0" anchor="ctr"/>
+          <a:lstStyle/>
+          <a:p>
+            <a:pPr algn="ctr"/>
+          </a:p>
+        </p:txBody>
+      </p:sp>
+      <p:sp>
+        <p:nvSpPr>
+          <p:cNvPr id="32" name="TextBox 31"/>
+          <p:cNvSpPr txBox="1"/>
+          <p:nvPr/>
+        </p:nvSpPr>
+        <p:spPr>
+          <a:xfrm>
+            <a:off x="7134606" y="5468112"/>
+            <a:ext cx="585216" cy="585216"/>
+          </a:xfrm>
+          <a:prstGeom prst="rect">
+            <a:avLst/>
+          </a:prstGeom>
+          <a:noFill/>
+        </p:spPr>
+        <p:txBody>
+          <a:bodyPr wrap="square" anchor="ctr" lIns="0" rIns="0" tIns="0" bIns="0">
+            <a:spAutoFit/>
+          </a:bodyPr>
+          <a:lstStyle/>
+          <a:p>
+            <a:pPr algn="ctr">
+              <a:lnSpc>
+                <a:spcPct val="100000"/>
+              </a:lnSpc>
+              <a:spcBef>
+                <a:spcPts val="0"/>
+              </a:spcBef>
+              <a:spcAft>
+                <a:spcPts val="600"/>
+              </a:spcAft>
+            </a:pPr>
+            <a:r>
+              <a:rPr sz="2000" b="1" i="0">
+                <a:solidFill>
+                  <a:srgbClr val="7C5CFF"/>
+                </a:solidFill>
+                <a:latin typeface="Microsoft YaHei"/>
+              </a:rPr>
+              <a:t>3</a:t>
+            </a:r>
+          </a:p>
+        </p:txBody>
+      </p:sp>
+      <p:sp>
+        <p:nvSpPr>
+          <p:cNvPr id="33" name="TextBox 32"/>
+          <p:cNvSpPr txBox="1"/>
+          <p:nvPr/>
+        </p:nvSpPr>
+        <p:spPr>
+          <a:xfrm>
+            <a:off x="8691372" y="3680460"/>
+            <a:ext cx="164592" cy="365760"/>
+          </a:xfrm>
+          <a:prstGeom prst="rect">
+            <a:avLst/>
+          </a:prstGeom>
+          <a:noFill/>
+        </p:spPr>
+        <p:txBody>
+          <a:bodyPr wrap="square" anchor="t" lIns="0" rIns="0" tIns="0" bIns="0">
+            <a:spAutoFit/>
+          </a:bodyPr>
+          <a:lstStyle/>
+          <a:p>
+            <a:pPr algn="ctr">
+              <a:lnSpc>
+                <a:spcPct val="100000"/>
+              </a:lnSpc>
+              <a:spcBef>
+                <a:spcPts val="0"/>
+              </a:spcBef>
+              <a:spcAft>
+                <a:spcPts val="600"/>
+              </a:spcAft>
+            </a:pPr>
+            <a:r>
+              <a:rPr sz="2200" b="1" i="0">
+                <a:solidFill>
+                  <a:srgbClr val="8A98A6"/>
+                </a:solidFill>
+                <a:latin typeface="Microsoft YaHei"/>
+              </a:rPr>
+              <a:t>›</a:t>
+            </a:r>
+          </a:p>
+        </p:txBody>
+      </p:sp>
+      <p:sp>
+        <p:nvSpPr>
+          <p:cNvPr id="34" name="Rounded Rectangle 33"/>
+          <p:cNvSpPr/>
+          <p:nvPr/>
+        </p:nvSpPr>
+        <p:spPr>
+          <a:xfrm>
+            <a:off x="8855964" y="1508760"/>
+            <a:ext cx="2528316" cy="4709160"/>
+          </a:xfrm>
+          <a:prstGeom prst="roundRect">
+            <a:avLst>
+              <a:gd name="adj" fmla="val 6000"/>
+            </a:avLst>
+          </a:prstGeom>
+          <a:solidFill>
+            <a:srgbClr val="FFFFFF"/>
+          </a:solidFill>
+          <a:ln w="9525">
+            <a:solidFill>
+              <a:srgbClr val="D7DEE6"/>
+            </a:solidFill>
+          </a:ln>
+          <a:effectLst/>
+          <a:effectLst>
+            <a:outerShdw blurRad="90000" dist="40000" dir="5400000" rotWithShape="0">
+              <a:srgbClr val="0B1F33">
+                <a:alpha val="18000"/>
+              </a:srgbClr>
+            </a:outerShdw>
+          </a:effectLst>
+        </p:spPr>
+        <p:style>
+          <a:lnRef idx="1">
+            <a:schemeClr val="accent1"/>
+          </a:lnRef>
+          <a:fillRef idx="3">
+            <a:schemeClr val="accent1"/>
+          </a:fillRef>
+          <a:effectRef idx="2">
+            <a:schemeClr val="accent1"/>
+          </a:effectRef>
+          <a:fontRef idx="minor">
+            <a:schemeClr val="lt1"/>
+          </a:fontRef>
+        </p:style>
+        <p:txBody>
+          <a:bodyPr rtlCol="0" anchor="ctr"/>
+          <a:lstStyle/>
+          <a:p>
+            <a:pPr algn="ctr"/>
+          </a:p>
+        </p:txBody>
+      </p:sp>
+      <p:sp>
+        <p:nvSpPr>
+          <p:cNvPr id="35" name="Rounded Rectangle 34"/>
+          <p:cNvSpPr/>
+          <p:nvPr/>
+        </p:nvSpPr>
+        <p:spPr>
+          <a:xfrm>
+            <a:off x="8855964" y="1508760"/>
+            <a:ext cx="2528316" cy="914400"/>
+          </a:xfrm>
+          <a:prstGeom prst="roundRect">
+            <a:avLst>
+              <a:gd name="adj" fmla="val 6000"/>
+            </a:avLst>
+          </a:prstGeom>
+          <a:solidFill>
+            <a:srgbClr val="F59E0B"/>
+          </a:solidFill>
+          <a:ln>
+            <a:noFill/>
+          </a:ln>
+          <a:effectLst/>
+        </p:spPr>
+        <p:style>
+          <a:lnRef idx="1">
+            <a:schemeClr val="accent1"/>
+          </a:lnRef>
+          <a:fillRef idx="3">
+            <a:schemeClr val="accent1"/>
+          </a:fillRef>
+          <a:effectRef idx="2">
+            <a:schemeClr val="accent1"/>
+          </a:effectRef>
+          <a:fontRef idx="minor">
+            <a:schemeClr val="lt1"/>
+          </a:fontRef>
+        </p:style>
+        <p:txBody>
+          <a:bodyPr rtlCol="0" anchor="ctr"/>
+          <a:lstStyle/>
+          <a:p>
+            <a:pPr algn="ctr"/>
+          </a:p>
+        </p:txBody>
+      </p:sp>
+      <p:sp>
+        <p:nvSpPr>
+          <p:cNvPr id="36" name="TextBox 35"/>
+          <p:cNvSpPr txBox="1"/>
+          <p:nvPr/>
+        </p:nvSpPr>
+        <p:spPr>
+          <a:xfrm>
+            <a:off x="8855964" y="1636776"/>
+            <a:ext cx="2528316" cy="320040"/>
+          </a:xfrm>
+          <a:prstGeom prst="rect">
+            <a:avLst/>
+          </a:prstGeom>
+          <a:noFill/>
+        </p:spPr>
+        <p:txBody>
+          <a:bodyPr wrap="square" anchor="t" lIns="0" rIns="0" tIns="0" bIns="0">
+            <a:spAutoFit/>
+          </a:bodyPr>
+          <a:lstStyle/>
+          <a:p>
+            <a:pPr algn="ctr">
+              <a:lnSpc>
+                <a:spcPct val="100000"/>
+              </a:lnSpc>
+              <a:spcBef>
+                <a:spcPts val="0"/>
+              </a:spcBef>
+              <a:spcAft>
+                <a:spcPts val="600"/>
+              </a:spcAft>
+            </a:pPr>
+            <a:r>
+              <a:rPr sz="1200" b="1" i="0">
+                <a:solidFill>
+                  <a:srgbClr val="FFFFFF"/>
+                </a:solidFill>
+                <a:latin typeface="Microsoft YaHei"/>
+              </a:rPr>
+              <a:t>未来</a:t>
+            </a:r>
+          </a:p>
+        </p:txBody>
+      </p:sp>
+      <p:sp>
+        <p:nvSpPr>
+          <p:cNvPr id="37" name="TextBox 36"/>
+          <p:cNvSpPr txBox="1"/>
+          <p:nvPr/>
+        </p:nvSpPr>
+        <p:spPr>
+          <a:xfrm>
+            <a:off x="8855964" y="1929384"/>
+            <a:ext cx="2528316" cy="457200"/>
+          </a:xfrm>
+          <a:prstGeom prst="rect">
+            <a:avLst/>
+          </a:prstGeom>
+          <a:noFill/>
+        </p:spPr>
+        <p:txBody>
+          <a:bodyPr wrap="square" anchor="t" lIns="0" rIns="0" tIns="0" bIns="0">
+            <a:spAutoFit/>
+          </a:bodyPr>
+          <a:lstStyle/>
+          <a:p>
+            <a:pPr algn="ctr">
+              <a:lnSpc>
+                <a:spcPct val="100000"/>
+              </a:lnSpc>
+              <a:spcBef>
+                <a:spcPts val="0"/>
+              </a:spcBef>
+              <a:spcAft>
+                <a:spcPts val="600"/>
+              </a:spcAft>
+            </a:pPr>
+            <a:r>
+              <a:rPr sz="1500" b="1" i="0">
+                <a:solidFill>
+                  <a:srgbClr val="FFFFFF"/>
+                </a:solidFill>
+                <a:latin typeface="Microsoft YaHei"/>
+              </a:rPr>
+              <a:t>结果型 Agentic SaaS</a:t>
+            </a:r>
+          </a:p>
+        </p:txBody>
+      </p:sp>
+      <p:sp>
+        <p:nvSpPr>
+          <p:cNvPr id="38" name="TextBox 37"/>
+          <p:cNvSpPr txBox="1"/>
+          <p:nvPr/>
+        </p:nvSpPr>
+        <p:spPr>
+          <a:xfrm>
+            <a:off x="9057132" y="2606040"/>
+            <a:ext cx="2125980" cy="2880360"/>
+          </a:xfrm>
+          <a:prstGeom prst="rect">
+            <a:avLst/>
+          </a:prstGeom>
+          <a:noFill/>
+        </p:spPr>
+        <p:txBody>
+          <a:bodyPr wrap="square" anchor="t" lIns="0" rIns="0" tIns="0" bIns="0">
+            <a:spAutoFit/>
+          </a:bodyPr>
+          <a:lstStyle/>
+          <a:p>
+            <a:pPr algn="l">
+              <a:lnSpc>
+                <a:spcPct val="122000"/>
+              </a:lnSpc>
+              <a:spcBef>
+                <a:spcPts val="0"/>
+              </a:spcBef>
+              <a:spcAft>
+                <a:spcPts val="600"/>
+              </a:spcAft>
+            </a:pPr>
+            <a:r>
+              <a:rPr sz="1200" b="0" i="0">
+                <a:solidFill>
+                  <a:srgbClr val="5B6B7B"/>
+                </a:solidFill>
+                <a:latin typeface="Microsoft YaHei"/>
+              </a:rPr>
+              <a:t>从卖席位到卖办成的业务结果</a:t>
+            </a:r>
+          </a:p>
+        </p:txBody>
+      </p:sp>
+      <p:sp>
+        <p:nvSpPr>
+          <p:cNvPr id="39" name="Oval 38"/>
+          <p:cNvSpPr/>
+          <p:nvPr/>
+        </p:nvSpPr>
+        <p:spPr>
+          <a:xfrm>
+            <a:off x="9827514" y="5468112"/>
+            <a:ext cx="585216" cy="585216"/>
+          </a:xfrm>
+          <a:prstGeom prst="ellipse">
+            <a:avLst/>
+          </a:prstGeom>
+          <a:solidFill>
+            <a:srgbClr val="F4F7FB"/>
+          </a:solidFill>
+          <a:ln w="19050">
+            <a:solidFill>
+              <a:srgbClr val="F59E0B"/>
+            </a:solidFill>
+          </a:ln>
+          <a:effectLst/>
+        </p:spPr>
+        <p:style>
+          <a:lnRef idx="1">
+            <a:schemeClr val="accent1"/>
+          </a:lnRef>
+          <a:fillRef idx="3">
+            <a:schemeClr val="accent1"/>
+          </a:fillRef>
+          <a:effectRef idx="2">
+            <a:schemeClr val="accent1"/>
+          </a:effectRef>
+          <a:fontRef idx="minor">
+            <a:schemeClr val="lt1"/>
+          </a:fontRef>
+        </p:style>
+        <p:txBody>
+          <a:bodyPr rtlCol="0" anchor="ctr"/>
+          <a:lstStyle/>
+          <a:p>
+            <a:pPr algn="ctr"/>
+          </a:p>
+        </p:txBody>
+      </p:sp>
+      <p:sp>
+        <p:nvSpPr>
+          <p:cNvPr id="40" name="TextBox 39"/>
+          <p:cNvSpPr txBox="1"/>
+          <p:nvPr/>
+        </p:nvSpPr>
+        <p:spPr>
+          <a:xfrm>
+            <a:off x="9827514" y="5468112"/>
+            <a:ext cx="585216" cy="585216"/>
+          </a:xfrm>
+          <a:prstGeom prst="rect">
+            <a:avLst/>
+          </a:prstGeom>
+          <a:noFill/>
+        </p:spPr>
+        <p:txBody>
+          <a:bodyPr wrap="square" anchor="ctr" lIns="0" rIns="0" tIns="0" bIns="0">
+            <a:spAutoFit/>
+          </a:bodyPr>
+          <a:lstStyle/>
+          <a:p>
+            <a:pPr algn="ctr">
+              <a:lnSpc>
+                <a:spcPct val="100000"/>
+              </a:lnSpc>
+              <a:spcBef>
+                <a:spcPts val="0"/>
+              </a:spcBef>
+              <a:spcAft>
+                <a:spcPts val="600"/>
+              </a:spcAft>
+            </a:pPr>
+            <a:r>
+              <a:rPr sz="2000" b="1" i="0">
+                <a:solidFill>
+                  <a:srgbClr val="F59E0B"/>
+                </a:solidFill>
+                <a:latin typeface="Microsoft YaHei"/>
+              </a:rPr>
+              <a:t>4</a:t>
+            </a:r>
+          </a:p>
+        </p:txBody>
+      </p:sp>
+    </p:spTree>
+  </p:cSld>
+  <p:clrMapOvr>
+    <a:masterClrMapping/>
+  </p:clrMapOvr>
+</p:sld>
+</file>
+
+<file path=ppt/slides/slide12.xml><?xml version="1.0" encoding="utf-8"?>
+<p:sld xmlns:a="http://schemas.openxmlformats.org/drawingml/2006/main" xmlns:p="http://schemas.openxmlformats.org/presentationml/2006/main" xmlns:r="http://schemas.openxmlformats.org/officeDocument/2006/relationships">
+  <p:cSld>
+    <p:spTree>
+      <p:nvGrpSpPr>
+        <p:cNvPr id="1" name=""/>
+        <p:cNvGrpSpPr/>
+        <p:nvPr/>
+      </p:nvGrpSpPr>
+      <p:grpSpPr/>
+      <p:sp>
+        <p:nvSpPr>
+          <p:cNvPr id="2" name="Rectangle 1"/>
+          <p:cNvSpPr/>
+          <p:nvPr/>
+        </p:nvSpPr>
+        <p:spPr>
+          <a:xfrm>
+            <a:off x="0" y="0"/>
+            <a:ext cx="12191695" cy="1078992"/>
+          </a:xfrm>
+          <a:prstGeom prst="rect">
+            <a:avLst/>
+          </a:prstGeom>
+          <a:solidFill>
+            <a:srgbClr val="FFFFFF"/>
+          </a:solidFill>
+          <a:ln>
+            <a:noFill/>
+          </a:ln>
+          <a:effectLst/>
+        </p:spPr>
+        <p:style>
+          <a:lnRef idx="1">
+            <a:schemeClr val="accent1"/>
+          </a:lnRef>
+          <a:fillRef idx="3">
+            <a:schemeClr val="accent1"/>
+          </a:fillRef>
+          <a:effectRef idx="2">
+            <a:schemeClr val="accent1"/>
+          </a:effectRef>
+          <a:fontRef idx="minor">
+            <a:schemeClr val="lt1"/>
+          </a:fontRef>
+        </p:style>
+        <p:txBody>
+          <a:bodyPr rtlCol="0" anchor="ctr"/>
+          <a:lstStyle/>
+          <a:p>
+            <a:pPr algn="ctr"/>
+          </a:p>
+        </p:txBody>
+      </p:sp>
+      <p:sp>
+        <p:nvSpPr>
+          <p:cNvPr id="3" name="Rectangle 2"/>
+          <p:cNvSpPr/>
+          <p:nvPr/>
+        </p:nvSpPr>
+        <p:spPr>
+          <a:xfrm>
+            <a:off x="548640" y="310896"/>
+            <a:ext cx="109728" cy="457200"/>
+          </a:xfrm>
+          <a:prstGeom prst="rect">
+            <a:avLst/>
+          </a:prstGeom>
+          <a:solidFill>
+            <a:srgbClr val="1B6EF3"/>
+          </a:solidFill>
+          <a:ln>
+            <a:noFill/>
+          </a:ln>
+          <a:effectLst/>
+        </p:spPr>
+        <p:style>
+          <a:lnRef idx="1">
+            <a:schemeClr val="accent1"/>
+          </a:lnRef>
+          <a:fillRef idx="3">
+            <a:schemeClr val="accent1"/>
+          </a:fillRef>
+          <a:effectRef idx="2">
+            <a:schemeClr val="accent1"/>
+          </a:effectRef>
+          <a:fontRef idx="minor">
+            <a:schemeClr val="lt1"/>
+          </a:fontRef>
+        </p:style>
+        <p:txBody>
+          <a:bodyPr rtlCol="0" anchor="ctr"/>
+          <a:lstStyle/>
+          <a:p>
+            <a:pPr algn="ctr"/>
+          </a:p>
+        </p:txBody>
+      </p:sp>
+      <p:sp>
+        <p:nvSpPr>
+          <p:cNvPr id="4" name="TextBox 3"/>
+          <p:cNvSpPr txBox="1"/>
+          <p:nvPr/>
+        </p:nvSpPr>
+        <p:spPr>
+          <a:xfrm>
+            <a:off x="777240" y="237744"/>
+            <a:ext cx="9601200" cy="292608"/>
+          </a:xfrm>
+          <a:prstGeom prst="rect">
+            <a:avLst/>
+          </a:prstGeom>
+          <a:noFill/>
+        </p:spPr>
+        <p:txBody>
+          <a:bodyPr wrap="square" anchor="t" lIns="0" rIns="0" tIns="0" bIns="0">
+            <a:spAutoFit/>
+          </a:bodyPr>
+          <a:lstStyle/>
+          <a:p>
+            <a:pPr algn="l">
+              <a:lnSpc>
+                <a:spcPct val="100000"/>
+              </a:lnSpc>
+              <a:spcBef>
+                <a:spcPts val="0"/>
+              </a:spcBef>
+              <a:spcAft>
+                <a:spcPts val="600"/>
+              </a:spcAft>
+            </a:pPr>
+            <a:r>
+              <a:rPr sz="1150" b="1" i="0">
+                <a:solidFill>
+                  <a:srgbClr val="1B6EF3"/>
+                </a:solidFill>
+                <a:latin typeface="Microsoft YaHei"/>
+              </a:rPr>
+              <a:t>10 风险与粘性</a:t>
+            </a:r>
+          </a:p>
+        </p:txBody>
+      </p:sp>
+      <p:sp>
+        <p:nvSpPr>
+          <p:cNvPr id="5" name="TextBox 4"/>
+          <p:cNvSpPr txBox="1"/>
+          <p:nvPr/>
+        </p:nvSpPr>
+        <p:spPr>
+          <a:xfrm>
+            <a:off x="777240" y="475488"/>
+            <a:ext cx="10332720" cy="457200"/>
+          </a:xfrm>
+          <a:prstGeom prst="rect">
+            <a:avLst/>
+          </a:prstGeom>
+          <a:noFill/>
+        </p:spPr>
+        <p:txBody>
+          <a:bodyPr wrap="square" anchor="t" lIns="0" rIns="0" tIns="0" bIns="0">
+            <a:spAutoFit/>
+          </a:bodyPr>
+          <a:lstStyle/>
+          <a:p>
+            <a:pPr algn="l">
+              <a:lnSpc>
+                <a:spcPct val="100000"/>
+              </a:lnSpc>
+              <a:spcBef>
+                <a:spcPts val="0"/>
+              </a:spcBef>
+              <a:spcAft>
+                <a:spcPts val="600"/>
+              </a:spcAft>
+            </a:pPr>
+            <a:r>
+              <a:rPr sz="2200" b="1" i="0">
+                <a:solidFill>
+                  <a:srgbClr val="0B1F33"/>
+                </a:solidFill>
+                <a:latin typeface="Microsoft YaHei"/>
+              </a:rPr>
+              <a:t>护城河的风险 vs 独特价值与客户粘性</a:t>
+            </a:r>
+          </a:p>
+        </p:txBody>
+      </p:sp>
+      <p:sp>
+        <p:nvSpPr>
+          <p:cNvPr id="6" name="TextBox 5"/>
+          <p:cNvSpPr txBox="1"/>
+          <p:nvPr/>
+        </p:nvSpPr>
+        <p:spPr>
+          <a:xfrm>
+            <a:off x="10911535" y="384048"/>
+            <a:ext cx="822960" cy="365760"/>
+          </a:xfrm>
+          <a:prstGeom prst="rect">
+            <a:avLst/>
+          </a:prstGeom>
+          <a:noFill/>
+        </p:spPr>
+        <p:txBody>
+          <a:bodyPr wrap="square" anchor="t" lIns="0" rIns="0" tIns="0" bIns="0">
+            <a:spAutoFit/>
+          </a:bodyPr>
+          <a:lstStyle/>
+          <a:p>
+            <a:pPr algn="r">
+              <a:lnSpc>
+                <a:spcPct val="100000"/>
+              </a:lnSpc>
+              <a:spcBef>
+                <a:spcPts val="0"/>
+              </a:spcBef>
+              <a:spcAft>
+                <a:spcPts val="600"/>
+              </a:spcAft>
+            </a:pPr>
+            <a:r>
+              <a:rPr sz="1700" b="1" i="0">
+                <a:solidFill>
+                  <a:srgbClr val="1B6EF3"/>
+                </a:solidFill>
+                <a:latin typeface="Microsoft YaHei"/>
+              </a:rPr>
+              <a:t>12</a:t>
+            </a:r>
+            <a:r>
+              <a:rPr sz="1100" b="0" i="0">
+                <a:solidFill>
+                  <a:srgbClr val="8A98A6"/>
+                </a:solidFill>
+                <a:latin typeface="Microsoft YaHei"/>
+              </a:rPr>
+              <a:t> / 14</a:t>
+            </a:r>
+          </a:p>
+        </p:txBody>
+      </p:sp>
+      <p:sp>
+        <p:nvSpPr>
+          <p:cNvPr id="7" name="Rectangle 6"/>
+          <p:cNvSpPr/>
+          <p:nvPr/>
+        </p:nvSpPr>
+        <p:spPr>
+          <a:xfrm>
+            <a:off x="0" y="1078992"/>
+            <a:ext cx="12191695" cy="15240"/>
+          </a:xfrm>
+          <a:prstGeom prst="rect">
+            <a:avLst/>
+          </a:prstGeom>
+          <a:solidFill>
+            <a:srgbClr val="D7DEE6"/>
+          </a:solidFill>
+          <a:ln>
+            <a:noFill/>
+          </a:ln>
+          <a:effectLst/>
+        </p:spPr>
+        <p:style>
+          <a:lnRef idx="1">
+            <a:schemeClr val="accent1"/>
+          </a:lnRef>
+          <a:fillRef idx="3">
+            <a:schemeClr val="accent1"/>
+          </a:fillRef>
+          <a:effectRef idx="2">
+            <a:schemeClr val="accent1"/>
+          </a:effectRef>
+          <a:fontRef idx="minor">
+            <a:schemeClr val="lt1"/>
+          </a:fontRef>
+        </p:style>
+        <p:txBody>
+          <a:bodyPr rtlCol="0" anchor="ctr"/>
+          <a:lstStyle/>
+          <a:p>
+            <a:pPr algn="ctr"/>
+          </a:p>
+        </p:txBody>
+      </p:sp>
+      <p:sp>
+        <p:nvSpPr>
+          <p:cNvPr id="8" name="Rectangle 7"/>
+          <p:cNvSpPr/>
+          <p:nvPr/>
+        </p:nvSpPr>
+        <p:spPr>
+          <a:xfrm>
+            <a:off x="0" y="6565392"/>
+            <a:ext cx="12191695" cy="292608"/>
+          </a:xfrm>
+          <a:prstGeom prst="rect">
+            <a:avLst/>
+          </a:prstGeom>
+          <a:solidFill>
+            <a:srgbClr val="0B1F33"/>
+          </a:solidFill>
+          <a:ln>
+            <a:noFill/>
+          </a:ln>
+          <a:effectLst/>
+        </p:spPr>
+        <p:style>
+          <a:lnRef idx="1">
+            <a:schemeClr val="accent1"/>
+          </a:lnRef>
+          <a:fillRef idx="3">
+            <a:schemeClr val="accent1"/>
+          </a:fillRef>
+          <a:effectRef idx="2">
+            <a:schemeClr val="accent1"/>
+          </a:effectRef>
+          <a:fontRef idx="minor">
+            <a:schemeClr val="lt1"/>
+          </a:fontRef>
+        </p:style>
+        <p:txBody>
+          <a:bodyPr rtlCol="0" anchor="ctr"/>
+          <a:lstStyle/>
+          <a:p>
+            <a:pPr algn="ctr"/>
+          </a:p>
+        </p:txBody>
+      </p:sp>
+      <p:sp>
+        <p:nvSpPr>
+          <p:cNvPr id="9" name="TextBox 8"/>
+          <p:cNvSpPr txBox="1"/>
+          <p:nvPr/>
+        </p:nvSpPr>
+        <p:spPr>
+          <a:xfrm>
+            <a:off x="548640" y="6583680"/>
+            <a:ext cx="8229600" cy="256032"/>
+          </a:xfrm>
+          <a:prstGeom prst="rect">
+            <a:avLst/>
+          </a:prstGeom>
+          <a:noFill/>
+        </p:spPr>
+        <p:txBody>
+          <a:bodyPr wrap="square" anchor="ctr" lIns="0" rIns="0" tIns="0" bIns="0">
+            <a:spAutoFit/>
+          </a:bodyPr>
+          <a:lstStyle/>
+          <a:p>
+            <a:pPr algn="l">
+              <a:lnSpc>
+                <a:spcPct val="100000"/>
+              </a:lnSpc>
+              <a:spcBef>
+                <a:spcPts val="0"/>
+              </a:spcBef>
+              <a:spcAft>
+                <a:spcPts val="600"/>
+              </a:spcAft>
+            </a:pPr>
+            <a:r>
+              <a:rPr sz="850" b="0" i="0">
+                <a:solidFill>
+                  <a:srgbClr val="C2CEDB"/>
+                </a:solidFill>
+                <a:latin typeface="Microsoft YaHei"/>
+              </a:rPr>
+              <a:t>AI 产业六层模型 · 应用层 · Salesforce</a:t>
+            </a:r>
+          </a:p>
+        </p:txBody>
+      </p:sp>
+      <p:sp>
+        <p:nvSpPr>
+          <p:cNvPr id="10" name="TextBox 9"/>
+          <p:cNvSpPr txBox="1"/>
+          <p:nvPr/>
+        </p:nvSpPr>
+        <p:spPr>
+          <a:xfrm>
+            <a:off x="777240" y="1207008"/>
+            <a:ext cx="10607040" cy="457200"/>
+          </a:xfrm>
+          <a:prstGeom prst="rect">
+            <a:avLst/>
+          </a:prstGeom>
+          <a:noFill/>
+        </p:spPr>
+        <p:txBody>
+          <a:bodyPr wrap="square" anchor="t" lIns="0" rIns="0" tIns="0" bIns="0">
+            <a:spAutoFit/>
+          </a:bodyPr>
+          <a:lstStyle/>
+          <a:p>
+            <a:pPr algn="l">
+              <a:lnSpc>
+                <a:spcPct val="110000"/>
+              </a:lnSpc>
+              <a:spcBef>
+                <a:spcPts val="0"/>
+              </a:spcBef>
+              <a:spcAft>
+                <a:spcPts val="600"/>
+              </a:spcAft>
+            </a:pPr>
+            <a:r>
+              <a:rPr sz="1300" b="0" i="0">
+                <a:solidFill>
+                  <a:srgbClr val="5B6B7B"/>
+                </a:solidFill>
+                <a:latin typeface="Microsoft YaHei"/>
+              </a:rPr>
+              <a:t>去 UI 化让应用层有被中介化风险，但独有客户数据 + 深嵌业务流程的粘性极强。</a:t>
+            </a:r>
+          </a:p>
+        </p:txBody>
+      </p:sp>
+      <p:sp>
+        <p:nvSpPr>
+          <p:cNvPr id="11" name="Rounded Rectangle 10"/>
+          <p:cNvSpPr/>
+          <p:nvPr/>
+        </p:nvSpPr>
+        <p:spPr>
+          <a:xfrm>
+            <a:off x="777240" y="1783080"/>
+            <a:ext cx="5120640" cy="4206240"/>
+          </a:xfrm>
+          <a:prstGeom prst="roundRect">
+            <a:avLst>
+              <a:gd name="adj" fmla="val 6000"/>
+            </a:avLst>
+          </a:prstGeom>
+          <a:solidFill>
+            <a:srgbClr val="F4F7FB"/>
+          </a:solidFill>
+          <a:ln w="16510">
+            <a:solidFill>
+              <a:srgbClr val="F46A5E"/>
+            </a:solidFill>
+          </a:ln>
+          <a:effectLst/>
+          <a:effectLst>
+            <a:outerShdw blurRad="90000" dist="40000" dir="5400000" rotWithShape="0">
+              <a:srgbClr val="0B1F33">
+                <a:alpha val="18000"/>
+              </a:srgbClr>
+            </a:outerShdw>
+          </a:effectLst>
+        </p:spPr>
+        <p:style>
+          <a:lnRef idx="1">
+            <a:schemeClr val="accent1"/>
+          </a:lnRef>
+          <a:fillRef idx="3">
+            <a:schemeClr val="accent1"/>
+          </a:fillRef>
+          <a:effectRef idx="2">
+            <a:schemeClr val="accent1"/>
+          </a:effectRef>
+          <a:fontRef idx="minor">
+            <a:schemeClr val="lt1"/>
+          </a:fontRef>
+        </p:style>
+        <p:txBody>
+          <a:bodyPr rtlCol="0" anchor="ctr"/>
+          <a:lstStyle/>
+          <a:p>
+            <a:pPr algn="ctr"/>
+          </a:p>
+        </p:txBody>
+      </p:sp>
+      <p:sp>
+        <p:nvSpPr>
+          <p:cNvPr id="12" name="Rounded Rectangle 11"/>
+          <p:cNvSpPr/>
+          <p:nvPr/>
+        </p:nvSpPr>
+        <p:spPr>
+          <a:xfrm>
+            <a:off x="777240" y="1783080"/>
+            <a:ext cx="5120640" cy="548640"/>
+          </a:xfrm>
+          <a:prstGeom prst="roundRect">
+            <a:avLst>
+              <a:gd name="adj" fmla="val 6000"/>
+            </a:avLst>
+          </a:prstGeom>
+          <a:solidFill>
+            <a:srgbClr val="F46A5E"/>
+          </a:solidFill>
+          <a:ln>
+            <a:noFill/>
+          </a:ln>
+          <a:effectLst/>
+        </p:spPr>
+        <p:style>
+          <a:lnRef idx="1">
+            <a:schemeClr val="accent1"/>
+          </a:lnRef>
+          <a:fillRef idx="3">
+            <a:schemeClr val="accent1"/>
+          </a:fillRef>
+          <a:effectRef idx="2">
+            <a:schemeClr val="accent1"/>
+          </a:effectRef>
+          <a:fontRef idx="minor">
+            <a:schemeClr val="lt1"/>
+          </a:fontRef>
+        </p:style>
+        <p:txBody>
+          <a:bodyPr rtlCol="0" anchor="ctr"/>
+          <a:lstStyle/>
+          <a:p>
+            <a:pPr algn="ctr"/>
+          </a:p>
+        </p:txBody>
+      </p:sp>
+      <p:sp>
+        <p:nvSpPr>
+          <p:cNvPr id="13" name="TextBox 12"/>
+          <p:cNvSpPr txBox="1"/>
+          <p:nvPr/>
+        </p:nvSpPr>
+        <p:spPr>
+          <a:xfrm>
+            <a:off x="777240" y="1783080"/>
+            <a:ext cx="5120640" cy="548640"/>
+          </a:xfrm>
+          <a:prstGeom prst="rect">
+            <a:avLst/>
+          </a:prstGeom>
+          <a:noFill/>
+        </p:spPr>
+        <p:txBody>
+          <a:bodyPr wrap="square" anchor="ctr" lIns="0" rIns="0" tIns="0" bIns="0">
+            <a:spAutoFit/>
+          </a:bodyPr>
+          <a:lstStyle/>
+          <a:p>
+            <a:pPr algn="ctr">
+              <a:lnSpc>
+                <a:spcPct val="100000"/>
+              </a:lnSpc>
+              <a:spcBef>
+                <a:spcPts val="0"/>
+              </a:spcBef>
+              <a:spcAft>
+                <a:spcPts val="600"/>
+              </a:spcAft>
+            </a:pPr>
+            <a:r>
+              <a:rPr sz="1500" b="1" i="0">
+                <a:solidFill>
+                  <a:srgbClr val="FFFFFF"/>
+                </a:solidFill>
+                <a:latin typeface="Microsoft YaHei"/>
+              </a:rPr>
+              <a:t>护城河面临的风险</a:t>
+            </a:r>
+          </a:p>
+        </p:txBody>
+      </p:sp>
+      <p:sp>
+        <p:nvSpPr>
+          <p:cNvPr id="14" name="Rectangle 13"/>
+          <p:cNvSpPr/>
+          <p:nvPr/>
+        </p:nvSpPr>
+        <p:spPr>
+          <a:xfrm>
+            <a:off x="1097280" y="2560320"/>
+            <a:ext cx="146304" cy="146304"/>
+          </a:xfrm>
+          <a:prstGeom prst="rect">
+            <a:avLst/>
+          </a:prstGeom>
+          <a:solidFill>
+            <a:srgbClr val="F46A5E"/>
+          </a:solidFill>
+          <a:ln>
+            <a:noFill/>
+          </a:ln>
+          <a:effectLst/>
+        </p:spPr>
+        <p:style>
+          <a:lnRef idx="1">
+            <a:schemeClr val="accent1"/>
+          </a:lnRef>
+          <a:fillRef idx="3">
+            <a:schemeClr val="accent1"/>
+          </a:fillRef>
+          <a:effectRef idx="2">
+            <a:schemeClr val="accent1"/>
+          </a:effectRef>
+          <a:fontRef idx="minor">
+            <a:schemeClr val="lt1"/>
+          </a:fontRef>
+        </p:style>
+        <p:txBody>
+          <a:bodyPr rtlCol="0" anchor="ctr"/>
+          <a:lstStyle/>
+          <a:p>
+            <a:pPr algn="ctr"/>
+          </a:p>
+        </p:txBody>
+      </p:sp>
+      <p:sp>
+        <p:nvSpPr>
+          <p:cNvPr id="15" name="TextBox 14"/>
+          <p:cNvSpPr txBox="1"/>
+          <p:nvPr/>
+        </p:nvSpPr>
+        <p:spPr>
+          <a:xfrm>
+            <a:off x="1371600" y="2496312"/>
+            <a:ext cx="4206240" cy="630936"/>
+          </a:xfrm>
+          <a:prstGeom prst="rect">
+            <a:avLst/>
+          </a:prstGeom>
+          <a:noFill/>
+        </p:spPr>
+        <p:txBody>
+          <a:bodyPr wrap="square" anchor="t" lIns="0" rIns="0" tIns="0" bIns="0">
+            <a:spAutoFit/>
+          </a:bodyPr>
+          <a:lstStyle/>
+          <a:p>
+            <a:pPr algn="l">
+              <a:lnSpc>
+                <a:spcPct val="112000"/>
+              </a:lnSpc>
+              <a:spcBef>
+                <a:spcPts val="0"/>
+              </a:spcBef>
+              <a:spcAft>
+                <a:spcPts val="600"/>
+              </a:spcAft>
+            </a:pPr>
+            <a:r>
+              <a:rPr sz="1250" b="0" i="0">
+                <a:solidFill>
+                  <a:srgbClr val="0B1F33"/>
+                </a:solidFill>
+                <a:latin typeface="Microsoft YaHei"/>
+              </a:rPr>
+              <a:t>平台级 Agent 中介化，抢走用户入口</a:t>
+            </a:r>
+          </a:p>
+        </p:txBody>
+      </p:sp>
+      <p:sp>
+        <p:nvSpPr>
+          <p:cNvPr id="16" name="Rectangle 15"/>
+          <p:cNvSpPr/>
+          <p:nvPr/>
+        </p:nvSpPr>
+        <p:spPr>
+          <a:xfrm>
+            <a:off x="1097280" y="3246120"/>
+            <a:ext cx="146304" cy="146304"/>
+          </a:xfrm>
+          <a:prstGeom prst="rect">
+            <a:avLst/>
+          </a:prstGeom>
+          <a:solidFill>
+            <a:srgbClr val="F46A5E"/>
+          </a:solidFill>
+          <a:ln>
+            <a:noFill/>
+          </a:ln>
+          <a:effectLst/>
+        </p:spPr>
+        <p:style>
+          <a:lnRef idx="1">
+            <a:schemeClr val="accent1"/>
+          </a:lnRef>
+          <a:fillRef idx="3">
+            <a:schemeClr val="accent1"/>
+          </a:fillRef>
+          <a:effectRef idx="2">
+            <a:schemeClr val="accent1"/>
+          </a:effectRef>
+          <a:fontRef idx="minor">
+            <a:schemeClr val="lt1"/>
+          </a:fontRef>
+        </p:style>
+        <p:txBody>
+          <a:bodyPr rtlCol="0" anchor="ctr"/>
+          <a:lstStyle/>
+          <a:p>
+            <a:pPr algn="ctr"/>
+          </a:p>
+        </p:txBody>
+      </p:sp>
+      <p:sp>
+        <p:nvSpPr>
+          <p:cNvPr id="17" name="TextBox 16"/>
+          <p:cNvSpPr txBox="1"/>
+          <p:nvPr/>
+        </p:nvSpPr>
+        <p:spPr>
+          <a:xfrm>
+            <a:off x="1371600" y="3182112"/>
+            <a:ext cx="4206240" cy="630936"/>
+          </a:xfrm>
+          <a:prstGeom prst="rect">
+            <a:avLst/>
+          </a:prstGeom>
+          <a:noFill/>
+        </p:spPr>
+        <p:txBody>
+          <a:bodyPr wrap="square" anchor="t" lIns="0" rIns="0" tIns="0" bIns="0">
+            <a:spAutoFit/>
+          </a:bodyPr>
+          <a:lstStyle/>
+          <a:p>
+            <a:pPr algn="l">
+              <a:lnSpc>
+                <a:spcPct val="112000"/>
+              </a:lnSpc>
+              <a:spcBef>
+                <a:spcPts val="0"/>
+              </a:spcBef>
+              <a:spcAft>
+                <a:spcPts val="600"/>
+              </a:spcAft>
+            </a:pPr>
+            <a:r>
+              <a:rPr sz="1250" b="0" i="0">
+                <a:solidFill>
+                  <a:srgbClr val="0B1F33"/>
+                </a:solidFill>
+                <a:latin typeface="Microsoft YaHei"/>
+              </a:rPr>
+              <a:t>去 UI 化削弱界面/体验差异</a:t>
+            </a:r>
+          </a:p>
+        </p:txBody>
+      </p:sp>
+      <p:sp>
+        <p:nvSpPr>
+          <p:cNvPr id="18" name="Rectangle 17"/>
+          <p:cNvSpPr/>
+          <p:nvPr/>
+        </p:nvSpPr>
+        <p:spPr>
+          <a:xfrm>
+            <a:off x="1097280" y="3931920"/>
+            <a:ext cx="146304" cy="146304"/>
+          </a:xfrm>
+          <a:prstGeom prst="rect">
+            <a:avLst/>
+          </a:prstGeom>
+          <a:solidFill>
+            <a:srgbClr val="F46A5E"/>
+          </a:solidFill>
+          <a:ln>
+            <a:noFill/>
+          </a:ln>
+          <a:effectLst/>
+        </p:spPr>
+        <p:style>
+          <a:lnRef idx="1">
+            <a:schemeClr val="accent1"/>
+          </a:lnRef>
+          <a:fillRef idx="3">
+            <a:schemeClr val="accent1"/>
+          </a:fillRef>
+          <a:effectRef idx="2">
+            <a:schemeClr val="accent1"/>
+          </a:effectRef>
+          <a:fontRef idx="minor">
+            <a:schemeClr val="lt1"/>
+          </a:fontRef>
+        </p:style>
+        <p:txBody>
+          <a:bodyPr rtlCol="0" anchor="ctr"/>
+          <a:lstStyle/>
+          <a:p>
+            <a:pPr algn="ctr"/>
+          </a:p>
+        </p:txBody>
+      </p:sp>
+      <p:sp>
+        <p:nvSpPr>
+          <p:cNvPr id="19" name="TextBox 18"/>
+          <p:cNvSpPr txBox="1"/>
+          <p:nvPr/>
+        </p:nvSpPr>
+        <p:spPr>
+          <a:xfrm>
+            <a:off x="1371600" y="3867912"/>
+            <a:ext cx="4206240" cy="630936"/>
+          </a:xfrm>
+          <a:prstGeom prst="rect">
+            <a:avLst/>
+          </a:prstGeom>
+          <a:noFill/>
+        </p:spPr>
+        <p:txBody>
+          <a:bodyPr wrap="square" anchor="t" lIns="0" rIns="0" tIns="0" bIns="0">
+            <a:spAutoFit/>
+          </a:bodyPr>
+          <a:lstStyle/>
+          <a:p>
+            <a:pPr algn="l">
+              <a:lnSpc>
+                <a:spcPct val="112000"/>
+              </a:lnSpc>
+              <a:spcBef>
+                <a:spcPts val="0"/>
+              </a:spcBef>
+              <a:spcAft>
+                <a:spcPts val="600"/>
+              </a:spcAft>
+            </a:pPr>
+            <a:r>
+              <a:rPr sz="1250" b="0" i="0">
+                <a:solidFill>
+                  <a:srgbClr val="0B1F33"/>
+                </a:solidFill>
+                <a:latin typeface="Microsoft YaHei"/>
+              </a:rPr>
+              <a:t>能力被比价，沦为可替换的调用后端</a:t>
+            </a:r>
+          </a:p>
+        </p:txBody>
+      </p:sp>
+      <p:sp>
+        <p:nvSpPr>
+          <p:cNvPr id="20" name="Rectangle 19"/>
+          <p:cNvSpPr/>
+          <p:nvPr/>
+        </p:nvSpPr>
+        <p:spPr>
+          <a:xfrm>
+            <a:off x="1097280" y="4617720"/>
+            <a:ext cx="146304" cy="146304"/>
+          </a:xfrm>
+          <a:prstGeom prst="rect">
+            <a:avLst/>
+          </a:prstGeom>
+          <a:solidFill>
+            <a:srgbClr val="F46A5E"/>
+          </a:solidFill>
+          <a:ln>
+            <a:noFill/>
+          </a:ln>
+          <a:effectLst/>
+        </p:spPr>
+        <p:style>
+          <a:lnRef idx="1">
+            <a:schemeClr val="accent1"/>
+          </a:lnRef>
+          <a:fillRef idx="3">
+            <a:schemeClr val="accent1"/>
+          </a:fillRef>
+          <a:effectRef idx="2">
+            <a:schemeClr val="accent1"/>
+          </a:effectRef>
+          <a:fontRef idx="minor">
+            <a:schemeClr val="lt1"/>
+          </a:fontRef>
+        </p:style>
+        <p:txBody>
+          <a:bodyPr rtlCol="0" anchor="ctr"/>
+          <a:lstStyle/>
+          <a:p>
+            <a:pPr algn="ctr"/>
+          </a:p>
+        </p:txBody>
+      </p:sp>
+      <p:sp>
+        <p:nvSpPr>
+          <p:cNvPr id="21" name="TextBox 20"/>
+          <p:cNvSpPr txBox="1"/>
+          <p:nvPr/>
+        </p:nvSpPr>
+        <p:spPr>
+          <a:xfrm>
+            <a:off x="1371600" y="4553712"/>
+            <a:ext cx="4206240" cy="630936"/>
+          </a:xfrm>
+          <a:prstGeom prst="rect">
+            <a:avLst/>
+          </a:prstGeom>
+          <a:noFill/>
+        </p:spPr>
+        <p:txBody>
+          <a:bodyPr wrap="square" anchor="t" lIns="0" rIns="0" tIns="0" bIns="0">
+            <a:spAutoFit/>
+          </a:bodyPr>
+          <a:lstStyle/>
+          <a:p>
+            <a:pPr algn="l">
+              <a:lnSpc>
+                <a:spcPct val="112000"/>
+              </a:lnSpc>
+              <a:spcBef>
+                <a:spcPts val="0"/>
+              </a:spcBef>
+              <a:spcAft>
+                <a:spcPts val="600"/>
+              </a:spcAft>
+            </a:pPr>
+            <a:r>
+              <a:rPr sz="1250" b="0" i="0">
+                <a:solidFill>
+                  <a:srgbClr val="0B1F33"/>
+                </a:solidFill>
+                <a:latin typeface="Microsoft YaHei"/>
+              </a:rPr>
+              <a:t>模型与数据平台向上挤压应用层</a:t>
+            </a:r>
+          </a:p>
+        </p:txBody>
+      </p:sp>
+      <p:sp>
+        <p:nvSpPr>
+          <p:cNvPr id="22" name="Rectangle 21"/>
+          <p:cNvSpPr/>
+          <p:nvPr/>
+        </p:nvSpPr>
+        <p:spPr>
+          <a:xfrm>
+            <a:off x="1097280" y="5303520"/>
+            <a:ext cx="146304" cy="146304"/>
+          </a:xfrm>
+          <a:prstGeom prst="rect">
+            <a:avLst/>
+          </a:prstGeom>
+          <a:solidFill>
+            <a:srgbClr val="F46A5E"/>
+          </a:solidFill>
+          <a:ln>
+            <a:noFill/>
+          </a:ln>
+          <a:effectLst/>
+        </p:spPr>
+        <p:style>
+          <a:lnRef idx="1">
+            <a:schemeClr val="accent1"/>
+          </a:lnRef>
+          <a:fillRef idx="3">
+            <a:schemeClr val="accent1"/>
+          </a:fillRef>
+          <a:effectRef idx="2">
+            <a:schemeClr val="accent1"/>
+          </a:effectRef>
+          <a:fontRef idx="minor">
+            <a:schemeClr val="lt1"/>
+          </a:fontRef>
+        </p:style>
+        <p:txBody>
+          <a:bodyPr rtlCol="0" anchor="ctr"/>
+          <a:lstStyle/>
+          <a:p>
+            <a:pPr algn="ctr"/>
+          </a:p>
+        </p:txBody>
+      </p:sp>
+      <p:sp>
+        <p:nvSpPr>
+          <p:cNvPr id="23" name="TextBox 22"/>
+          <p:cNvSpPr txBox="1"/>
+          <p:nvPr/>
+        </p:nvSpPr>
+        <p:spPr>
+          <a:xfrm>
+            <a:off x="1371600" y="5239512"/>
+            <a:ext cx="4206240" cy="630936"/>
+          </a:xfrm>
+          <a:prstGeom prst="rect">
+            <a:avLst/>
+          </a:prstGeom>
+          <a:noFill/>
+        </p:spPr>
+        <p:txBody>
+          <a:bodyPr wrap="square" anchor="t" lIns="0" rIns="0" tIns="0" bIns="0">
+            <a:spAutoFit/>
+          </a:bodyPr>
+          <a:lstStyle/>
+          <a:p>
+            <a:pPr algn="l">
+              <a:lnSpc>
+                <a:spcPct val="112000"/>
+              </a:lnSpc>
+              <a:spcBef>
+                <a:spcPts val="0"/>
+              </a:spcBef>
+              <a:spcAft>
+                <a:spcPts val="600"/>
+              </a:spcAft>
+            </a:pPr>
+            <a:r>
+              <a:rPr sz="1250" b="0" i="0">
+                <a:solidFill>
+                  <a:srgbClr val="0B1F33"/>
+                </a:solidFill>
+                <a:latin typeface="Microsoft YaHei"/>
+              </a:rPr>
+              <a:t>按结果计费冲击传统席位收入</a:t>
+            </a:r>
+          </a:p>
+        </p:txBody>
+      </p:sp>
+      <p:sp>
+        <p:nvSpPr>
+          <p:cNvPr id="24" name="Rounded Rectangle 23"/>
+          <p:cNvSpPr/>
+          <p:nvPr/>
+        </p:nvSpPr>
+        <p:spPr>
+          <a:xfrm>
+            <a:off x="6355080" y="1783080"/>
+            <a:ext cx="5120640" cy="4206240"/>
+          </a:xfrm>
+          <a:prstGeom prst="roundRect">
+            <a:avLst>
+              <a:gd name="adj" fmla="val 6000"/>
+            </a:avLst>
+          </a:prstGeom>
+          <a:solidFill>
+            <a:srgbClr val="F4F7FB"/>
+          </a:solidFill>
+          <a:ln w="16510">
+            <a:solidFill>
+              <a:srgbClr val="14B8A6"/>
+            </a:solidFill>
+          </a:ln>
+          <a:effectLst/>
+          <a:effectLst>
+            <a:outerShdw blurRad="90000" dist="40000" dir="5400000" rotWithShape="0">
+              <a:srgbClr val="0B1F33">
+                <a:alpha val="18000"/>
+              </a:srgbClr>
+            </a:outerShdw>
+          </a:effectLst>
+        </p:spPr>
+        <p:style>
+          <a:lnRef idx="1">
+            <a:schemeClr val="accent1"/>
+          </a:lnRef>
+          <a:fillRef idx="3">
+            <a:schemeClr val="accent1"/>
+          </a:fillRef>
+          <a:effectRef idx="2">
+            <a:schemeClr val="accent1"/>
+          </a:effectRef>
+          <a:fontRef idx="minor">
+            <a:schemeClr val="lt1"/>
+          </a:fontRef>
+        </p:style>
+        <p:txBody>
+          <a:bodyPr rtlCol="0" anchor="ctr"/>
+          <a:lstStyle/>
+          <a:p>
+            <a:pPr algn="ctr"/>
+          </a:p>
+        </p:txBody>
+      </p:sp>
+      <p:sp>
+        <p:nvSpPr>
+          <p:cNvPr id="25" name="Rounded Rectangle 24"/>
+          <p:cNvSpPr/>
+          <p:nvPr/>
+        </p:nvSpPr>
+        <p:spPr>
+          <a:xfrm>
+            <a:off x="6355080" y="1783080"/>
+            <a:ext cx="5120640" cy="548640"/>
+          </a:xfrm>
+          <a:prstGeom prst="roundRect">
+            <a:avLst>
+              <a:gd name="adj" fmla="val 6000"/>
+            </a:avLst>
+          </a:prstGeom>
+          <a:solidFill>
+            <a:srgbClr val="14B8A6"/>
+          </a:solidFill>
+          <a:ln>
+            <a:noFill/>
+          </a:ln>
+          <a:effectLst/>
+        </p:spPr>
+        <p:style>
+          <a:lnRef idx="1">
+            <a:schemeClr val="accent1"/>
+          </a:lnRef>
+          <a:fillRef idx="3">
+            <a:schemeClr val="accent1"/>
+          </a:fillRef>
+          <a:effectRef idx="2">
+            <a:schemeClr val="accent1"/>
+          </a:effectRef>
+          <a:fontRef idx="minor">
+            <a:schemeClr val="lt1"/>
+          </a:fontRef>
+        </p:style>
+        <p:txBody>
+          <a:bodyPr rtlCol="0" anchor="ctr"/>
+          <a:lstStyle/>
+          <a:p>
+            <a:pPr algn="ctr"/>
+          </a:p>
+        </p:txBody>
+      </p:sp>
+      <p:sp>
+        <p:nvSpPr>
+          <p:cNvPr id="26" name="TextBox 25"/>
+          <p:cNvSpPr txBox="1"/>
+          <p:nvPr/>
+        </p:nvSpPr>
+        <p:spPr>
+          <a:xfrm>
+            <a:off x="6355080" y="1783080"/>
+            <a:ext cx="5120640" cy="548640"/>
+          </a:xfrm>
+          <a:prstGeom prst="rect">
+            <a:avLst/>
+          </a:prstGeom>
+          <a:noFill/>
+        </p:spPr>
+        <p:txBody>
+          <a:bodyPr wrap="square" anchor="ctr" lIns="0" rIns="0" tIns="0" bIns="0">
+            <a:spAutoFit/>
+          </a:bodyPr>
+          <a:lstStyle/>
+          <a:p>
+            <a:pPr algn="ctr">
+              <a:lnSpc>
+                <a:spcPct val="100000"/>
+              </a:lnSpc>
+              <a:spcBef>
+                <a:spcPts val="0"/>
+              </a:spcBef>
+              <a:spcAft>
+                <a:spcPts val="600"/>
+              </a:spcAft>
+            </a:pPr>
+            <a:r>
+              <a:rPr sz="1500" b="1" i="0">
+                <a:solidFill>
+                  <a:srgbClr val="FFFFFF"/>
+                </a:solidFill>
+                <a:latin typeface="Microsoft YaHei"/>
+              </a:rPr>
+              <a:t>独特价值与客户粘性</a:t>
+            </a:r>
+          </a:p>
+        </p:txBody>
+      </p:sp>
+      <p:sp>
+        <p:nvSpPr>
+          <p:cNvPr id="27" name="Rectangle 26"/>
+          <p:cNvSpPr/>
+          <p:nvPr/>
+        </p:nvSpPr>
+        <p:spPr>
+          <a:xfrm>
+            <a:off x="6675120" y="2560320"/>
+            <a:ext cx="146304" cy="146304"/>
+          </a:xfrm>
+          <a:prstGeom prst="rect">
+            <a:avLst/>
+          </a:prstGeom>
+          <a:solidFill>
+            <a:srgbClr val="14B8A6"/>
+          </a:solidFill>
+          <a:ln>
+            <a:noFill/>
+          </a:ln>
+          <a:effectLst/>
+        </p:spPr>
+        <p:style>
+          <a:lnRef idx="1">
+            <a:schemeClr val="accent1"/>
+          </a:lnRef>
+          <a:fillRef idx="3">
+            <a:schemeClr val="accent1"/>
+          </a:fillRef>
+          <a:effectRef idx="2">
+            <a:schemeClr val="accent1"/>
+          </a:effectRef>
+          <a:fontRef idx="minor">
+            <a:schemeClr val="lt1"/>
+          </a:fontRef>
+        </p:style>
+        <p:txBody>
+          <a:bodyPr rtlCol="0" anchor="ctr"/>
+          <a:lstStyle/>
+          <a:p>
+            <a:pPr algn="ctr"/>
+          </a:p>
+        </p:txBody>
+      </p:sp>
+      <p:sp>
+        <p:nvSpPr>
+          <p:cNvPr id="28" name="TextBox 27"/>
+          <p:cNvSpPr txBox="1"/>
+          <p:nvPr/>
+        </p:nvSpPr>
+        <p:spPr>
+          <a:xfrm>
+            <a:off x="6949440" y="2496312"/>
+            <a:ext cx="4206240" cy="630936"/>
+          </a:xfrm>
+          <a:prstGeom prst="rect">
+            <a:avLst/>
+          </a:prstGeom>
+          <a:noFill/>
+        </p:spPr>
+        <p:txBody>
+          <a:bodyPr wrap="square" anchor="t" lIns="0" rIns="0" tIns="0" bIns="0">
+            <a:spAutoFit/>
+          </a:bodyPr>
+          <a:lstStyle/>
+          <a:p>
+            <a:pPr algn="l">
+              <a:lnSpc>
+                <a:spcPct val="112000"/>
+              </a:lnSpc>
+              <a:spcBef>
+                <a:spcPts val="0"/>
+              </a:spcBef>
+              <a:spcAft>
+                <a:spcPts val="600"/>
+              </a:spcAft>
+            </a:pPr>
+            <a:r>
+              <a:rPr sz="1250" b="0" i="0">
+                <a:solidFill>
+                  <a:srgbClr val="0B1F33"/>
+                </a:solidFill>
+                <a:latin typeface="Microsoft YaHei"/>
+              </a:rPr>
+              <a:t>多年沉淀的客户关系数据，Agent 独有上下文</a:t>
+            </a:r>
+          </a:p>
+        </p:txBody>
+      </p:sp>
+      <p:sp>
+        <p:nvSpPr>
+          <p:cNvPr id="29" name="Rectangle 28"/>
+          <p:cNvSpPr/>
+          <p:nvPr/>
+        </p:nvSpPr>
+        <p:spPr>
+          <a:xfrm>
+            <a:off x="6675120" y="3246120"/>
+            <a:ext cx="146304" cy="146304"/>
+          </a:xfrm>
+          <a:prstGeom prst="rect">
+            <a:avLst/>
+          </a:prstGeom>
+          <a:solidFill>
+            <a:srgbClr val="14B8A6"/>
+          </a:solidFill>
+          <a:ln>
+            <a:noFill/>
+          </a:ln>
+          <a:effectLst/>
+        </p:spPr>
+        <p:style>
+          <a:lnRef idx="1">
+            <a:schemeClr val="accent1"/>
+          </a:lnRef>
+          <a:fillRef idx="3">
+            <a:schemeClr val="accent1"/>
+          </a:fillRef>
+          <a:effectRef idx="2">
+            <a:schemeClr val="accent1"/>
+          </a:effectRef>
+          <a:fontRef idx="minor">
+            <a:schemeClr val="lt1"/>
+          </a:fontRef>
+        </p:style>
+        <p:txBody>
+          <a:bodyPr rtlCol="0" anchor="ctr"/>
+          <a:lstStyle/>
+          <a:p>
+            <a:pPr algn="ctr"/>
+          </a:p>
+        </p:txBody>
+      </p:sp>
+      <p:sp>
+        <p:nvSpPr>
+          <p:cNvPr id="30" name="TextBox 29"/>
+          <p:cNvSpPr txBox="1"/>
+          <p:nvPr/>
+        </p:nvSpPr>
+        <p:spPr>
+          <a:xfrm>
+            <a:off x="6949440" y="3182112"/>
+            <a:ext cx="4206240" cy="630936"/>
+          </a:xfrm>
+          <a:prstGeom prst="rect">
+            <a:avLst/>
+          </a:prstGeom>
+          <a:noFill/>
+        </p:spPr>
+        <p:txBody>
+          <a:bodyPr wrap="square" anchor="t" lIns="0" rIns="0" tIns="0" bIns="0">
+            <a:spAutoFit/>
+          </a:bodyPr>
+          <a:lstStyle/>
+          <a:p>
+            <a:pPr algn="l">
+              <a:lnSpc>
+                <a:spcPct val="112000"/>
+              </a:lnSpc>
+              <a:spcBef>
+                <a:spcPts val="0"/>
+              </a:spcBef>
+              <a:spcAft>
+                <a:spcPts val="600"/>
+              </a:spcAft>
+            </a:pPr>
+            <a:r>
+              <a:rPr sz="1250" b="0" i="0">
+                <a:solidFill>
+                  <a:srgbClr val="0B1F33"/>
+                </a:solidFill>
+                <a:latin typeface="Microsoft YaHei"/>
+              </a:rPr>
+              <a:t>深度嵌入核心业务流程，替换成本极高</a:t>
+            </a:r>
+          </a:p>
+        </p:txBody>
+      </p:sp>
+      <p:sp>
+        <p:nvSpPr>
+          <p:cNvPr id="31" name="Rectangle 30"/>
+          <p:cNvSpPr/>
+          <p:nvPr/>
+        </p:nvSpPr>
+        <p:spPr>
+          <a:xfrm>
+            <a:off x="6675120" y="3931920"/>
+            <a:ext cx="146304" cy="146304"/>
+          </a:xfrm>
+          <a:prstGeom prst="rect">
+            <a:avLst/>
+          </a:prstGeom>
+          <a:solidFill>
+            <a:srgbClr val="14B8A6"/>
+          </a:solidFill>
+          <a:ln>
+            <a:noFill/>
+          </a:ln>
+          <a:effectLst/>
+        </p:spPr>
+        <p:style>
+          <a:lnRef idx="1">
+            <a:schemeClr val="accent1"/>
+          </a:lnRef>
+          <a:fillRef idx="3">
+            <a:schemeClr val="accent1"/>
+          </a:fillRef>
+          <a:effectRef idx="2">
+            <a:schemeClr val="accent1"/>
+          </a:effectRef>
+          <a:fontRef idx="minor">
+            <a:schemeClr val="lt1"/>
+          </a:fontRef>
+        </p:style>
+        <p:txBody>
+          <a:bodyPr rtlCol="0" anchor="ctr"/>
+          <a:lstStyle/>
+          <a:p>
+            <a:pPr algn="ctr"/>
+          </a:p>
+        </p:txBody>
+      </p:sp>
+      <p:sp>
+        <p:nvSpPr>
+          <p:cNvPr id="32" name="TextBox 31"/>
+          <p:cNvSpPr txBox="1"/>
+          <p:nvPr/>
+        </p:nvSpPr>
+        <p:spPr>
+          <a:xfrm>
+            <a:off x="6949440" y="3867912"/>
+            <a:ext cx="4206240" cy="630936"/>
+          </a:xfrm>
+          <a:prstGeom prst="rect">
+            <a:avLst/>
+          </a:prstGeom>
+          <a:noFill/>
+        </p:spPr>
+        <p:txBody>
+          <a:bodyPr wrap="square" anchor="t" lIns="0" rIns="0" tIns="0" bIns="0">
+            <a:spAutoFit/>
+          </a:bodyPr>
+          <a:lstStyle/>
+          <a:p>
+            <a:pPr algn="l">
+              <a:lnSpc>
+                <a:spcPct val="112000"/>
+              </a:lnSpc>
+              <a:spcBef>
+                <a:spcPts val="0"/>
+              </a:spcBef>
+              <a:spcAft>
+                <a:spcPts val="600"/>
+              </a:spcAft>
+            </a:pPr>
+            <a:r>
+              <a:rPr sz="1250" b="0" i="0">
+                <a:solidFill>
+                  <a:srgbClr val="0B1F33"/>
+                </a:solidFill>
+                <a:latin typeface="Microsoft YaHei"/>
+              </a:rPr>
+              <a:t>AppExchange 生态 + ISV 伙伴网络引力</a:t>
+            </a:r>
+          </a:p>
+        </p:txBody>
+      </p:sp>
+      <p:sp>
+        <p:nvSpPr>
+          <p:cNvPr id="33" name="Rectangle 32"/>
+          <p:cNvSpPr/>
+          <p:nvPr/>
+        </p:nvSpPr>
+        <p:spPr>
+          <a:xfrm>
+            <a:off x="6675120" y="4617720"/>
+            <a:ext cx="146304" cy="146304"/>
+          </a:xfrm>
+          <a:prstGeom prst="rect">
+            <a:avLst/>
+          </a:prstGeom>
+          <a:solidFill>
+            <a:srgbClr val="14B8A6"/>
+          </a:solidFill>
+          <a:ln>
+            <a:noFill/>
+          </a:ln>
+          <a:effectLst/>
+        </p:spPr>
+        <p:style>
+          <a:lnRef idx="1">
+            <a:schemeClr val="accent1"/>
+          </a:lnRef>
+          <a:fillRef idx="3">
+            <a:schemeClr val="accent1"/>
+          </a:fillRef>
+          <a:effectRef idx="2">
+            <a:schemeClr val="accent1"/>
+          </a:effectRef>
+          <a:fontRef idx="minor">
+            <a:schemeClr val="lt1"/>
+          </a:fontRef>
+        </p:style>
+        <p:txBody>
+          <a:bodyPr rtlCol="0" anchor="ctr"/>
+          <a:lstStyle/>
+          <a:p>
+            <a:pPr algn="ctr"/>
+          </a:p>
+        </p:txBody>
+      </p:sp>
+      <p:sp>
+        <p:nvSpPr>
+          <p:cNvPr id="34" name="TextBox 33"/>
+          <p:cNvSpPr txBox="1"/>
+          <p:nvPr/>
+        </p:nvSpPr>
+        <p:spPr>
+          <a:xfrm>
+            <a:off x="6949440" y="4553712"/>
+            <a:ext cx="4206240" cy="630936"/>
+          </a:xfrm>
+          <a:prstGeom prst="rect">
+            <a:avLst/>
+          </a:prstGeom>
+          <a:noFill/>
+        </p:spPr>
+        <p:txBody>
+          <a:bodyPr wrap="square" anchor="t" lIns="0" rIns="0" tIns="0" bIns="0">
+            <a:spAutoFit/>
+          </a:bodyPr>
+          <a:lstStyle/>
+          <a:p>
+            <a:pPr algn="l">
+              <a:lnSpc>
+                <a:spcPct val="112000"/>
+              </a:lnSpc>
+              <a:spcBef>
+                <a:spcPts val="0"/>
+              </a:spcBef>
+              <a:spcAft>
+                <a:spcPts val="600"/>
+              </a:spcAft>
+            </a:pPr>
+            <a:r>
+              <a:rPr sz="1250" b="0" i="0">
+                <a:solidFill>
+                  <a:srgbClr val="0B1F33"/>
+                </a:solidFill>
+                <a:latin typeface="Microsoft YaHei"/>
+              </a:rPr>
+              <a:t>Trust Layer 把「可信」做成差异点</a:t>
+            </a:r>
+          </a:p>
+        </p:txBody>
+      </p:sp>
+      <p:sp>
+        <p:nvSpPr>
+          <p:cNvPr id="35" name="Rectangle 34"/>
+          <p:cNvSpPr/>
+          <p:nvPr/>
+        </p:nvSpPr>
+        <p:spPr>
+          <a:xfrm>
+            <a:off x="6675120" y="5303520"/>
+            <a:ext cx="146304" cy="146304"/>
+          </a:xfrm>
+          <a:prstGeom prst="rect">
+            <a:avLst/>
+          </a:prstGeom>
+          <a:solidFill>
+            <a:srgbClr val="14B8A6"/>
+          </a:solidFill>
+          <a:ln>
+            <a:noFill/>
+          </a:ln>
+          <a:effectLst/>
+        </p:spPr>
+        <p:style>
+          <a:lnRef idx="1">
+            <a:schemeClr val="accent1"/>
+          </a:lnRef>
+          <a:fillRef idx="3">
+            <a:schemeClr val="accent1"/>
+          </a:fillRef>
+          <a:effectRef idx="2">
+            <a:schemeClr val="accent1"/>
+          </a:effectRef>
+          <a:fontRef idx="minor">
+            <a:schemeClr val="lt1"/>
+          </a:fontRef>
+        </p:style>
+        <p:txBody>
+          <a:bodyPr rtlCol="0" anchor="ctr"/>
+          <a:lstStyle/>
+          <a:p>
+            <a:pPr algn="ctr"/>
+          </a:p>
+        </p:txBody>
+      </p:sp>
+      <p:sp>
+        <p:nvSpPr>
+          <p:cNvPr id="36" name="TextBox 35"/>
+          <p:cNvSpPr txBox="1"/>
+          <p:nvPr/>
+        </p:nvSpPr>
+        <p:spPr>
+          <a:xfrm>
+            <a:off x="6949440" y="5239512"/>
+            <a:ext cx="4206240" cy="630936"/>
+          </a:xfrm>
+          <a:prstGeom prst="rect">
+            <a:avLst/>
+          </a:prstGeom>
+          <a:noFill/>
+        </p:spPr>
+        <p:txBody>
+          <a:bodyPr wrap="square" anchor="t" lIns="0" rIns="0" tIns="0" bIns="0">
+            <a:spAutoFit/>
+          </a:bodyPr>
+          <a:lstStyle/>
+          <a:p>
+            <a:pPr algn="l">
+              <a:lnSpc>
+                <a:spcPct val="112000"/>
+              </a:lnSpc>
+              <a:spcBef>
+                <a:spcPts val="0"/>
+              </a:spcBef>
+              <a:spcAft>
+                <a:spcPts val="600"/>
+              </a:spcAft>
+            </a:pPr>
+            <a:r>
+              <a:rPr sz="1250" b="0" i="0">
+                <a:solidFill>
+                  <a:srgbClr val="0B1F33"/>
+                </a:solidFill>
+                <a:latin typeface="Microsoft YaHei"/>
+              </a:rPr>
+              <a:t>组织习惯与流程绑定，客户留存强</a:t>
+            </a:r>
+          </a:p>
+        </p:txBody>
+      </p:sp>
+      <p:sp>
+        <p:nvSpPr>
+          <p:cNvPr id="37" name="TextBox 36"/>
+          <p:cNvSpPr txBox="1"/>
+          <p:nvPr/>
+        </p:nvSpPr>
+        <p:spPr>
+          <a:xfrm>
+            <a:off x="777240" y="6053328"/>
+            <a:ext cx="10607040" cy="502920"/>
+          </a:xfrm>
+          <a:prstGeom prst="rect">
+            <a:avLst/>
+          </a:prstGeom>
+          <a:noFill/>
+        </p:spPr>
+        <p:txBody>
+          <a:bodyPr wrap="square" anchor="t" lIns="0" rIns="0" tIns="0" bIns="0">
+            <a:spAutoFit/>
+          </a:bodyPr>
+          <a:lstStyle/>
+          <a:p>
+            <a:pPr algn="l">
+              <a:lnSpc>
+                <a:spcPct val="110000"/>
+              </a:lnSpc>
+              <a:spcBef>
+                <a:spcPts val="0"/>
+              </a:spcBef>
+              <a:spcAft>
+                <a:spcPts val="600"/>
+              </a:spcAft>
+            </a:pPr>
+            <a:r>
+              <a:rPr sz="1250" b="1" i="0">
+                <a:solidFill>
+                  <a:srgbClr val="F46A5E"/>
+                </a:solidFill>
+                <a:latin typeface="Microsoft YaHei"/>
+              </a:rPr>
+              <a:t>本质：</a:t>
+            </a:r>
+            <a:r>
+              <a:rPr sz="1200" b="0" i="0">
+                <a:solidFill>
+                  <a:srgbClr val="0B1F33"/>
+                </a:solidFill>
+                <a:latin typeface="Microsoft YaHei"/>
+              </a:rPr>
+              <a:t>独有客户数据 + 深嵌业务流程，是 Salesforce 在去 UI 化时代仍难被替代的粘性。</a:t>
+            </a:r>
+          </a:p>
+        </p:txBody>
+      </p:sp>
+    </p:spTree>
+  </p:cSld>
+  <p:clrMapOvr>
+    <a:masterClrMapping/>
+  </p:clrMapOvr>
+</p:sld>
+</file>
+
+<file path=ppt/slides/slide13.xml><?xml version="1.0" encoding="utf-8"?>
+<p:sld xmlns:a="http://schemas.openxmlformats.org/drawingml/2006/main" xmlns:p="http://schemas.openxmlformats.org/presentationml/2006/main" xmlns:r="http://schemas.openxmlformats.org/officeDocument/2006/relationships">
+  <p:cSld>
+    <p:spTree>
+      <p:nvGrpSpPr>
+        <p:cNvPr id="1" name=""/>
+        <p:cNvGrpSpPr/>
+        <p:nvPr/>
+      </p:nvGrpSpPr>
+      <p:grpSpPr/>
+      <p:sp>
+        <p:nvSpPr>
+          <p:cNvPr id="2" name="Rectangle 1"/>
+          <p:cNvSpPr/>
+          <p:nvPr/>
+        </p:nvSpPr>
+        <p:spPr>
+          <a:xfrm>
+            <a:off x="0" y="0"/>
+            <a:ext cx="12191695" cy="1078992"/>
+          </a:xfrm>
+          <a:prstGeom prst="rect">
+            <a:avLst/>
+          </a:prstGeom>
+          <a:solidFill>
+            <a:srgbClr val="FFFFFF"/>
+          </a:solidFill>
+          <a:ln>
+            <a:noFill/>
+          </a:ln>
+          <a:effectLst/>
+        </p:spPr>
+        <p:style>
+          <a:lnRef idx="1">
+            <a:schemeClr val="accent1"/>
+          </a:lnRef>
+          <a:fillRef idx="3">
+            <a:schemeClr val="accent1"/>
+          </a:fillRef>
+          <a:effectRef idx="2">
+            <a:schemeClr val="accent1"/>
+          </a:effectRef>
+          <a:fontRef idx="minor">
+            <a:schemeClr val="lt1"/>
+          </a:fontRef>
+        </p:style>
+        <p:txBody>
+          <a:bodyPr rtlCol="0" anchor="ctr"/>
+          <a:lstStyle/>
+          <a:p>
+            <a:pPr algn="ctr"/>
+          </a:p>
+        </p:txBody>
+      </p:sp>
+      <p:sp>
+        <p:nvSpPr>
+          <p:cNvPr id="3" name="Rectangle 2"/>
+          <p:cNvSpPr/>
+          <p:nvPr/>
+        </p:nvSpPr>
+        <p:spPr>
+          <a:xfrm>
+            <a:off x="548640" y="310896"/>
+            <a:ext cx="109728" cy="457200"/>
+          </a:xfrm>
+          <a:prstGeom prst="rect">
+            <a:avLst/>
+          </a:prstGeom>
+          <a:solidFill>
+            <a:srgbClr val="1B6EF3"/>
+          </a:solidFill>
+          <a:ln>
+            <a:noFill/>
+          </a:ln>
+          <a:effectLst/>
+        </p:spPr>
+        <p:style>
+          <a:lnRef idx="1">
+            <a:schemeClr val="accent1"/>
+          </a:lnRef>
+          <a:fillRef idx="3">
+            <a:schemeClr val="accent1"/>
+          </a:fillRef>
+          <a:effectRef idx="2">
+            <a:schemeClr val="accent1"/>
+          </a:effectRef>
+          <a:fontRef idx="minor">
+            <a:schemeClr val="lt1"/>
+          </a:fontRef>
+        </p:style>
+        <p:txBody>
+          <a:bodyPr rtlCol="0" anchor="ctr"/>
+          <a:lstStyle/>
+          <a:p>
+            <a:pPr algn="ctr"/>
+          </a:p>
+        </p:txBody>
+      </p:sp>
+      <p:sp>
+        <p:nvSpPr>
+          <p:cNvPr id="4" name="TextBox 3"/>
+          <p:cNvSpPr txBox="1"/>
+          <p:nvPr/>
+        </p:nvSpPr>
+        <p:spPr>
+          <a:xfrm>
+            <a:off x="777240" y="237744"/>
+            <a:ext cx="9601200" cy="292608"/>
+          </a:xfrm>
+          <a:prstGeom prst="rect">
+            <a:avLst/>
+          </a:prstGeom>
+          <a:noFill/>
+        </p:spPr>
+        <p:txBody>
+          <a:bodyPr wrap="square" anchor="t" lIns="0" rIns="0" tIns="0" bIns="0">
+            <a:spAutoFit/>
+          </a:bodyPr>
+          <a:lstStyle/>
+          <a:p>
+            <a:pPr algn="l">
+              <a:lnSpc>
+                <a:spcPct val="100000"/>
+              </a:lnSpc>
+              <a:spcBef>
+                <a:spcPts val="0"/>
+              </a:spcBef>
+              <a:spcAft>
+                <a:spcPts val="600"/>
+              </a:spcAft>
+            </a:pPr>
+            <a:r>
+              <a:rPr sz="1150" b="1" i="0">
+                <a:solidFill>
+                  <a:srgbClr val="1B6EF3"/>
+                </a:solidFill>
+                <a:latin typeface="Microsoft YaHei"/>
+              </a:rPr>
+              <a:t>STRATEGIC TAKEAWAYS</a:t>
+            </a:r>
+          </a:p>
+        </p:txBody>
+      </p:sp>
+      <p:sp>
+        <p:nvSpPr>
+          <p:cNvPr id="5" name="TextBox 4"/>
+          <p:cNvSpPr txBox="1"/>
+          <p:nvPr/>
+        </p:nvSpPr>
+        <p:spPr>
+          <a:xfrm>
+            <a:off x="777240" y="475488"/>
+            <a:ext cx="10332720" cy="457200"/>
+          </a:xfrm>
+          <a:prstGeom prst="rect">
+            <a:avLst/>
+          </a:prstGeom>
+          <a:noFill/>
+        </p:spPr>
+        <p:txBody>
+          <a:bodyPr wrap="square" anchor="t" lIns="0" rIns="0" tIns="0" bIns="0">
+            <a:spAutoFit/>
+          </a:bodyPr>
+          <a:lstStyle/>
+          <a:p>
+            <a:pPr algn="l">
+              <a:lnSpc>
+                <a:spcPct val="100000"/>
+              </a:lnSpc>
+              <a:spcBef>
+                <a:spcPts val="0"/>
+              </a:spcBef>
+              <a:spcAft>
+                <a:spcPts val="600"/>
+              </a:spcAft>
+            </a:pPr>
+            <a:r>
+              <a:rPr sz="2200" b="1" i="0">
+                <a:solidFill>
+                  <a:srgbClr val="0B1F33"/>
+                </a:solidFill>
+                <a:latin typeface="Microsoft YaHei"/>
+              </a:rPr>
+              <a:t>三个必须记住的判断</a:t>
+            </a:r>
+          </a:p>
+        </p:txBody>
+      </p:sp>
+      <p:sp>
+        <p:nvSpPr>
+          <p:cNvPr id="6" name="TextBox 5"/>
+          <p:cNvSpPr txBox="1"/>
+          <p:nvPr/>
+        </p:nvSpPr>
+        <p:spPr>
+          <a:xfrm>
+            <a:off x="10911535" y="384048"/>
+            <a:ext cx="822960" cy="365760"/>
+          </a:xfrm>
+          <a:prstGeom prst="rect">
+            <a:avLst/>
+          </a:prstGeom>
+          <a:noFill/>
+        </p:spPr>
+        <p:txBody>
+          <a:bodyPr wrap="square" anchor="t" lIns="0" rIns="0" tIns="0" bIns="0">
+            <a:spAutoFit/>
+          </a:bodyPr>
+          <a:lstStyle/>
+          <a:p>
+            <a:pPr algn="r">
+              <a:lnSpc>
+                <a:spcPct val="100000"/>
+              </a:lnSpc>
+              <a:spcBef>
+                <a:spcPts val="0"/>
+              </a:spcBef>
+              <a:spcAft>
+                <a:spcPts val="600"/>
+              </a:spcAft>
+            </a:pPr>
+            <a:r>
+              <a:rPr sz="1700" b="1" i="0">
+                <a:solidFill>
+                  <a:srgbClr val="1B6EF3"/>
+                </a:solidFill>
+                <a:latin typeface="Microsoft YaHei"/>
+              </a:rPr>
+              <a:t>13</a:t>
+            </a:r>
+            <a:r>
+              <a:rPr sz="1100" b="0" i="0">
+                <a:solidFill>
+                  <a:srgbClr val="8A98A6"/>
+                </a:solidFill>
+                <a:latin typeface="Microsoft YaHei"/>
+              </a:rPr>
+              <a:t> / 14</a:t>
+            </a:r>
+          </a:p>
+        </p:txBody>
+      </p:sp>
+      <p:sp>
+        <p:nvSpPr>
+          <p:cNvPr id="7" name="Rectangle 6"/>
+          <p:cNvSpPr/>
+          <p:nvPr/>
+        </p:nvSpPr>
+        <p:spPr>
+          <a:xfrm>
+            <a:off x="0" y="1078992"/>
+            <a:ext cx="12191695" cy="15240"/>
+          </a:xfrm>
+          <a:prstGeom prst="rect">
+            <a:avLst/>
+          </a:prstGeom>
+          <a:solidFill>
+            <a:srgbClr val="D7DEE6"/>
+          </a:solidFill>
+          <a:ln>
+            <a:noFill/>
+          </a:ln>
+          <a:effectLst/>
+        </p:spPr>
+        <p:style>
+          <a:lnRef idx="1">
+            <a:schemeClr val="accent1"/>
+          </a:lnRef>
+          <a:fillRef idx="3">
+            <a:schemeClr val="accent1"/>
+          </a:fillRef>
+          <a:effectRef idx="2">
+            <a:schemeClr val="accent1"/>
+          </a:effectRef>
+          <a:fontRef idx="minor">
+            <a:schemeClr val="lt1"/>
+          </a:fontRef>
+        </p:style>
+        <p:txBody>
+          <a:bodyPr rtlCol="0" anchor="ctr"/>
+          <a:lstStyle/>
+          <a:p>
+            <a:pPr algn="ctr"/>
+          </a:p>
+        </p:txBody>
+      </p:sp>
+      <p:sp>
+        <p:nvSpPr>
+          <p:cNvPr id="8" name="Rectangle 7"/>
+          <p:cNvSpPr/>
+          <p:nvPr/>
+        </p:nvSpPr>
+        <p:spPr>
+          <a:xfrm>
+            <a:off x="0" y="6565392"/>
+            <a:ext cx="12191695" cy="292608"/>
+          </a:xfrm>
+          <a:prstGeom prst="rect">
+            <a:avLst/>
+          </a:prstGeom>
+          <a:solidFill>
+            <a:srgbClr val="0B1F33"/>
+          </a:solidFill>
+          <a:ln>
+            <a:noFill/>
+          </a:ln>
+          <a:effectLst/>
+        </p:spPr>
+        <p:style>
+          <a:lnRef idx="1">
+            <a:schemeClr val="accent1"/>
+          </a:lnRef>
+          <a:fillRef idx="3">
+            <a:schemeClr val="accent1"/>
+          </a:fillRef>
+          <a:effectRef idx="2">
+            <a:schemeClr val="accent1"/>
+          </a:effectRef>
+          <a:fontRef idx="minor">
+            <a:schemeClr val="lt1"/>
+          </a:fontRef>
+        </p:style>
+        <p:txBody>
+          <a:bodyPr rtlCol="0" anchor="ctr"/>
+          <a:lstStyle/>
+          <a:p>
+            <a:pPr algn="ctr"/>
+          </a:p>
+        </p:txBody>
+      </p:sp>
+      <p:sp>
+        <p:nvSpPr>
+          <p:cNvPr id="9" name="TextBox 8"/>
+          <p:cNvSpPr txBox="1"/>
+          <p:nvPr/>
+        </p:nvSpPr>
+        <p:spPr>
+          <a:xfrm>
+            <a:off x="548640" y="6583680"/>
+            <a:ext cx="8229600" cy="256032"/>
+          </a:xfrm>
+          <a:prstGeom prst="rect">
+            <a:avLst/>
+          </a:prstGeom>
+          <a:noFill/>
+        </p:spPr>
+        <p:txBody>
+          <a:bodyPr wrap="square" anchor="ctr" lIns="0" rIns="0" tIns="0" bIns="0">
+            <a:spAutoFit/>
+          </a:bodyPr>
+          <a:lstStyle/>
+          <a:p>
+            <a:pPr algn="l">
+              <a:lnSpc>
+                <a:spcPct val="100000"/>
+              </a:lnSpc>
+              <a:spcBef>
+                <a:spcPts val="0"/>
+              </a:spcBef>
+              <a:spcAft>
+                <a:spcPts val="600"/>
+              </a:spcAft>
+            </a:pPr>
+            <a:r>
+              <a:rPr sz="850" b="0" i="0">
+                <a:solidFill>
+                  <a:srgbClr val="C2CEDB"/>
+                </a:solidFill>
+                <a:latin typeface="Microsoft YaHei"/>
+              </a:rPr>
+              <a:t>AI 产业六层模型 · 应用层 · Salesforce</a:t>
+            </a:r>
+          </a:p>
+        </p:txBody>
+      </p:sp>
+      <p:sp>
+        <p:nvSpPr>
+          <p:cNvPr id="10" name="Rounded Rectangle 9"/>
+          <p:cNvSpPr/>
+          <p:nvPr/>
+        </p:nvSpPr>
+        <p:spPr>
+          <a:xfrm>
+            <a:off x="777240" y="1463040"/>
+            <a:ext cx="10607040" cy="1618488"/>
+          </a:xfrm>
+          <a:prstGeom prst="roundRect">
+            <a:avLst>
+              <a:gd name="adj" fmla="val 6000"/>
+            </a:avLst>
+          </a:prstGeom>
+          <a:solidFill>
+            <a:srgbClr val="F4F7FB"/>
+          </a:solidFill>
+          <a:ln>
+            <a:noFill/>
+          </a:ln>
+          <a:effectLst/>
+        </p:spPr>
+        <p:style>
+          <a:lnRef idx="1">
+            <a:schemeClr val="accent1"/>
+          </a:lnRef>
+          <a:fillRef idx="3">
+            <a:schemeClr val="accent1"/>
+          </a:fillRef>
+          <a:effectRef idx="2">
+            <a:schemeClr val="accent1"/>
+          </a:effectRef>
+          <a:fontRef idx="minor">
+            <a:schemeClr val="lt1"/>
+          </a:fontRef>
+        </p:style>
+        <p:txBody>
+          <a:bodyPr rtlCol="0" anchor="ctr"/>
+          <a:lstStyle/>
+          <a:p>
+            <a:pPr algn="ctr"/>
+          </a:p>
+        </p:txBody>
+      </p:sp>
+      <p:sp>
+        <p:nvSpPr>
+          <p:cNvPr id="11" name="Oval 10"/>
+          <p:cNvSpPr/>
+          <p:nvPr/>
+        </p:nvSpPr>
+        <p:spPr>
+          <a:xfrm>
+            <a:off x="1033272" y="2043684"/>
+            <a:ext cx="457200" cy="457200"/>
+          </a:xfrm>
+          <a:prstGeom prst="ellipse">
+            <a:avLst/>
+          </a:prstGeom>
+          <a:solidFill>
+            <a:srgbClr val="1B6EF3"/>
+          </a:solidFill>
+          <a:ln>
+            <a:noFill/>
+          </a:ln>
+          <a:effectLst/>
+        </p:spPr>
+        <p:style>
+          <a:lnRef idx="1">
+            <a:schemeClr val="accent1"/>
+          </a:lnRef>
+          <a:fillRef idx="3">
+            <a:schemeClr val="accent1"/>
+          </a:fillRef>
+          <a:effectRef idx="2">
+            <a:schemeClr val="accent1"/>
+          </a:effectRef>
+          <a:fontRef idx="minor">
+            <a:schemeClr val="lt1"/>
+          </a:fontRef>
+        </p:style>
+        <p:txBody>
+          <a:bodyPr rtlCol="0" anchor="ctr"/>
+          <a:lstStyle/>
+          <a:p>
+            <a:pPr algn="ctr"/>
+          </a:p>
+        </p:txBody>
+      </p:sp>
+      <p:sp>
+        <p:nvSpPr>
+          <p:cNvPr id="12" name="TextBox 11"/>
+          <p:cNvSpPr txBox="1"/>
+          <p:nvPr/>
+        </p:nvSpPr>
+        <p:spPr>
+          <a:xfrm>
+            <a:off x="1033272" y="2043684"/>
+            <a:ext cx="457200" cy="457200"/>
+          </a:xfrm>
+          <a:prstGeom prst="rect">
+            <a:avLst/>
+          </a:prstGeom>
+          <a:noFill/>
+        </p:spPr>
+        <p:txBody>
+          <a:bodyPr wrap="square" anchor="ctr" lIns="0" rIns="0" tIns="0" bIns="0">
+            <a:spAutoFit/>
+          </a:bodyPr>
+          <a:lstStyle/>
+          <a:p>
+            <a:pPr algn="ctr">
+              <a:lnSpc>
+                <a:spcPct val="100000"/>
+              </a:lnSpc>
+              <a:spcBef>
+                <a:spcPts val="0"/>
+              </a:spcBef>
+              <a:spcAft>
+                <a:spcPts val="600"/>
+              </a:spcAft>
+            </a:pPr>
+            <a:r>
+              <a:rPr sz="1700" b="1" i="0">
+                <a:solidFill>
+                  <a:srgbClr val="FFFFFF"/>
+                </a:solidFill>
+                <a:latin typeface="Microsoft YaHei"/>
+              </a:rPr>
+              <a:t>1</a:t>
+            </a:r>
+          </a:p>
+        </p:txBody>
+      </p:sp>
+      <p:sp>
+        <p:nvSpPr>
+          <p:cNvPr id="13" name="TextBox 12"/>
+          <p:cNvSpPr txBox="1"/>
+          <p:nvPr/>
+        </p:nvSpPr>
+        <p:spPr>
+          <a:xfrm>
+            <a:off x="1691640" y="1463040"/>
+            <a:ext cx="2743200" cy="1618488"/>
+          </a:xfrm>
+          <a:prstGeom prst="rect">
+            <a:avLst/>
+          </a:prstGeom>
+          <a:noFill/>
+        </p:spPr>
+        <p:txBody>
+          <a:bodyPr wrap="square" anchor="ctr" lIns="0" rIns="0" tIns="0" bIns="0">
+            <a:spAutoFit/>
+          </a:bodyPr>
+          <a:lstStyle/>
+          <a:p>
+            <a:pPr algn="l">
+              <a:lnSpc>
+                <a:spcPct val="100000"/>
+              </a:lnSpc>
+              <a:spcBef>
+                <a:spcPts val="0"/>
+              </a:spcBef>
+              <a:spcAft>
+                <a:spcPts val="600"/>
+              </a:spcAft>
+            </a:pPr>
+            <a:r>
+              <a:rPr sz="1450" b="1" i="0">
+                <a:solidFill>
+                  <a:srgbClr val="0B1F33"/>
+                </a:solidFill>
+                <a:latin typeface="Microsoft YaHei"/>
+              </a:rPr>
+              <a:t>从席位到结果</a:t>
+            </a:r>
+          </a:p>
+        </p:txBody>
+      </p:sp>
+      <p:sp>
+        <p:nvSpPr>
+          <p:cNvPr id="14" name="Rectangle 13"/>
+          <p:cNvSpPr/>
+          <p:nvPr/>
+        </p:nvSpPr>
+        <p:spPr>
+          <a:xfrm>
+            <a:off x="4389120" y="1627632"/>
+            <a:ext cx="15240" cy="1289304"/>
+          </a:xfrm>
+          <a:prstGeom prst="rect">
+            <a:avLst/>
+          </a:prstGeom>
+          <a:solidFill>
+            <a:srgbClr val="D7DEE6"/>
+          </a:solidFill>
+          <a:ln>
+            <a:noFill/>
+          </a:ln>
+          <a:effectLst/>
+        </p:spPr>
+        <p:style>
+          <a:lnRef idx="1">
+            <a:schemeClr val="accent1"/>
+          </a:lnRef>
+          <a:fillRef idx="3">
+            <a:schemeClr val="accent1"/>
+          </a:fillRef>
+          <a:effectRef idx="2">
+            <a:schemeClr val="accent1"/>
+          </a:effectRef>
+          <a:fontRef idx="minor">
+            <a:schemeClr val="lt1"/>
+          </a:fontRef>
+        </p:style>
+        <p:txBody>
+          <a:bodyPr rtlCol="0" anchor="ctr"/>
+          <a:lstStyle/>
+          <a:p>
+            <a:pPr algn="ctr"/>
+          </a:p>
+        </p:txBody>
+      </p:sp>
+      <p:sp>
+        <p:nvSpPr>
+          <p:cNvPr id="15" name="TextBox 14"/>
+          <p:cNvSpPr txBox="1"/>
+          <p:nvPr/>
+        </p:nvSpPr>
+        <p:spPr>
+          <a:xfrm>
+            <a:off x="4617720" y="1463040"/>
+            <a:ext cx="6492240" cy="1618488"/>
+          </a:xfrm>
+          <a:prstGeom prst="rect">
+            <a:avLst/>
+          </a:prstGeom>
+          <a:noFill/>
+        </p:spPr>
+        <p:txBody>
+          <a:bodyPr wrap="square" anchor="ctr" lIns="0" rIns="0" tIns="0" bIns="0">
+            <a:spAutoFit/>
+          </a:bodyPr>
+          <a:lstStyle/>
+          <a:p>
+            <a:pPr algn="l">
+              <a:lnSpc>
+                <a:spcPct val="112000"/>
+              </a:lnSpc>
+              <a:spcBef>
+                <a:spcPts val="0"/>
+              </a:spcBef>
+              <a:spcAft>
+                <a:spcPts val="600"/>
+              </a:spcAft>
+            </a:pPr>
+            <a:r>
+              <a:rPr sz="1250" b="0" i="0">
+                <a:solidFill>
+                  <a:srgbClr val="5B6B7B"/>
+                </a:solidFill>
+                <a:latin typeface="Microsoft YaHei"/>
+              </a:rPr>
+              <a:t>Agent 替人办事，使计费从「按人」转向「按完成的业务结果」。</a:t>
+            </a:r>
+          </a:p>
+        </p:txBody>
+      </p:sp>
+      <p:sp>
+        <p:nvSpPr>
+          <p:cNvPr id="16" name="Rounded Rectangle 15"/>
+          <p:cNvSpPr/>
+          <p:nvPr/>
+        </p:nvSpPr>
+        <p:spPr>
+          <a:xfrm>
+            <a:off x="777240" y="3191256"/>
+            <a:ext cx="10607040" cy="1618488"/>
+          </a:xfrm>
+          <a:prstGeom prst="roundRect">
+            <a:avLst>
+              <a:gd name="adj" fmla="val 6000"/>
+            </a:avLst>
+          </a:prstGeom>
+          <a:solidFill>
+            <a:srgbClr val="F4F7FB"/>
+          </a:solidFill>
+          <a:ln>
+            <a:noFill/>
+          </a:ln>
+          <a:effectLst/>
+        </p:spPr>
+        <p:style>
+          <a:lnRef idx="1">
+            <a:schemeClr val="accent1"/>
+          </a:lnRef>
+          <a:fillRef idx="3">
+            <a:schemeClr val="accent1"/>
+          </a:fillRef>
+          <a:effectRef idx="2">
+            <a:schemeClr val="accent1"/>
+          </a:effectRef>
+          <a:fontRef idx="minor">
+            <a:schemeClr val="lt1"/>
+          </a:fontRef>
+        </p:style>
+        <p:txBody>
+          <a:bodyPr rtlCol="0" anchor="ctr"/>
+          <a:lstStyle/>
+          <a:p>
+            <a:pPr algn="ctr"/>
+          </a:p>
+        </p:txBody>
+      </p:sp>
+      <p:sp>
+        <p:nvSpPr>
+          <p:cNvPr id="17" name="Oval 16"/>
+          <p:cNvSpPr/>
+          <p:nvPr/>
+        </p:nvSpPr>
+        <p:spPr>
+          <a:xfrm>
+            <a:off x="1033272" y="3771900"/>
+            <a:ext cx="457200" cy="457200"/>
+          </a:xfrm>
+          <a:prstGeom prst="ellipse">
+            <a:avLst/>
+          </a:prstGeom>
+          <a:solidFill>
+            <a:srgbClr val="14B8A6"/>
+          </a:solidFill>
+          <a:ln>
+            <a:noFill/>
+          </a:ln>
+          <a:effectLst/>
+        </p:spPr>
+        <p:style>
+          <a:lnRef idx="1">
+            <a:schemeClr val="accent1"/>
+          </a:lnRef>
+          <a:fillRef idx="3">
+            <a:schemeClr val="accent1"/>
+          </a:fillRef>
+          <a:effectRef idx="2">
+            <a:schemeClr val="accent1"/>
+          </a:effectRef>
+          <a:fontRef idx="minor">
+            <a:schemeClr val="lt1"/>
+          </a:fontRef>
+        </p:style>
+        <p:txBody>
+          <a:bodyPr rtlCol="0" anchor="ctr"/>
+          <a:lstStyle/>
+          <a:p>
+            <a:pPr algn="ctr"/>
+          </a:p>
+        </p:txBody>
+      </p:sp>
+      <p:sp>
+        <p:nvSpPr>
+          <p:cNvPr id="18" name="TextBox 17"/>
+          <p:cNvSpPr txBox="1"/>
+          <p:nvPr/>
+        </p:nvSpPr>
+        <p:spPr>
+          <a:xfrm>
+            <a:off x="1033272" y="3771900"/>
+            <a:ext cx="457200" cy="457200"/>
+          </a:xfrm>
+          <a:prstGeom prst="rect">
+            <a:avLst/>
+          </a:prstGeom>
+          <a:noFill/>
+        </p:spPr>
+        <p:txBody>
+          <a:bodyPr wrap="square" anchor="ctr" lIns="0" rIns="0" tIns="0" bIns="0">
+            <a:spAutoFit/>
+          </a:bodyPr>
+          <a:lstStyle/>
+          <a:p>
+            <a:pPr algn="ctr">
+              <a:lnSpc>
+                <a:spcPct val="100000"/>
+              </a:lnSpc>
+              <a:spcBef>
+                <a:spcPts val="0"/>
+              </a:spcBef>
+              <a:spcAft>
+                <a:spcPts val="600"/>
+              </a:spcAft>
+            </a:pPr>
+            <a:r>
+              <a:rPr sz="1700" b="1" i="0">
+                <a:solidFill>
+                  <a:srgbClr val="FFFFFF"/>
+                </a:solidFill>
+                <a:latin typeface="Microsoft YaHei"/>
+              </a:rPr>
+              <a:t>2</a:t>
+            </a:r>
+          </a:p>
+        </p:txBody>
+      </p:sp>
+      <p:sp>
+        <p:nvSpPr>
+          <p:cNvPr id="19" name="TextBox 18"/>
+          <p:cNvSpPr txBox="1"/>
+          <p:nvPr/>
+        </p:nvSpPr>
+        <p:spPr>
+          <a:xfrm>
+            <a:off x="1691640" y="3191256"/>
+            <a:ext cx="2743200" cy="1618488"/>
+          </a:xfrm>
+          <a:prstGeom prst="rect">
+            <a:avLst/>
+          </a:prstGeom>
+          <a:noFill/>
+        </p:spPr>
+        <p:txBody>
+          <a:bodyPr wrap="square" anchor="ctr" lIns="0" rIns="0" tIns="0" bIns="0">
+            <a:spAutoFit/>
+          </a:bodyPr>
+          <a:lstStyle/>
+          <a:p>
+            <a:pPr algn="l">
+              <a:lnSpc>
+                <a:spcPct val="100000"/>
+              </a:lnSpc>
+              <a:spcBef>
+                <a:spcPts val="0"/>
+              </a:spcBef>
+              <a:spcAft>
+                <a:spcPts val="600"/>
+              </a:spcAft>
+            </a:pPr>
+            <a:r>
+              <a:rPr sz="1450" b="1" i="0">
+                <a:solidFill>
+                  <a:srgbClr val="0B1F33"/>
+                </a:solidFill>
+                <a:latin typeface="Microsoft YaHei"/>
+              </a:rPr>
+              <a:t>数据是新护城河</a:t>
+            </a:r>
+          </a:p>
+        </p:txBody>
+      </p:sp>
+      <p:sp>
+        <p:nvSpPr>
+          <p:cNvPr id="20" name="Rectangle 19"/>
+          <p:cNvSpPr/>
+          <p:nvPr/>
+        </p:nvSpPr>
+        <p:spPr>
+          <a:xfrm>
+            <a:off x="4389120" y="3355848"/>
+            <a:ext cx="15240" cy="1289304"/>
+          </a:xfrm>
+          <a:prstGeom prst="rect">
+            <a:avLst/>
+          </a:prstGeom>
+          <a:solidFill>
+            <a:srgbClr val="D7DEE6"/>
+          </a:solidFill>
+          <a:ln>
+            <a:noFill/>
+          </a:ln>
+          <a:effectLst/>
+        </p:spPr>
+        <p:style>
+          <a:lnRef idx="1">
+            <a:schemeClr val="accent1"/>
+          </a:lnRef>
+          <a:fillRef idx="3">
+            <a:schemeClr val="accent1"/>
+          </a:fillRef>
+          <a:effectRef idx="2">
+            <a:schemeClr val="accent1"/>
+          </a:effectRef>
+          <a:fontRef idx="minor">
+            <a:schemeClr val="lt1"/>
+          </a:fontRef>
+        </p:style>
+        <p:txBody>
+          <a:bodyPr rtlCol="0" anchor="ctr"/>
+          <a:lstStyle/>
+          <a:p>
+            <a:pPr algn="ctr"/>
+          </a:p>
+        </p:txBody>
+      </p:sp>
+      <p:sp>
+        <p:nvSpPr>
+          <p:cNvPr id="21" name="TextBox 20"/>
+          <p:cNvSpPr txBox="1"/>
+          <p:nvPr/>
+        </p:nvSpPr>
+        <p:spPr>
+          <a:xfrm>
+            <a:off x="4617720" y="3191256"/>
+            <a:ext cx="6492240" cy="1618488"/>
+          </a:xfrm>
+          <a:prstGeom prst="rect">
+            <a:avLst/>
+          </a:prstGeom>
+          <a:noFill/>
+        </p:spPr>
+        <p:txBody>
+          <a:bodyPr wrap="square" anchor="ctr" lIns="0" rIns="0" tIns="0" bIns="0">
+            <a:spAutoFit/>
+          </a:bodyPr>
+          <a:lstStyle/>
+          <a:p>
+            <a:pPr algn="l">
+              <a:lnSpc>
+                <a:spcPct val="112000"/>
+              </a:lnSpc>
+              <a:spcBef>
+                <a:spcPts val="0"/>
+              </a:spcBef>
+              <a:spcAft>
+                <a:spcPts val="600"/>
+              </a:spcAft>
+            </a:pPr>
+            <a:r>
+              <a:rPr sz="1250" b="0" i="0">
+                <a:solidFill>
+                  <a:srgbClr val="5B6B7B"/>
+                </a:solidFill>
+                <a:latin typeface="Microsoft YaHei"/>
+              </a:rPr>
+              <a:t>界面可复刻、能力会被比价，独有客户数据与可靠执行才是壁垒。</a:t>
+            </a:r>
+          </a:p>
+        </p:txBody>
+      </p:sp>
+      <p:sp>
+        <p:nvSpPr>
+          <p:cNvPr id="22" name="Rounded Rectangle 21"/>
+          <p:cNvSpPr/>
+          <p:nvPr/>
+        </p:nvSpPr>
+        <p:spPr>
+          <a:xfrm>
+            <a:off x="777240" y="4919472"/>
+            <a:ext cx="10607040" cy="1618488"/>
+          </a:xfrm>
+          <a:prstGeom prst="roundRect">
+            <a:avLst>
+              <a:gd name="adj" fmla="val 6000"/>
+            </a:avLst>
+          </a:prstGeom>
+          <a:solidFill>
+            <a:srgbClr val="F4F7FB"/>
+          </a:solidFill>
+          <a:ln>
+            <a:noFill/>
+          </a:ln>
+          <a:effectLst/>
+        </p:spPr>
+        <p:style>
+          <a:lnRef idx="1">
+            <a:schemeClr val="accent1"/>
+          </a:lnRef>
+          <a:fillRef idx="3">
+            <a:schemeClr val="accent1"/>
+          </a:fillRef>
+          <a:effectRef idx="2">
+            <a:schemeClr val="accent1"/>
+          </a:effectRef>
+          <a:fontRef idx="minor">
+            <a:schemeClr val="lt1"/>
+          </a:fontRef>
+        </p:style>
+        <p:txBody>
+          <a:bodyPr rtlCol="0" anchor="ctr"/>
+          <a:lstStyle/>
+          <a:p>
+            <a:pPr algn="ctr"/>
+          </a:p>
+        </p:txBody>
+      </p:sp>
+      <p:sp>
+        <p:nvSpPr>
+          <p:cNvPr id="23" name="Oval 22"/>
+          <p:cNvSpPr/>
+          <p:nvPr/>
+        </p:nvSpPr>
+        <p:spPr>
+          <a:xfrm>
+            <a:off x="1033272" y="5500116"/>
+            <a:ext cx="457200" cy="457200"/>
+          </a:xfrm>
+          <a:prstGeom prst="ellipse">
+            <a:avLst/>
+          </a:prstGeom>
+          <a:solidFill>
+            <a:srgbClr val="7C5CFF"/>
+          </a:solidFill>
+          <a:ln>
+            <a:noFill/>
+          </a:ln>
+          <a:effectLst/>
+        </p:spPr>
+        <p:style>
+          <a:lnRef idx="1">
+            <a:schemeClr val="accent1"/>
+          </a:lnRef>
+          <a:fillRef idx="3">
+            <a:schemeClr val="accent1"/>
+          </a:fillRef>
+          <a:effectRef idx="2">
+            <a:schemeClr val="accent1"/>
+          </a:effectRef>
+          <a:fontRef idx="minor">
+            <a:schemeClr val="lt1"/>
+          </a:fontRef>
+        </p:style>
+        <p:txBody>
+          <a:bodyPr rtlCol="0" anchor="ctr"/>
+          <a:lstStyle/>
+          <a:p>
+            <a:pPr algn="ctr"/>
+          </a:p>
+        </p:txBody>
+      </p:sp>
+      <p:sp>
+        <p:nvSpPr>
+          <p:cNvPr id="24" name="TextBox 23"/>
+          <p:cNvSpPr txBox="1"/>
+          <p:nvPr/>
+        </p:nvSpPr>
+        <p:spPr>
+          <a:xfrm>
+            <a:off x="1033272" y="5500116"/>
+            <a:ext cx="457200" cy="457200"/>
+          </a:xfrm>
+          <a:prstGeom prst="rect">
+            <a:avLst/>
+          </a:prstGeom>
+          <a:noFill/>
+        </p:spPr>
+        <p:txBody>
+          <a:bodyPr wrap="square" anchor="ctr" lIns="0" rIns="0" tIns="0" bIns="0">
+            <a:spAutoFit/>
+          </a:bodyPr>
+          <a:lstStyle/>
+          <a:p>
+            <a:pPr algn="ctr">
+              <a:lnSpc>
+                <a:spcPct val="100000"/>
+              </a:lnSpc>
+              <a:spcBef>
+                <a:spcPts val="0"/>
+              </a:spcBef>
+              <a:spcAft>
+                <a:spcPts val="600"/>
+              </a:spcAft>
+            </a:pPr>
+            <a:r>
+              <a:rPr sz="1700" b="1" i="0">
+                <a:solidFill>
+                  <a:srgbClr val="FFFFFF"/>
+                </a:solidFill>
+                <a:latin typeface="Microsoft YaHei"/>
+              </a:rPr>
+              <a:t>3</a:t>
+            </a:r>
+          </a:p>
+        </p:txBody>
+      </p:sp>
+      <p:sp>
+        <p:nvSpPr>
+          <p:cNvPr id="25" name="TextBox 24"/>
+          <p:cNvSpPr txBox="1"/>
+          <p:nvPr/>
+        </p:nvSpPr>
+        <p:spPr>
+          <a:xfrm>
+            <a:off x="1691640" y="4919472"/>
+            <a:ext cx="2743200" cy="1618488"/>
+          </a:xfrm>
+          <a:prstGeom prst="rect">
+            <a:avLst/>
+          </a:prstGeom>
+          <a:noFill/>
+        </p:spPr>
+        <p:txBody>
+          <a:bodyPr wrap="square" anchor="ctr" lIns="0" rIns="0" tIns="0" bIns="0">
+            <a:spAutoFit/>
+          </a:bodyPr>
+          <a:lstStyle/>
+          <a:p>
+            <a:pPr algn="l">
+              <a:lnSpc>
+                <a:spcPct val="100000"/>
+              </a:lnSpc>
+              <a:spcBef>
+                <a:spcPts val="0"/>
+              </a:spcBef>
+              <a:spcAft>
+                <a:spcPts val="600"/>
+              </a:spcAft>
+            </a:pPr>
+            <a:r>
+              <a:rPr sz="1450" b="1" i="0">
+                <a:solidFill>
+                  <a:srgbClr val="0B1F33"/>
+                </a:solidFill>
+                <a:latin typeface="Microsoft YaHei"/>
+              </a:rPr>
+              <a:t>主动拥抱去 UI 化</a:t>
+            </a:r>
+          </a:p>
+        </p:txBody>
+      </p:sp>
+      <p:sp>
+        <p:nvSpPr>
+          <p:cNvPr id="26" name="Rectangle 25"/>
+          <p:cNvSpPr/>
+          <p:nvPr/>
+        </p:nvSpPr>
+        <p:spPr>
+          <a:xfrm>
+            <a:off x="4389120" y="5084064"/>
+            <a:ext cx="15240" cy="1289304"/>
+          </a:xfrm>
+          <a:prstGeom prst="rect">
+            <a:avLst/>
+          </a:prstGeom>
+          <a:solidFill>
+            <a:srgbClr val="D7DEE6"/>
+          </a:solidFill>
+          <a:ln>
+            <a:noFill/>
+          </a:ln>
+          <a:effectLst/>
+        </p:spPr>
+        <p:style>
+          <a:lnRef idx="1">
+            <a:schemeClr val="accent1"/>
+          </a:lnRef>
+          <a:fillRef idx="3">
+            <a:schemeClr val="accent1"/>
+          </a:fillRef>
+          <a:effectRef idx="2">
+            <a:schemeClr val="accent1"/>
+          </a:effectRef>
+          <a:fontRef idx="minor">
+            <a:schemeClr val="lt1"/>
+          </a:fontRef>
+        </p:style>
+        <p:txBody>
+          <a:bodyPr rtlCol="0" anchor="ctr"/>
+          <a:lstStyle/>
+          <a:p>
+            <a:pPr algn="ctr"/>
+          </a:p>
+        </p:txBody>
+      </p:sp>
+      <p:sp>
+        <p:nvSpPr>
+          <p:cNvPr id="27" name="TextBox 26"/>
+          <p:cNvSpPr txBox="1"/>
+          <p:nvPr/>
+        </p:nvSpPr>
+        <p:spPr>
+          <a:xfrm>
+            <a:off x="4617720" y="4919472"/>
+            <a:ext cx="6492240" cy="1618488"/>
+          </a:xfrm>
+          <a:prstGeom prst="rect">
+            <a:avLst/>
+          </a:prstGeom>
+          <a:noFill/>
+        </p:spPr>
+        <p:txBody>
+          <a:bodyPr wrap="square" anchor="ctr" lIns="0" rIns="0" tIns="0" bIns="0">
+            <a:spAutoFit/>
+          </a:bodyPr>
+          <a:lstStyle/>
+          <a:p>
+            <a:pPr algn="l">
+              <a:lnSpc>
+                <a:spcPct val="112000"/>
+              </a:lnSpc>
+              <a:spcBef>
+                <a:spcPts val="0"/>
+              </a:spcBef>
+              <a:spcAft>
+                <a:spcPts val="600"/>
+              </a:spcAft>
+            </a:pPr>
+            <a:r>
+              <a:rPr sz="1250" b="0" i="0">
+                <a:solidFill>
+                  <a:srgbClr val="5B6B7B"/>
+                </a:solidFill>
+                <a:latin typeface="Microsoft YaHei"/>
+              </a:rPr>
+              <a:t>与其被平台 Agent 中介化，不如主动成为被调用的能力供给方。</a:t>
+            </a:r>
+          </a:p>
+        </p:txBody>
+      </p:sp>
+    </p:spTree>
+  </p:cSld>
+  <p:clrMapOvr>
+    <a:masterClrMapping/>
+  </p:clrMapOvr>
+</p:sld>
+</file>
+
+<file path=ppt/slides/slide14.xml><?xml version="1.0" encoding="utf-8"?>
+<p:sld xmlns:a="http://schemas.openxmlformats.org/drawingml/2006/main" xmlns:p="http://schemas.openxmlformats.org/presentationml/2006/main" xmlns:r="http://schemas.openxmlformats.org/officeDocument/2006/relationships">
+  <p:cSld>
+    <p:spTree>
+      <p:nvGrpSpPr>
+        <p:cNvPr id="1" name=""/>
+        <p:cNvGrpSpPr/>
+        <p:nvPr/>
+      </p:nvGrpSpPr>
+      <p:grpSpPr/>
+      <p:sp>
+        <p:nvSpPr>
+          <p:cNvPr id="2" name="Rectangle 1"/>
+          <p:cNvSpPr/>
+          <p:nvPr/>
+        </p:nvSpPr>
+        <p:spPr>
+          <a:xfrm>
+            <a:off x="0" y="0"/>
             <a:ext cx="12191695" cy="6858000"/>
           </a:xfrm>
           <a:prstGeom prst="rect">
@@ -4378,7 +10434,7 @@
                 </a:solidFill>
                 <a:latin typeface="Microsoft YaHei"/>
               </a:rPr>
-              <a:t> / 10</a:t>
+              <a:t> / 14</a:t>
             </a:r>
           </a:p>
         </p:txBody>
@@ -4525,7 +10581,7 @@
         <p:spPr>
           <a:xfrm>
             <a:off x="777240" y="1463040"/>
-            <a:ext cx="10607040" cy="723900"/>
+            <a:ext cx="10607040" cy="390448"/>
           </a:xfrm>
           <a:prstGeom prst="roundRect">
             <a:avLst>
@@ -4571,7 +10627,7 @@
         <p:spPr>
           <a:xfrm>
             <a:off x="777240" y="1463040"/>
-            <a:ext cx="82296" cy="723900"/>
+            <a:ext cx="82296" cy="390448"/>
           </a:xfrm>
           <a:prstGeom prst="roundRect">
             <a:avLst>
@@ -4617,7 +10673,7 @@
         <p:spPr>
           <a:xfrm>
             <a:off x="1097280" y="1463040"/>
-            <a:ext cx="1005840" cy="723900"/>
+            <a:ext cx="1005840" cy="390448"/>
           </a:xfrm>
           <a:prstGeom prst="rect">
             <a:avLst/>
@@ -4662,7 +10718,7 @@
         <p:spPr>
           <a:xfrm>
             <a:off x="2148840" y="1463040"/>
-            <a:ext cx="2926080" cy="723900"/>
+            <a:ext cx="2926080" cy="390448"/>
           </a:xfrm>
           <a:prstGeom prst="rect">
             <a:avLst/>
@@ -4707,7 +10763,7 @@
         <p:spPr>
           <a:xfrm>
             <a:off x="5074920" y="1609344"/>
-            <a:ext cx="15240" cy="431292"/>
+            <a:ext cx="15240" cy="97840"/>
           </a:xfrm>
           <a:prstGeom prst="rect">
             <a:avLst/>
@@ -4751,7 +10807,7 @@
         <p:spPr>
           <a:xfrm>
             <a:off x="5349240" y="1463040"/>
-            <a:ext cx="5852160" cy="723900"/>
+            <a:ext cx="5852160" cy="390448"/>
           </a:xfrm>
           <a:prstGeom prst="rect">
             <a:avLst/>
@@ -4795,8 +10851,8 @@
         </p:nvSpPr>
         <p:spPr>
           <a:xfrm>
-            <a:off x="777240" y="2296668"/>
-            <a:ext cx="10607040" cy="723900"/>
+            <a:off x="777240" y="1963216"/>
+            <a:ext cx="10607040" cy="390448"/>
           </a:xfrm>
           <a:prstGeom prst="roundRect">
             <a:avLst>
@@ -4841,8 +10897,8 @@
         </p:nvSpPr>
         <p:spPr>
           <a:xfrm>
-            <a:off x="777240" y="2296668"/>
-            <a:ext cx="82296" cy="723900"/>
+            <a:off x="777240" y="1963216"/>
+            <a:ext cx="82296" cy="390448"/>
           </a:xfrm>
           <a:prstGeom prst="roundRect">
             <a:avLst>
@@ -4887,8 +10943,8 @@
         </p:nvSpPr>
         <p:spPr>
           <a:xfrm>
-            <a:off x="1097280" y="2296668"/>
-            <a:ext cx="1005840" cy="723900"/>
+            <a:off x="1097280" y="1963216"/>
+            <a:ext cx="1005840" cy="390448"/>
           </a:xfrm>
           <a:prstGeom prst="rect">
             <a:avLst/>
@@ -4932,8 +10988,8 @@
         </p:nvSpPr>
         <p:spPr>
           <a:xfrm>
-            <a:off x="2148840" y="2296668"/>
-            <a:ext cx="2926080" cy="723900"/>
+            <a:off x="2148840" y="1963216"/>
+            <a:ext cx="2926080" cy="390448"/>
           </a:xfrm>
           <a:prstGeom prst="rect">
             <a:avLst/>
@@ -4977,8 +11033,8 @@
         </p:nvSpPr>
         <p:spPr>
           <a:xfrm>
-            <a:off x="5074920" y="2442972"/>
-            <a:ext cx="15240" cy="431292"/>
+            <a:off x="5074920" y="2109520"/>
+            <a:ext cx="15240" cy="97840"/>
           </a:xfrm>
           <a:prstGeom prst="rect">
             <a:avLst/>
@@ -5021,8 +11077,8 @@
         </p:nvSpPr>
         <p:spPr>
           <a:xfrm>
-            <a:off x="5349240" y="2296668"/>
-            <a:ext cx="5852160" cy="723900"/>
+            <a:off x="5349240" y="1963216"/>
+            <a:ext cx="5852160" cy="390448"/>
           </a:xfrm>
           <a:prstGeom prst="rect">
             <a:avLst/>
@@ -5066,8 +11122,8 @@
         </p:nvSpPr>
         <p:spPr>
           <a:xfrm>
-            <a:off x="777240" y="3130296"/>
-            <a:ext cx="10607040" cy="723900"/>
+            <a:off x="777240" y="2463393"/>
+            <a:ext cx="10607040" cy="390448"/>
           </a:xfrm>
           <a:prstGeom prst="roundRect">
             <a:avLst>
@@ -5112,8 +11168,8 @@
         </p:nvSpPr>
         <p:spPr>
           <a:xfrm>
-            <a:off x="777240" y="3130296"/>
-            <a:ext cx="82296" cy="723900"/>
+            <a:off x="777240" y="2463393"/>
+            <a:ext cx="82296" cy="390448"/>
           </a:xfrm>
           <a:prstGeom prst="roundRect">
             <a:avLst>
@@ -5158,8 +11214,8 @@
         </p:nvSpPr>
         <p:spPr>
           <a:xfrm>
-            <a:off x="1097280" y="3130296"/>
-            <a:ext cx="1005840" cy="723900"/>
+            <a:off x="1097280" y="2463393"/>
+            <a:ext cx="1005840" cy="390448"/>
           </a:xfrm>
           <a:prstGeom prst="rect">
             <a:avLst/>
@@ -5203,8 +11259,8 @@
         </p:nvSpPr>
         <p:spPr>
           <a:xfrm>
-            <a:off x="2148840" y="3130296"/>
-            <a:ext cx="2926080" cy="723900"/>
+            <a:off x="2148840" y="2463393"/>
+            <a:ext cx="2926080" cy="390448"/>
           </a:xfrm>
           <a:prstGeom prst="rect">
             <a:avLst/>
@@ -5248,8 +11304,8 @@
         </p:nvSpPr>
         <p:spPr>
           <a:xfrm>
-            <a:off x="5074920" y="3276600"/>
-            <a:ext cx="15240" cy="431292"/>
+            <a:off x="5074920" y="2609697"/>
+            <a:ext cx="15240" cy="97840"/>
           </a:xfrm>
           <a:prstGeom prst="rect">
             <a:avLst/>
@@ -5292,8 +11348,8 @@
         </p:nvSpPr>
         <p:spPr>
           <a:xfrm>
-            <a:off x="5349240" y="3130296"/>
-            <a:ext cx="5852160" cy="723900"/>
+            <a:off x="5349240" y="2463393"/>
+            <a:ext cx="5852160" cy="390448"/>
           </a:xfrm>
           <a:prstGeom prst="rect">
             <a:avLst/>
@@ -5337,8 +11393,8 @@
         </p:nvSpPr>
         <p:spPr>
           <a:xfrm>
-            <a:off x="777240" y="3963924"/>
-            <a:ext cx="10607040" cy="723900"/>
+            <a:off x="777240" y="2963570"/>
+            <a:ext cx="10607040" cy="390448"/>
           </a:xfrm>
           <a:prstGeom prst="roundRect">
             <a:avLst>
@@ -5383,8 +11439,8 @@
         </p:nvSpPr>
         <p:spPr>
           <a:xfrm>
-            <a:off x="777240" y="3963924"/>
-            <a:ext cx="82296" cy="723900"/>
+            <a:off x="777240" y="2963570"/>
+            <a:ext cx="82296" cy="390448"/>
           </a:xfrm>
           <a:prstGeom prst="roundRect">
             <a:avLst>
@@ -5429,8 +11485,8 @@
         </p:nvSpPr>
         <p:spPr>
           <a:xfrm>
-            <a:off x="1097280" y="3963924"/>
-            <a:ext cx="1005840" cy="723900"/>
+            <a:off x="1097280" y="2963570"/>
+            <a:ext cx="1005840" cy="390448"/>
           </a:xfrm>
           <a:prstGeom prst="rect">
             <a:avLst/>
@@ -5474,8 +11530,8 @@
         </p:nvSpPr>
         <p:spPr>
           <a:xfrm>
-            <a:off x="2148840" y="3963924"/>
-            <a:ext cx="2926080" cy="723900"/>
+            <a:off x="2148840" y="2963570"/>
+            <a:ext cx="2926080" cy="390448"/>
           </a:xfrm>
           <a:prstGeom prst="rect">
             <a:avLst/>
@@ -5519,8 +11575,8 @@
         </p:nvSpPr>
         <p:spPr>
           <a:xfrm>
-            <a:off x="5074920" y="4110228"/>
-            <a:ext cx="15240" cy="431292"/>
+            <a:off x="5074920" y="3109874"/>
+            <a:ext cx="15240" cy="97840"/>
           </a:xfrm>
           <a:prstGeom prst="rect">
             <a:avLst/>
@@ -5563,8 +11619,8 @@
         </p:nvSpPr>
         <p:spPr>
           <a:xfrm>
-            <a:off x="5349240" y="3963924"/>
-            <a:ext cx="5852160" cy="723900"/>
+            <a:off x="5349240" y="2963570"/>
+            <a:ext cx="5852160" cy="390448"/>
           </a:xfrm>
           <a:prstGeom prst="rect">
             <a:avLst/>
@@ -5608,8 +11664,8 @@
         </p:nvSpPr>
         <p:spPr>
           <a:xfrm>
-            <a:off x="777240" y="4797552"/>
-            <a:ext cx="10607040" cy="723900"/>
+            <a:off x="777240" y="3463747"/>
+            <a:ext cx="10607040" cy="390448"/>
           </a:xfrm>
           <a:prstGeom prst="roundRect">
             <a:avLst>
@@ -5654,8 +11710,8 @@
         </p:nvSpPr>
         <p:spPr>
           <a:xfrm>
-            <a:off x="777240" y="4797552"/>
-            <a:ext cx="82296" cy="723900"/>
+            <a:off x="777240" y="3463747"/>
+            <a:ext cx="82296" cy="390448"/>
           </a:xfrm>
           <a:prstGeom prst="roundRect">
             <a:avLst>
@@ -5700,8 +11756,8 @@
         </p:nvSpPr>
         <p:spPr>
           <a:xfrm>
-            <a:off x="1097280" y="4797552"/>
-            <a:ext cx="1005840" cy="723900"/>
+            <a:off x="1097280" y="3463747"/>
+            <a:ext cx="1005840" cy="390448"/>
           </a:xfrm>
           <a:prstGeom prst="rect">
             <a:avLst/>
@@ -5745,8 +11801,8 @@
         </p:nvSpPr>
         <p:spPr>
           <a:xfrm>
-            <a:off x="2148840" y="4797552"/>
-            <a:ext cx="2926080" cy="723900"/>
+            <a:off x="2148840" y="3463747"/>
+            <a:ext cx="2926080" cy="390448"/>
           </a:xfrm>
           <a:prstGeom prst="rect">
             <a:avLst/>
@@ -5790,8 +11846,8 @@
         </p:nvSpPr>
         <p:spPr>
           <a:xfrm>
-            <a:off x="5074920" y="4943856"/>
-            <a:ext cx="15240" cy="431292"/>
+            <a:off x="5074920" y="3610051"/>
+            <a:ext cx="15240" cy="97840"/>
           </a:xfrm>
           <a:prstGeom prst="rect">
             <a:avLst/>
@@ -5834,8 +11890,8 @@
         </p:nvSpPr>
         <p:spPr>
           <a:xfrm>
-            <a:off x="5349240" y="4797552"/>
-            <a:ext cx="5852160" cy="723900"/>
+            <a:off x="5349240" y="3463747"/>
+            <a:ext cx="5852160" cy="390448"/>
           </a:xfrm>
           <a:prstGeom prst="rect">
             <a:avLst/>
@@ -5879,8 +11935,8 @@
         </p:nvSpPr>
         <p:spPr>
           <a:xfrm>
-            <a:off x="777240" y="5631180"/>
-            <a:ext cx="10607040" cy="723900"/>
+            <a:off x="777240" y="3963924"/>
+            <a:ext cx="10607040" cy="390448"/>
           </a:xfrm>
           <a:prstGeom prst="roundRect">
             <a:avLst>
@@ -5925,8 +11981,8 @@
         </p:nvSpPr>
         <p:spPr>
           <a:xfrm>
-            <a:off x="777240" y="5631180"/>
-            <a:ext cx="82296" cy="723900"/>
+            <a:off x="777240" y="3963924"/>
+            <a:ext cx="82296" cy="390448"/>
           </a:xfrm>
           <a:prstGeom prst="roundRect">
             <a:avLst>
@@ -5971,8 +12027,8 @@
         </p:nvSpPr>
         <p:spPr>
           <a:xfrm>
-            <a:off x="1097280" y="5631180"/>
-            <a:ext cx="1005840" cy="723900"/>
+            <a:off x="1097280" y="3963924"/>
+            <a:ext cx="1005840" cy="390448"/>
           </a:xfrm>
           <a:prstGeom prst="rect">
             <a:avLst/>
@@ -6016,8 +12072,8 @@
         </p:nvSpPr>
         <p:spPr>
           <a:xfrm>
-            <a:off x="2148840" y="5631180"/>
-            <a:ext cx="2926080" cy="723900"/>
+            <a:off x="2148840" y="3963924"/>
+            <a:ext cx="2926080" cy="390448"/>
           </a:xfrm>
           <a:prstGeom prst="rect">
             <a:avLst/>
@@ -6061,8 +12117,8 @@
         </p:nvSpPr>
         <p:spPr>
           <a:xfrm>
-            <a:off x="5074920" y="5777484"/>
-            <a:ext cx="15240" cy="431292"/>
+            <a:off x="5074920" y="4110228"/>
+            <a:ext cx="15240" cy="97840"/>
           </a:xfrm>
           <a:prstGeom prst="rect">
             <a:avLst/>
@@ -6105,8 +12161,8 @@
         </p:nvSpPr>
         <p:spPr>
           <a:xfrm>
-            <a:off x="5349240" y="5631180"/>
-            <a:ext cx="5852160" cy="723900"/>
+            <a:off x="5349240" y="3963924"/>
+            <a:ext cx="5852160" cy="390448"/>
           </a:xfrm>
           <a:prstGeom prst="rect">
             <a:avLst/>
@@ -6138,6 +12194,1090 @@
                 <a:latin typeface="Microsoft YaHei"/>
               </a:rPr>
               <a:t>去 UI 化与被中介化风险</a:t>
+            </a:r>
+          </a:p>
+        </p:txBody>
+      </p:sp>
+      <p:sp>
+        <p:nvSpPr>
+          <p:cNvPr id="46" name="Rounded Rectangle 45"/>
+          <p:cNvSpPr/>
+          <p:nvPr/>
+        </p:nvSpPr>
+        <p:spPr>
+          <a:xfrm>
+            <a:off x="777240" y="4464100"/>
+            <a:ext cx="10607040" cy="390448"/>
+          </a:xfrm>
+          <a:prstGeom prst="roundRect">
+            <a:avLst>
+              <a:gd name="adj" fmla="val 6000"/>
+            </a:avLst>
+          </a:prstGeom>
+          <a:solidFill>
+            <a:srgbClr val="F4F7FB"/>
+          </a:solidFill>
+          <a:ln>
+            <a:noFill/>
+          </a:ln>
+          <a:effectLst/>
+        </p:spPr>
+        <p:style>
+          <a:lnRef idx="1">
+            <a:schemeClr val="accent1"/>
+          </a:lnRef>
+          <a:fillRef idx="3">
+            <a:schemeClr val="accent1"/>
+          </a:fillRef>
+          <a:effectRef idx="2">
+            <a:schemeClr val="accent1"/>
+          </a:effectRef>
+          <a:fontRef idx="minor">
+            <a:schemeClr val="lt1"/>
+          </a:fontRef>
+        </p:style>
+        <p:txBody>
+          <a:bodyPr rtlCol="0" anchor="ctr"/>
+          <a:lstStyle/>
+          <a:p>
+            <a:pPr algn="ctr"/>
+          </a:p>
+        </p:txBody>
+      </p:sp>
+      <p:sp>
+        <p:nvSpPr>
+          <p:cNvPr id="47" name="Rounded Rectangle 46"/>
+          <p:cNvSpPr/>
+          <p:nvPr/>
+        </p:nvSpPr>
+        <p:spPr>
+          <a:xfrm>
+            <a:off x="777240" y="4464100"/>
+            <a:ext cx="82296" cy="390448"/>
+          </a:xfrm>
+          <a:prstGeom prst="roundRect">
+            <a:avLst>
+              <a:gd name="adj" fmla="val 6000"/>
+            </a:avLst>
+          </a:prstGeom>
+          <a:solidFill>
+            <a:srgbClr val="1B6EF3"/>
+          </a:solidFill>
+          <a:ln>
+            <a:noFill/>
+          </a:ln>
+          <a:effectLst/>
+        </p:spPr>
+        <p:style>
+          <a:lnRef idx="1">
+            <a:schemeClr val="accent1"/>
+          </a:lnRef>
+          <a:fillRef idx="3">
+            <a:schemeClr val="accent1"/>
+          </a:fillRef>
+          <a:effectRef idx="2">
+            <a:schemeClr val="accent1"/>
+          </a:effectRef>
+          <a:fontRef idx="minor">
+            <a:schemeClr val="lt1"/>
+          </a:fontRef>
+        </p:style>
+        <p:txBody>
+          <a:bodyPr rtlCol="0" anchor="ctr"/>
+          <a:lstStyle/>
+          <a:p>
+            <a:pPr algn="ctr"/>
+          </a:p>
+        </p:txBody>
+      </p:sp>
+      <p:sp>
+        <p:nvSpPr>
+          <p:cNvPr id="48" name="TextBox 47"/>
+          <p:cNvSpPr txBox="1"/>
+          <p:nvPr/>
+        </p:nvSpPr>
+        <p:spPr>
+          <a:xfrm>
+            <a:off x="1097280" y="4464100"/>
+            <a:ext cx="1005840" cy="390448"/>
+          </a:xfrm>
+          <a:prstGeom prst="rect">
+            <a:avLst/>
+          </a:prstGeom>
+          <a:noFill/>
+        </p:spPr>
+        <p:txBody>
+          <a:bodyPr wrap="square" anchor="ctr" lIns="0" rIns="0" tIns="0" bIns="0">
+            <a:spAutoFit/>
+          </a:bodyPr>
+          <a:lstStyle/>
+          <a:p>
+            <a:pPr algn="l">
+              <a:lnSpc>
+                <a:spcPct val="100000"/>
+              </a:lnSpc>
+              <a:spcBef>
+                <a:spcPts val="0"/>
+              </a:spcBef>
+              <a:spcAft>
+                <a:spcPts val="600"/>
+              </a:spcAft>
+            </a:pPr>
+            <a:r>
+              <a:rPr sz="2400" b="1" i="0">
+                <a:solidFill>
+                  <a:srgbClr val="1B6EF3"/>
+                </a:solidFill>
+                <a:latin typeface="Microsoft YaHei"/>
+              </a:rPr>
+              <a:t>07</a:t>
+            </a:r>
+          </a:p>
+        </p:txBody>
+      </p:sp>
+      <p:sp>
+        <p:nvSpPr>
+          <p:cNvPr id="49" name="TextBox 48"/>
+          <p:cNvSpPr txBox="1"/>
+          <p:nvPr/>
+        </p:nvSpPr>
+        <p:spPr>
+          <a:xfrm>
+            <a:off x="2148840" y="4464100"/>
+            <a:ext cx="2926080" cy="390448"/>
+          </a:xfrm>
+          <a:prstGeom prst="rect">
+            <a:avLst/>
+          </a:prstGeom>
+          <a:noFill/>
+        </p:spPr>
+        <p:txBody>
+          <a:bodyPr wrap="square" anchor="ctr" lIns="0" rIns="0" tIns="0" bIns="0">
+            <a:spAutoFit/>
+          </a:bodyPr>
+          <a:lstStyle/>
+          <a:p>
+            <a:pPr algn="l">
+              <a:lnSpc>
+                <a:spcPct val="100000"/>
+              </a:lnSpc>
+              <a:spcBef>
+                <a:spcPts val="0"/>
+              </a:spcBef>
+              <a:spcAft>
+                <a:spcPts val="600"/>
+              </a:spcAft>
+            </a:pPr>
+            <a:r>
+              <a:rPr sz="1550" b="1" i="0">
+                <a:solidFill>
+                  <a:srgbClr val="0B1F33"/>
+                </a:solidFill>
+                <a:latin typeface="Microsoft YaHei"/>
+              </a:rPr>
+              <a:t>客户与场景</a:t>
+            </a:r>
+          </a:p>
+        </p:txBody>
+      </p:sp>
+      <p:sp>
+        <p:nvSpPr>
+          <p:cNvPr id="50" name="Rectangle 49"/>
+          <p:cNvSpPr/>
+          <p:nvPr/>
+        </p:nvSpPr>
+        <p:spPr>
+          <a:xfrm>
+            <a:off x="5074920" y="4610404"/>
+            <a:ext cx="15240" cy="97840"/>
+          </a:xfrm>
+          <a:prstGeom prst="rect">
+            <a:avLst/>
+          </a:prstGeom>
+          <a:solidFill>
+            <a:srgbClr val="D7DEE6"/>
+          </a:solidFill>
+          <a:ln>
+            <a:noFill/>
+          </a:ln>
+          <a:effectLst/>
+        </p:spPr>
+        <p:style>
+          <a:lnRef idx="1">
+            <a:schemeClr val="accent1"/>
+          </a:lnRef>
+          <a:fillRef idx="3">
+            <a:schemeClr val="accent1"/>
+          </a:fillRef>
+          <a:effectRef idx="2">
+            <a:schemeClr val="accent1"/>
+          </a:effectRef>
+          <a:fontRef idx="minor">
+            <a:schemeClr val="lt1"/>
+          </a:fontRef>
+        </p:style>
+        <p:txBody>
+          <a:bodyPr rtlCol="0" anchor="ctr"/>
+          <a:lstStyle/>
+          <a:p>
+            <a:pPr algn="ctr"/>
+          </a:p>
+        </p:txBody>
+      </p:sp>
+      <p:sp>
+        <p:nvSpPr>
+          <p:cNvPr id="51" name="TextBox 50"/>
+          <p:cNvSpPr txBox="1"/>
+          <p:nvPr/>
+        </p:nvSpPr>
+        <p:spPr>
+          <a:xfrm>
+            <a:off x="5349240" y="4464100"/>
+            <a:ext cx="5852160" cy="390448"/>
+          </a:xfrm>
+          <a:prstGeom prst="rect">
+            <a:avLst/>
+          </a:prstGeom>
+          <a:noFill/>
+        </p:spPr>
+        <p:txBody>
+          <a:bodyPr wrap="square" anchor="ctr" lIns="0" rIns="0" tIns="0" bIns="0">
+            <a:spAutoFit/>
+          </a:bodyPr>
+          <a:lstStyle/>
+          <a:p>
+            <a:pPr algn="l">
+              <a:lnSpc>
+                <a:spcPct val="100000"/>
+              </a:lnSpc>
+              <a:spcBef>
+                <a:spcPts val="0"/>
+              </a:spcBef>
+              <a:spcAft>
+                <a:spcPts val="600"/>
+              </a:spcAft>
+            </a:pPr>
+            <a:r>
+              <a:rPr sz="1300" b="0" i="0">
+                <a:solidFill>
+                  <a:srgbClr val="5B6B7B"/>
+                </a:solidFill>
+                <a:latin typeface="Microsoft YaHei"/>
+              </a:rPr>
+              <a:t>销售 · 服务 · 营销 · 跨行业</a:t>
+            </a:r>
+          </a:p>
+        </p:txBody>
+      </p:sp>
+      <p:sp>
+        <p:nvSpPr>
+          <p:cNvPr id="52" name="Rounded Rectangle 51"/>
+          <p:cNvSpPr/>
+          <p:nvPr/>
+        </p:nvSpPr>
+        <p:spPr>
+          <a:xfrm>
+            <a:off x="777240" y="4964277"/>
+            <a:ext cx="10607040" cy="390448"/>
+          </a:xfrm>
+          <a:prstGeom prst="roundRect">
+            <a:avLst>
+              <a:gd name="adj" fmla="val 6000"/>
+            </a:avLst>
+          </a:prstGeom>
+          <a:solidFill>
+            <a:srgbClr val="F4F7FB"/>
+          </a:solidFill>
+          <a:ln>
+            <a:noFill/>
+          </a:ln>
+          <a:effectLst/>
+        </p:spPr>
+        <p:style>
+          <a:lnRef idx="1">
+            <a:schemeClr val="accent1"/>
+          </a:lnRef>
+          <a:fillRef idx="3">
+            <a:schemeClr val="accent1"/>
+          </a:fillRef>
+          <a:effectRef idx="2">
+            <a:schemeClr val="accent1"/>
+          </a:effectRef>
+          <a:fontRef idx="minor">
+            <a:schemeClr val="lt1"/>
+          </a:fontRef>
+        </p:style>
+        <p:txBody>
+          <a:bodyPr rtlCol="0" anchor="ctr"/>
+          <a:lstStyle/>
+          <a:p>
+            <a:pPr algn="ctr"/>
+          </a:p>
+        </p:txBody>
+      </p:sp>
+      <p:sp>
+        <p:nvSpPr>
+          <p:cNvPr id="53" name="Rounded Rectangle 52"/>
+          <p:cNvSpPr/>
+          <p:nvPr/>
+        </p:nvSpPr>
+        <p:spPr>
+          <a:xfrm>
+            <a:off x="777240" y="4964277"/>
+            <a:ext cx="82296" cy="390448"/>
+          </a:xfrm>
+          <a:prstGeom prst="roundRect">
+            <a:avLst>
+              <a:gd name="adj" fmla="val 6000"/>
+            </a:avLst>
+          </a:prstGeom>
+          <a:solidFill>
+            <a:srgbClr val="14B8A6"/>
+          </a:solidFill>
+          <a:ln>
+            <a:noFill/>
+          </a:ln>
+          <a:effectLst/>
+        </p:spPr>
+        <p:style>
+          <a:lnRef idx="1">
+            <a:schemeClr val="accent1"/>
+          </a:lnRef>
+          <a:fillRef idx="3">
+            <a:schemeClr val="accent1"/>
+          </a:fillRef>
+          <a:effectRef idx="2">
+            <a:schemeClr val="accent1"/>
+          </a:effectRef>
+          <a:fontRef idx="minor">
+            <a:schemeClr val="lt1"/>
+          </a:fontRef>
+        </p:style>
+        <p:txBody>
+          <a:bodyPr rtlCol="0" anchor="ctr"/>
+          <a:lstStyle/>
+          <a:p>
+            <a:pPr algn="ctr"/>
+          </a:p>
+        </p:txBody>
+      </p:sp>
+      <p:sp>
+        <p:nvSpPr>
+          <p:cNvPr id="54" name="TextBox 53"/>
+          <p:cNvSpPr txBox="1"/>
+          <p:nvPr/>
+        </p:nvSpPr>
+        <p:spPr>
+          <a:xfrm>
+            <a:off x="1097280" y="4964277"/>
+            <a:ext cx="1005840" cy="390448"/>
+          </a:xfrm>
+          <a:prstGeom prst="rect">
+            <a:avLst/>
+          </a:prstGeom>
+          <a:noFill/>
+        </p:spPr>
+        <p:txBody>
+          <a:bodyPr wrap="square" anchor="ctr" lIns="0" rIns="0" tIns="0" bIns="0">
+            <a:spAutoFit/>
+          </a:bodyPr>
+          <a:lstStyle/>
+          <a:p>
+            <a:pPr algn="l">
+              <a:lnSpc>
+                <a:spcPct val="100000"/>
+              </a:lnSpc>
+              <a:spcBef>
+                <a:spcPts val="0"/>
+              </a:spcBef>
+              <a:spcAft>
+                <a:spcPts val="600"/>
+              </a:spcAft>
+            </a:pPr>
+            <a:r>
+              <a:rPr sz="2400" b="1" i="0">
+                <a:solidFill>
+                  <a:srgbClr val="14B8A6"/>
+                </a:solidFill>
+                <a:latin typeface="Microsoft YaHei"/>
+              </a:rPr>
+              <a:t>08</a:t>
+            </a:r>
+          </a:p>
+        </p:txBody>
+      </p:sp>
+      <p:sp>
+        <p:nvSpPr>
+          <p:cNvPr id="55" name="TextBox 54"/>
+          <p:cNvSpPr txBox="1"/>
+          <p:nvPr/>
+        </p:nvSpPr>
+        <p:spPr>
+          <a:xfrm>
+            <a:off x="2148840" y="4964277"/>
+            <a:ext cx="2926080" cy="390448"/>
+          </a:xfrm>
+          <a:prstGeom prst="rect">
+            <a:avLst/>
+          </a:prstGeom>
+          <a:noFill/>
+        </p:spPr>
+        <p:txBody>
+          <a:bodyPr wrap="square" anchor="ctr" lIns="0" rIns="0" tIns="0" bIns="0">
+            <a:spAutoFit/>
+          </a:bodyPr>
+          <a:lstStyle/>
+          <a:p>
+            <a:pPr algn="l">
+              <a:lnSpc>
+                <a:spcPct val="100000"/>
+              </a:lnSpc>
+              <a:spcBef>
+                <a:spcPts val="0"/>
+              </a:spcBef>
+              <a:spcAft>
+                <a:spcPts val="600"/>
+              </a:spcAft>
+            </a:pPr>
+            <a:r>
+              <a:rPr sz="1550" b="1" i="0">
+                <a:solidFill>
+                  <a:srgbClr val="0B1F33"/>
+                </a:solidFill>
+                <a:latin typeface="Microsoft YaHei"/>
+              </a:rPr>
+              <a:t>竞争格局</a:t>
+            </a:r>
+          </a:p>
+        </p:txBody>
+      </p:sp>
+      <p:sp>
+        <p:nvSpPr>
+          <p:cNvPr id="56" name="Rectangle 55"/>
+          <p:cNvSpPr/>
+          <p:nvPr/>
+        </p:nvSpPr>
+        <p:spPr>
+          <a:xfrm>
+            <a:off x="5074920" y="5110581"/>
+            <a:ext cx="15240" cy="97840"/>
+          </a:xfrm>
+          <a:prstGeom prst="rect">
+            <a:avLst/>
+          </a:prstGeom>
+          <a:solidFill>
+            <a:srgbClr val="D7DEE6"/>
+          </a:solidFill>
+          <a:ln>
+            <a:noFill/>
+          </a:ln>
+          <a:effectLst/>
+        </p:spPr>
+        <p:style>
+          <a:lnRef idx="1">
+            <a:schemeClr val="accent1"/>
+          </a:lnRef>
+          <a:fillRef idx="3">
+            <a:schemeClr val="accent1"/>
+          </a:fillRef>
+          <a:effectRef idx="2">
+            <a:schemeClr val="accent1"/>
+          </a:effectRef>
+          <a:fontRef idx="minor">
+            <a:schemeClr val="lt1"/>
+          </a:fontRef>
+        </p:style>
+        <p:txBody>
+          <a:bodyPr rtlCol="0" anchor="ctr"/>
+          <a:lstStyle/>
+          <a:p>
+            <a:pPr algn="ctr"/>
+          </a:p>
+        </p:txBody>
+      </p:sp>
+      <p:sp>
+        <p:nvSpPr>
+          <p:cNvPr id="57" name="TextBox 56"/>
+          <p:cNvSpPr txBox="1"/>
+          <p:nvPr/>
+        </p:nvSpPr>
+        <p:spPr>
+          <a:xfrm>
+            <a:off x="5349240" y="4964277"/>
+            <a:ext cx="5852160" cy="390448"/>
+          </a:xfrm>
+          <a:prstGeom prst="rect">
+            <a:avLst/>
+          </a:prstGeom>
+          <a:noFill/>
+        </p:spPr>
+        <p:txBody>
+          <a:bodyPr wrap="square" anchor="ctr" lIns="0" rIns="0" tIns="0" bIns="0">
+            <a:spAutoFit/>
+          </a:bodyPr>
+          <a:lstStyle/>
+          <a:p>
+            <a:pPr algn="l">
+              <a:lnSpc>
+                <a:spcPct val="100000"/>
+              </a:lnSpc>
+              <a:spcBef>
+                <a:spcPts val="0"/>
+              </a:spcBef>
+              <a:spcAft>
+                <a:spcPts val="600"/>
+              </a:spcAft>
+            </a:pPr>
+            <a:r>
+              <a:rPr sz="1300" b="0" i="0">
+                <a:solidFill>
+                  <a:srgbClr val="5B6B7B"/>
+                </a:solidFill>
+                <a:latin typeface="Microsoft YaHei"/>
+              </a:rPr>
+              <a:t>微软 · ServiceNow · SAP/Oracle</a:t>
+            </a:r>
+          </a:p>
+        </p:txBody>
+      </p:sp>
+      <p:sp>
+        <p:nvSpPr>
+          <p:cNvPr id="58" name="Rounded Rectangle 57"/>
+          <p:cNvSpPr/>
+          <p:nvPr/>
+        </p:nvSpPr>
+        <p:spPr>
+          <a:xfrm>
+            <a:off x="777240" y="5464454"/>
+            <a:ext cx="10607040" cy="390448"/>
+          </a:xfrm>
+          <a:prstGeom prst="roundRect">
+            <a:avLst>
+              <a:gd name="adj" fmla="val 6000"/>
+            </a:avLst>
+          </a:prstGeom>
+          <a:solidFill>
+            <a:srgbClr val="F4F7FB"/>
+          </a:solidFill>
+          <a:ln>
+            <a:noFill/>
+          </a:ln>
+          <a:effectLst/>
+        </p:spPr>
+        <p:style>
+          <a:lnRef idx="1">
+            <a:schemeClr val="accent1"/>
+          </a:lnRef>
+          <a:fillRef idx="3">
+            <a:schemeClr val="accent1"/>
+          </a:fillRef>
+          <a:effectRef idx="2">
+            <a:schemeClr val="accent1"/>
+          </a:effectRef>
+          <a:fontRef idx="minor">
+            <a:schemeClr val="lt1"/>
+          </a:fontRef>
+        </p:style>
+        <p:txBody>
+          <a:bodyPr rtlCol="0" anchor="ctr"/>
+          <a:lstStyle/>
+          <a:p>
+            <a:pPr algn="ctr"/>
+          </a:p>
+        </p:txBody>
+      </p:sp>
+      <p:sp>
+        <p:nvSpPr>
+          <p:cNvPr id="59" name="Rounded Rectangle 58"/>
+          <p:cNvSpPr/>
+          <p:nvPr/>
+        </p:nvSpPr>
+        <p:spPr>
+          <a:xfrm>
+            <a:off x="777240" y="5464454"/>
+            <a:ext cx="82296" cy="390448"/>
+          </a:xfrm>
+          <a:prstGeom prst="roundRect">
+            <a:avLst>
+              <a:gd name="adj" fmla="val 6000"/>
+            </a:avLst>
+          </a:prstGeom>
+          <a:solidFill>
+            <a:srgbClr val="7C5CFF"/>
+          </a:solidFill>
+          <a:ln>
+            <a:noFill/>
+          </a:ln>
+          <a:effectLst/>
+        </p:spPr>
+        <p:style>
+          <a:lnRef idx="1">
+            <a:schemeClr val="accent1"/>
+          </a:lnRef>
+          <a:fillRef idx="3">
+            <a:schemeClr val="accent1"/>
+          </a:fillRef>
+          <a:effectRef idx="2">
+            <a:schemeClr val="accent1"/>
+          </a:effectRef>
+          <a:fontRef idx="minor">
+            <a:schemeClr val="lt1"/>
+          </a:fontRef>
+        </p:style>
+        <p:txBody>
+          <a:bodyPr rtlCol="0" anchor="ctr"/>
+          <a:lstStyle/>
+          <a:p>
+            <a:pPr algn="ctr"/>
+          </a:p>
+        </p:txBody>
+      </p:sp>
+      <p:sp>
+        <p:nvSpPr>
+          <p:cNvPr id="60" name="TextBox 59"/>
+          <p:cNvSpPr txBox="1"/>
+          <p:nvPr/>
+        </p:nvSpPr>
+        <p:spPr>
+          <a:xfrm>
+            <a:off x="1097280" y="5464454"/>
+            <a:ext cx="1005840" cy="390448"/>
+          </a:xfrm>
+          <a:prstGeom prst="rect">
+            <a:avLst/>
+          </a:prstGeom>
+          <a:noFill/>
+        </p:spPr>
+        <p:txBody>
+          <a:bodyPr wrap="square" anchor="ctr" lIns="0" rIns="0" tIns="0" bIns="0">
+            <a:spAutoFit/>
+          </a:bodyPr>
+          <a:lstStyle/>
+          <a:p>
+            <a:pPr algn="l">
+              <a:lnSpc>
+                <a:spcPct val="100000"/>
+              </a:lnSpc>
+              <a:spcBef>
+                <a:spcPts val="0"/>
+              </a:spcBef>
+              <a:spcAft>
+                <a:spcPts val="600"/>
+              </a:spcAft>
+            </a:pPr>
+            <a:r>
+              <a:rPr sz="2400" b="1" i="0">
+                <a:solidFill>
+                  <a:srgbClr val="7C5CFF"/>
+                </a:solidFill>
+                <a:latin typeface="Microsoft YaHei"/>
+              </a:rPr>
+              <a:t>09</a:t>
+            </a:r>
+          </a:p>
+        </p:txBody>
+      </p:sp>
+      <p:sp>
+        <p:nvSpPr>
+          <p:cNvPr id="61" name="TextBox 60"/>
+          <p:cNvSpPr txBox="1"/>
+          <p:nvPr/>
+        </p:nvSpPr>
+        <p:spPr>
+          <a:xfrm>
+            <a:off x="2148840" y="5464454"/>
+            <a:ext cx="2926080" cy="390448"/>
+          </a:xfrm>
+          <a:prstGeom prst="rect">
+            <a:avLst/>
+          </a:prstGeom>
+          <a:noFill/>
+        </p:spPr>
+        <p:txBody>
+          <a:bodyPr wrap="square" anchor="ctr" lIns="0" rIns="0" tIns="0" bIns="0">
+            <a:spAutoFit/>
+          </a:bodyPr>
+          <a:lstStyle/>
+          <a:p>
+            <a:pPr algn="l">
+              <a:lnSpc>
+                <a:spcPct val="100000"/>
+              </a:lnSpc>
+              <a:spcBef>
+                <a:spcPts val="0"/>
+              </a:spcBef>
+              <a:spcAft>
+                <a:spcPts val="600"/>
+              </a:spcAft>
+            </a:pPr>
+            <a:r>
+              <a:rPr sz="1550" b="1" i="0">
+                <a:solidFill>
+                  <a:srgbClr val="0B1F33"/>
+                </a:solidFill>
+                <a:latin typeface="Microsoft YaHei"/>
+              </a:rPr>
+              <a:t>演进路线</a:t>
+            </a:r>
+          </a:p>
+        </p:txBody>
+      </p:sp>
+      <p:sp>
+        <p:nvSpPr>
+          <p:cNvPr id="62" name="Rectangle 61"/>
+          <p:cNvSpPr/>
+          <p:nvPr/>
+        </p:nvSpPr>
+        <p:spPr>
+          <a:xfrm>
+            <a:off x="5074920" y="5610758"/>
+            <a:ext cx="15240" cy="97840"/>
+          </a:xfrm>
+          <a:prstGeom prst="rect">
+            <a:avLst/>
+          </a:prstGeom>
+          <a:solidFill>
+            <a:srgbClr val="D7DEE6"/>
+          </a:solidFill>
+          <a:ln>
+            <a:noFill/>
+          </a:ln>
+          <a:effectLst/>
+        </p:spPr>
+        <p:style>
+          <a:lnRef idx="1">
+            <a:schemeClr val="accent1"/>
+          </a:lnRef>
+          <a:fillRef idx="3">
+            <a:schemeClr val="accent1"/>
+          </a:fillRef>
+          <a:effectRef idx="2">
+            <a:schemeClr val="accent1"/>
+          </a:effectRef>
+          <a:fontRef idx="minor">
+            <a:schemeClr val="lt1"/>
+          </a:fontRef>
+        </p:style>
+        <p:txBody>
+          <a:bodyPr rtlCol="0" anchor="ctr"/>
+          <a:lstStyle/>
+          <a:p>
+            <a:pPr algn="ctr"/>
+          </a:p>
+        </p:txBody>
+      </p:sp>
+      <p:sp>
+        <p:nvSpPr>
+          <p:cNvPr id="63" name="TextBox 62"/>
+          <p:cNvSpPr txBox="1"/>
+          <p:nvPr/>
+        </p:nvSpPr>
+        <p:spPr>
+          <a:xfrm>
+            <a:off x="5349240" y="5464454"/>
+            <a:ext cx="5852160" cy="390448"/>
+          </a:xfrm>
+          <a:prstGeom prst="rect">
+            <a:avLst/>
+          </a:prstGeom>
+          <a:noFill/>
+        </p:spPr>
+        <p:txBody>
+          <a:bodyPr wrap="square" anchor="ctr" lIns="0" rIns="0" tIns="0" bIns="0">
+            <a:spAutoFit/>
+          </a:bodyPr>
+          <a:lstStyle/>
+          <a:p>
+            <a:pPr algn="l">
+              <a:lnSpc>
+                <a:spcPct val="100000"/>
+              </a:lnSpc>
+              <a:spcBef>
+                <a:spcPts val="0"/>
+              </a:spcBef>
+              <a:spcAft>
+                <a:spcPts val="600"/>
+              </a:spcAft>
+            </a:pPr>
+            <a:r>
+              <a:rPr sz="1300" b="0" i="0">
+                <a:solidFill>
+                  <a:srgbClr val="5B6B7B"/>
+                </a:solidFill>
+                <a:latin typeface="Microsoft YaHei"/>
+              </a:rPr>
+              <a:t>云 CRM → Customer360 → Agentic</a:t>
+            </a:r>
+          </a:p>
+        </p:txBody>
+      </p:sp>
+      <p:sp>
+        <p:nvSpPr>
+          <p:cNvPr id="64" name="Rounded Rectangle 63"/>
+          <p:cNvSpPr/>
+          <p:nvPr/>
+        </p:nvSpPr>
+        <p:spPr>
+          <a:xfrm>
+            <a:off x="777240" y="5964631"/>
+            <a:ext cx="10607040" cy="390448"/>
+          </a:xfrm>
+          <a:prstGeom prst="roundRect">
+            <a:avLst>
+              <a:gd name="adj" fmla="val 6000"/>
+            </a:avLst>
+          </a:prstGeom>
+          <a:solidFill>
+            <a:srgbClr val="F4F7FB"/>
+          </a:solidFill>
+          <a:ln>
+            <a:noFill/>
+          </a:ln>
+          <a:effectLst/>
+        </p:spPr>
+        <p:style>
+          <a:lnRef idx="1">
+            <a:schemeClr val="accent1"/>
+          </a:lnRef>
+          <a:fillRef idx="3">
+            <a:schemeClr val="accent1"/>
+          </a:fillRef>
+          <a:effectRef idx="2">
+            <a:schemeClr val="accent1"/>
+          </a:effectRef>
+          <a:fontRef idx="minor">
+            <a:schemeClr val="lt1"/>
+          </a:fontRef>
+        </p:style>
+        <p:txBody>
+          <a:bodyPr rtlCol="0" anchor="ctr"/>
+          <a:lstStyle/>
+          <a:p>
+            <a:pPr algn="ctr"/>
+          </a:p>
+        </p:txBody>
+      </p:sp>
+      <p:sp>
+        <p:nvSpPr>
+          <p:cNvPr id="65" name="Rounded Rectangle 64"/>
+          <p:cNvSpPr/>
+          <p:nvPr/>
+        </p:nvSpPr>
+        <p:spPr>
+          <a:xfrm>
+            <a:off x="777240" y="5964631"/>
+            <a:ext cx="82296" cy="390448"/>
+          </a:xfrm>
+          <a:prstGeom prst="roundRect">
+            <a:avLst>
+              <a:gd name="adj" fmla="val 6000"/>
+            </a:avLst>
+          </a:prstGeom>
+          <a:solidFill>
+            <a:srgbClr val="F46A5E"/>
+          </a:solidFill>
+          <a:ln>
+            <a:noFill/>
+          </a:ln>
+          <a:effectLst/>
+        </p:spPr>
+        <p:style>
+          <a:lnRef idx="1">
+            <a:schemeClr val="accent1"/>
+          </a:lnRef>
+          <a:fillRef idx="3">
+            <a:schemeClr val="accent1"/>
+          </a:fillRef>
+          <a:effectRef idx="2">
+            <a:schemeClr val="accent1"/>
+          </a:effectRef>
+          <a:fontRef idx="minor">
+            <a:schemeClr val="lt1"/>
+          </a:fontRef>
+        </p:style>
+        <p:txBody>
+          <a:bodyPr rtlCol="0" anchor="ctr"/>
+          <a:lstStyle/>
+          <a:p>
+            <a:pPr algn="ctr"/>
+          </a:p>
+        </p:txBody>
+      </p:sp>
+      <p:sp>
+        <p:nvSpPr>
+          <p:cNvPr id="66" name="TextBox 65"/>
+          <p:cNvSpPr txBox="1"/>
+          <p:nvPr/>
+        </p:nvSpPr>
+        <p:spPr>
+          <a:xfrm>
+            <a:off x="1097280" y="5964631"/>
+            <a:ext cx="1005840" cy="390448"/>
+          </a:xfrm>
+          <a:prstGeom prst="rect">
+            <a:avLst/>
+          </a:prstGeom>
+          <a:noFill/>
+        </p:spPr>
+        <p:txBody>
+          <a:bodyPr wrap="square" anchor="ctr" lIns="0" rIns="0" tIns="0" bIns="0">
+            <a:spAutoFit/>
+          </a:bodyPr>
+          <a:lstStyle/>
+          <a:p>
+            <a:pPr algn="l">
+              <a:lnSpc>
+                <a:spcPct val="100000"/>
+              </a:lnSpc>
+              <a:spcBef>
+                <a:spcPts val="0"/>
+              </a:spcBef>
+              <a:spcAft>
+                <a:spcPts val="600"/>
+              </a:spcAft>
+            </a:pPr>
+            <a:r>
+              <a:rPr sz="2400" b="1" i="0">
+                <a:solidFill>
+                  <a:srgbClr val="F46A5E"/>
+                </a:solidFill>
+                <a:latin typeface="Microsoft YaHei"/>
+              </a:rPr>
+              <a:t>10</a:t>
+            </a:r>
+          </a:p>
+        </p:txBody>
+      </p:sp>
+      <p:sp>
+        <p:nvSpPr>
+          <p:cNvPr id="67" name="TextBox 66"/>
+          <p:cNvSpPr txBox="1"/>
+          <p:nvPr/>
+        </p:nvSpPr>
+        <p:spPr>
+          <a:xfrm>
+            <a:off x="2148840" y="5964631"/>
+            <a:ext cx="2926080" cy="390448"/>
+          </a:xfrm>
+          <a:prstGeom prst="rect">
+            <a:avLst/>
+          </a:prstGeom>
+          <a:noFill/>
+        </p:spPr>
+        <p:txBody>
+          <a:bodyPr wrap="square" anchor="ctr" lIns="0" rIns="0" tIns="0" bIns="0">
+            <a:spAutoFit/>
+          </a:bodyPr>
+          <a:lstStyle/>
+          <a:p>
+            <a:pPr algn="l">
+              <a:lnSpc>
+                <a:spcPct val="100000"/>
+              </a:lnSpc>
+              <a:spcBef>
+                <a:spcPts val="0"/>
+              </a:spcBef>
+              <a:spcAft>
+                <a:spcPts val="600"/>
+              </a:spcAft>
+            </a:pPr>
+            <a:r>
+              <a:rPr sz="1550" b="1" i="0">
+                <a:solidFill>
+                  <a:srgbClr val="0B1F33"/>
+                </a:solidFill>
+                <a:latin typeface="Microsoft YaHei"/>
+              </a:rPr>
+              <a:t>风险与粘性</a:t>
+            </a:r>
+          </a:p>
+        </p:txBody>
+      </p:sp>
+      <p:sp>
+        <p:nvSpPr>
+          <p:cNvPr id="68" name="Rectangle 67"/>
+          <p:cNvSpPr/>
+          <p:nvPr/>
+        </p:nvSpPr>
+        <p:spPr>
+          <a:xfrm>
+            <a:off x="5074920" y="6110935"/>
+            <a:ext cx="15240" cy="97840"/>
+          </a:xfrm>
+          <a:prstGeom prst="rect">
+            <a:avLst/>
+          </a:prstGeom>
+          <a:solidFill>
+            <a:srgbClr val="D7DEE6"/>
+          </a:solidFill>
+          <a:ln>
+            <a:noFill/>
+          </a:ln>
+          <a:effectLst/>
+        </p:spPr>
+        <p:style>
+          <a:lnRef idx="1">
+            <a:schemeClr val="accent1"/>
+          </a:lnRef>
+          <a:fillRef idx="3">
+            <a:schemeClr val="accent1"/>
+          </a:fillRef>
+          <a:effectRef idx="2">
+            <a:schemeClr val="accent1"/>
+          </a:effectRef>
+          <a:fontRef idx="minor">
+            <a:schemeClr val="lt1"/>
+          </a:fontRef>
+        </p:style>
+        <p:txBody>
+          <a:bodyPr rtlCol="0" anchor="ctr"/>
+          <a:lstStyle/>
+          <a:p>
+            <a:pPr algn="ctr"/>
+          </a:p>
+        </p:txBody>
+      </p:sp>
+      <p:sp>
+        <p:nvSpPr>
+          <p:cNvPr id="69" name="TextBox 68"/>
+          <p:cNvSpPr txBox="1"/>
+          <p:nvPr/>
+        </p:nvSpPr>
+        <p:spPr>
+          <a:xfrm>
+            <a:off x="5349240" y="5964631"/>
+            <a:ext cx="5852160" cy="390448"/>
+          </a:xfrm>
+          <a:prstGeom prst="rect">
+            <a:avLst/>
+          </a:prstGeom>
+          <a:noFill/>
+        </p:spPr>
+        <p:txBody>
+          <a:bodyPr wrap="square" anchor="ctr" lIns="0" rIns="0" tIns="0" bIns="0">
+            <a:spAutoFit/>
+          </a:bodyPr>
+          <a:lstStyle/>
+          <a:p>
+            <a:pPr algn="l">
+              <a:lnSpc>
+                <a:spcPct val="100000"/>
+              </a:lnSpc>
+              <a:spcBef>
+                <a:spcPts val="0"/>
+              </a:spcBef>
+              <a:spcAft>
+                <a:spcPts val="600"/>
+              </a:spcAft>
+            </a:pPr>
+            <a:r>
+              <a:rPr sz="1300" b="0" i="0">
+                <a:solidFill>
+                  <a:srgbClr val="5B6B7B"/>
+                </a:solidFill>
+                <a:latin typeface="Microsoft YaHei"/>
+              </a:rPr>
+              <a:t>护城河风险 vs 客户粘性</a:t>
             </a:r>
           </a:p>
         </p:txBody>
@@ -6387,7 +13527,7 @@
                 </a:solidFill>
                 <a:latin typeface="Microsoft YaHei"/>
               </a:rPr>
-              <a:t> / 10</a:t>
+              <a:t> / 14</a:t>
             </a:r>
           </a:p>
         </p:txBody>
@@ -7759,7 +14899,7 @@
                 </a:solidFill>
                 <a:latin typeface="Microsoft YaHei"/>
               </a:rPr>
-              <a:t> / 10</a:t>
+              <a:t> / 14</a:t>
             </a:r>
           </a:p>
         </p:txBody>
@@ -9245,7 +16385,7 @@
                 </a:solidFill>
                 <a:latin typeface="Microsoft YaHei"/>
               </a:rPr>
-              <a:t> / 10</a:t>
+              <a:t> / 14</a:t>
             </a:r>
           </a:p>
         </p:txBody>
@@ -10617,7 +17757,7 @@
                 </a:solidFill>
                 <a:latin typeface="Microsoft YaHei"/>
               </a:rPr>
-              <a:t> / 10</a:t>
+              <a:t> / 14</a:t>
             </a:r>
           </a:p>
         </p:txBody>
@@ -11807,7 +18947,7 @@
                 </a:solidFill>
                 <a:latin typeface="Microsoft YaHei"/>
               </a:rPr>
-              <a:t> / 10</a:t>
+              <a:t> / 14</a:t>
             </a:r>
           </a:p>
         </p:txBody>
@@ -13179,7 +20319,7 @@
                 </a:solidFill>
                 <a:latin typeface="Microsoft YaHei"/>
               </a:rPr>
-              <a:t> / 10</a:t>
+              <a:t> / 14</a:t>
             </a:r>
           </a:p>
         </p:txBody>
@@ -14690,7 +21830,7 @@
                 </a:solidFill>
                 <a:latin typeface="Microsoft YaHei"/>
               </a:rPr>
-              <a:t>STRATEGIC TAKEAWAYS</a:t>
+              <a:t>07 客户与场景</a:t>
             </a:r>
           </a:p>
         </p:txBody>
@@ -14735,7 +21875,7 @@
                 </a:solidFill>
                 <a:latin typeface="Microsoft YaHei"/>
               </a:rPr>
-              <a:t>三个必须记住的判断</a:t>
+              <a:t>Agentforce 落到哪些业务场景</a:t>
             </a:r>
           </a:p>
         </p:txBody>
@@ -14789,7 +21929,7 @@
                 </a:solidFill>
                 <a:latin typeface="Microsoft YaHei"/>
               </a:rPr>
-              <a:t> / 10</a:t>
+              <a:t> / 14</a:t>
             </a:r>
           </a:p>
         </p:txBody>
@@ -14929,104 +22069,14 @@
       </p:sp>
       <p:sp>
         <p:nvSpPr>
-          <p:cNvPr id="10" name="Rounded Rectangle 9"/>
-          <p:cNvSpPr/>
-          <p:nvPr/>
-        </p:nvSpPr>
-        <p:spPr>
-          <a:xfrm>
-            <a:off x="777240" y="1463040"/>
-            <a:ext cx="10607040" cy="1618488"/>
-          </a:xfrm>
-          <a:prstGeom prst="roundRect">
-            <a:avLst>
-              <a:gd name="adj" fmla="val 6000"/>
-            </a:avLst>
-          </a:prstGeom>
-          <a:solidFill>
-            <a:srgbClr val="F4F7FB"/>
-          </a:solidFill>
-          <a:ln>
-            <a:noFill/>
-          </a:ln>
-          <a:effectLst/>
-        </p:spPr>
-        <p:style>
-          <a:lnRef idx="1">
-            <a:schemeClr val="accent1"/>
-          </a:lnRef>
-          <a:fillRef idx="3">
-            <a:schemeClr val="accent1"/>
-          </a:fillRef>
-          <a:effectRef idx="2">
-            <a:schemeClr val="accent1"/>
-          </a:effectRef>
-          <a:fontRef idx="minor">
-            <a:schemeClr val="lt1"/>
-          </a:fontRef>
-        </p:style>
-        <p:txBody>
-          <a:bodyPr rtlCol="0" anchor="ctr"/>
-          <a:lstStyle/>
-          <a:p>
-            <a:pPr algn="ctr"/>
-          </a:p>
-        </p:txBody>
-      </p:sp>
-      <p:sp>
-        <p:nvSpPr>
-          <p:cNvPr id="11" name="Oval 10"/>
-          <p:cNvSpPr/>
-          <p:nvPr/>
-        </p:nvSpPr>
-        <p:spPr>
-          <a:xfrm>
-            <a:off x="1033272" y="2043684"/>
-            <a:ext cx="457200" cy="457200"/>
-          </a:xfrm>
-          <a:prstGeom prst="ellipse">
-            <a:avLst/>
-          </a:prstGeom>
-          <a:solidFill>
-            <a:srgbClr val="1B6EF3"/>
-          </a:solidFill>
-          <a:ln>
-            <a:noFill/>
-          </a:ln>
-          <a:effectLst/>
-        </p:spPr>
-        <p:style>
-          <a:lnRef idx="1">
-            <a:schemeClr val="accent1"/>
-          </a:lnRef>
-          <a:fillRef idx="3">
-            <a:schemeClr val="accent1"/>
-          </a:fillRef>
-          <a:effectRef idx="2">
-            <a:schemeClr val="accent1"/>
-          </a:effectRef>
-          <a:fontRef idx="minor">
-            <a:schemeClr val="lt1"/>
-          </a:fontRef>
-        </p:style>
-        <p:txBody>
-          <a:bodyPr rtlCol="0" anchor="ctr"/>
-          <a:lstStyle/>
-          <a:p>
-            <a:pPr algn="ctr"/>
-          </a:p>
-        </p:txBody>
-      </p:sp>
-      <p:sp>
-        <p:nvSpPr>
-          <p:cNvPr id="12" name="TextBox 11"/>
+          <p:cNvPr id="10" name="TextBox 9"/>
           <p:cNvSpPr txBox="1"/>
           <p:nvPr/>
         </p:nvSpPr>
         <p:spPr>
           <a:xfrm>
-            <a:off x="1033272" y="2043684"/>
-            <a:ext cx="457200" cy="457200"/>
+            <a:off x="777240" y="1207008"/>
+            <a:ext cx="10607040" cy="502920"/>
           </a:xfrm>
           <a:prstGeom prst="rect">
             <a:avLst/>
@@ -15034,14 +22084,14 @@
           <a:noFill/>
         </p:spPr>
         <p:txBody>
-          <a:bodyPr wrap="square" anchor="ctr" lIns="0" rIns="0" tIns="0" bIns="0">
+          <a:bodyPr wrap="square" anchor="t" lIns="0" rIns="0" tIns="0" bIns="0">
             <a:spAutoFit/>
           </a:bodyPr>
           <a:lstStyle/>
           <a:p>
-            <a:pPr algn="ctr">
+            <a:pPr algn="l">
               <a:lnSpc>
-                <a:spcPct val="100000"/>
+                <a:spcPct val="110000"/>
               </a:lnSpc>
               <a:spcBef>
                 <a:spcPts val="0"/>
@@ -15051,14 +22101,115 @@
               </a:spcAft>
             </a:pPr>
             <a:r>
-              <a:rPr sz="1700" b="1" i="0">
-                <a:solidFill>
-                  <a:srgbClr val="FFFFFF"/>
-                </a:solidFill>
-                <a:latin typeface="Microsoft YaHei"/>
-              </a:rPr>
-              <a:t>1</a:t>
-            </a:r>
+              <a:rPr sz="1300" b="0" i="0">
+                <a:solidFill>
+                  <a:srgbClr val="5B6B7B"/>
+                </a:solidFill>
+                <a:latin typeface="Microsoft YaHei"/>
+              </a:rPr>
+              <a:t>Salesforce 把 Agent 嵌入销售、服务、营销等核心业务流，跨行业兑现结果。</a:t>
+            </a:r>
+          </a:p>
+        </p:txBody>
+      </p:sp>
+      <p:sp>
+        <p:nvSpPr>
+          <p:cNvPr id="11" name="Rounded Rectangle 10"/>
+          <p:cNvSpPr/>
+          <p:nvPr/>
+        </p:nvSpPr>
+        <p:spPr>
+          <a:xfrm>
+            <a:off x="777240" y="1783080"/>
+            <a:ext cx="5120640" cy="2272284"/>
+          </a:xfrm>
+          <a:prstGeom prst="roundRect">
+            <a:avLst>
+              <a:gd name="adj" fmla="val 6000"/>
+            </a:avLst>
+          </a:prstGeom>
+          <a:solidFill>
+            <a:srgbClr val="FFFFFF"/>
+          </a:solidFill>
+          <a:ln w="9525">
+            <a:solidFill>
+              <a:srgbClr val="D7DEE6"/>
+            </a:solidFill>
+          </a:ln>
+          <a:effectLst/>
+          <a:effectLst>
+            <a:outerShdw blurRad="90000" dist="40000" dir="5400000" rotWithShape="0">
+              <a:srgbClr val="0B1F33">
+                <a:alpha val="18000"/>
+              </a:srgbClr>
+            </a:outerShdw>
+          </a:effectLst>
+        </p:spPr>
+        <p:style>
+          <a:lnRef idx="1">
+            <a:schemeClr val="accent1"/>
+          </a:lnRef>
+          <a:fillRef idx="3">
+            <a:schemeClr val="accent1"/>
+          </a:fillRef>
+          <a:effectRef idx="2">
+            <a:schemeClr val="accent1"/>
+          </a:effectRef>
+          <a:fontRef idx="minor">
+            <a:schemeClr val="lt1"/>
+          </a:fontRef>
+        </p:style>
+        <p:txBody>
+          <a:bodyPr rtlCol="0" anchor="ctr"/>
+          <a:lstStyle/>
+          <a:p>
+            <a:pPr algn="ctr"/>
+          </a:p>
+        </p:txBody>
+      </p:sp>
+      <p:sp>
+        <p:nvSpPr>
+          <p:cNvPr id="12" name="Rounded Rectangle 11"/>
+          <p:cNvSpPr/>
+          <p:nvPr/>
+        </p:nvSpPr>
+        <p:spPr>
+          <a:xfrm>
+            <a:off x="777240" y="1783080"/>
+            <a:ext cx="91440" cy="2272284"/>
+          </a:xfrm>
+          <a:prstGeom prst="roundRect">
+            <a:avLst>
+              <a:gd name="adj" fmla="val 6000"/>
+            </a:avLst>
+          </a:prstGeom>
+          <a:solidFill>
+            <a:srgbClr val="1B6EF3"/>
+          </a:solidFill>
+          <a:ln>
+            <a:noFill/>
+          </a:ln>
+          <a:effectLst/>
+        </p:spPr>
+        <p:style>
+          <a:lnRef idx="1">
+            <a:schemeClr val="accent1"/>
+          </a:lnRef>
+          <a:fillRef idx="3">
+            <a:schemeClr val="accent1"/>
+          </a:fillRef>
+          <a:effectRef idx="2">
+            <a:schemeClr val="accent1"/>
+          </a:effectRef>
+          <a:fontRef idx="minor">
+            <a:schemeClr val="lt1"/>
+          </a:fontRef>
+        </p:style>
+        <p:txBody>
+          <a:bodyPr rtlCol="0" anchor="ctr"/>
+          <a:lstStyle/>
+          <a:p>
+            <a:pPr algn="ctr"/>
           </a:p>
         </p:txBody>
       </p:sp>
@@ -15070,8 +22221,8 @@
         </p:nvSpPr>
         <p:spPr>
           <a:xfrm>
-            <a:off x="1691640" y="1463040"/>
-            <a:ext cx="2743200" cy="1618488"/>
+            <a:off x="1097280" y="1965960"/>
+            <a:ext cx="4572000" cy="320040"/>
           </a:xfrm>
           <a:prstGeom prst="rect">
             <a:avLst/>
@@ -15079,7 +22230,7 @@
           <a:noFill/>
         </p:spPr>
         <p:txBody>
-          <a:bodyPr wrap="square" anchor="ctr" lIns="0" rIns="0" tIns="0" bIns="0">
+          <a:bodyPr wrap="square" anchor="t" lIns="0" rIns="0" tIns="0" bIns="0">
             <a:spAutoFit/>
           </a:bodyPr>
           <a:lstStyle/>
@@ -15096,71 +22247,27 @@
               </a:spcAft>
             </a:pPr>
             <a:r>
-              <a:rPr sz="1450" b="1" i="0">
-                <a:solidFill>
-                  <a:srgbClr val="0B1F33"/>
-                </a:solidFill>
-                <a:latin typeface="Microsoft YaHei"/>
-              </a:rPr>
-              <a:t>从席位到结果</a:t>
-            </a:r>
-          </a:p>
-        </p:txBody>
-      </p:sp>
-      <p:sp>
-        <p:nvSpPr>
-          <p:cNvPr id="14" name="Rectangle 13"/>
-          <p:cNvSpPr/>
-          <p:nvPr/>
-        </p:nvSpPr>
-        <p:spPr>
-          <a:xfrm>
-            <a:off x="4389120" y="1627632"/>
-            <a:ext cx="15240" cy="1289304"/>
-          </a:xfrm>
-          <a:prstGeom prst="rect">
-            <a:avLst/>
-          </a:prstGeom>
-          <a:solidFill>
-            <a:srgbClr val="D7DEE6"/>
-          </a:solidFill>
-          <a:ln>
-            <a:noFill/>
-          </a:ln>
-          <a:effectLst/>
-        </p:spPr>
-        <p:style>
-          <a:lnRef idx="1">
-            <a:schemeClr val="accent1"/>
-          </a:lnRef>
-          <a:fillRef idx="3">
-            <a:schemeClr val="accent1"/>
-          </a:fillRef>
-          <a:effectRef idx="2">
-            <a:schemeClr val="accent1"/>
-          </a:effectRef>
-          <a:fontRef idx="minor">
-            <a:schemeClr val="lt1"/>
-          </a:fontRef>
-        </p:style>
-        <p:txBody>
-          <a:bodyPr rtlCol="0" anchor="ctr"/>
-          <a:lstStyle/>
-          <a:p>
-            <a:pPr algn="ctr"/>
-          </a:p>
-        </p:txBody>
-      </p:sp>
-      <p:sp>
-        <p:nvSpPr>
-          <p:cNvPr id="15" name="TextBox 14"/>
+              <a:rPr sz="1200" b="1" i="0">
+                <a:solidFill>
+                  <a:srgbClr val="1B6EF3"/>
+                </a:solidFill>
+                <a:latin typeface="Microsoft YaHei"/>
+              </a:rPr>
+              <a:t>销售团队</a:t>
+            </a:r>
+          </a:p>
+        </p:txBody>
+      </p:sp>
+      <p:sp>
+        <p:nvSpPr>
+          <p:cNvPr id="14" name="TextBox 13"/>
           <p:cNvSpPr txBox="1"/>
           <p:nvPr/>
         </p:nvSpPr>
         <p:spPr>
           <a:xfrm>
-            <a:off x="4617720" y="1463040"/>
-            <a:ext cx="6492240" cy="1618488"/>
+            <a:off x="1097280" y="2276856"/>
+            <a:ext cx="4572000" cy="457200"/>
           </a:xfrm>
           <a:prstGeom prst="rect">
             <a:avLst/>
@@ -15168,187 +22275,7 @@
           <a:noFill/>
         </p:spPr>
         <p:txBody>
-          <a:bodyPr wrap="square" anchor="ctr" lIns="0" rIns="0" tIns="0" bIns="0">
-            <a:spAutoFit/>
-          </a:bodyPr>
-          <a:lstStyle/>
-          <a:p>
-            <a:pPr algn="l">
-              <a:lnSpc>
-                <a:spcPct val="112000"/>
-              </a:lnSpc>
-              <a:spcBef>
-                <a:spcPts val="0"/>
-              </a:spcBef>
-              <a:spcAft>
-                <a:spcPts val="600"/>
-              </a:spcAft>
-            </a:pPr>
-            <a:r>
-              <a:rPr sz="1250" b="0" i="0">
-                <a:solidFill>
-                  <a:srgbClr val="5B6B7B"/>
-                </a:solidFill>
-                <a:latin typeface="Microsoft YaHei"/>
-              </a:rPr>
-              <a:t>Agent 替人办事，使计费从「按人」转向「按完成的业务结果」。</a:t>
-            </a:r>
-          </a:p>
-        </p:txBody>
-      </p:sp>
-      <p:sp>
-        <p:nvSpPr>
-          <p:cNvPr id="16" name="Rounded Rectangle 15"/>
-          <p:cNvSpPr/>
-          <p:nvPr/>
-        </p:nvSpPr>
-        <p:spPr>
-          <a:xfrm>
-            <a:off x="777240" y="3191256"/>
-            <a:ext cx="10607040" cy="1618488"/>
-          </a:xfrm>
-          <a:prstGeom prst="roundRect">
-            <a:avLst>
-              <a:gd name="adj" fmla="val 6000"/>
-            </a:avLst>
-          </a:prstGeom>
-          <a:solidFill>
-            <a:srgbClr val="F4F7FB"/>
-          </a:solidFill>
-          <a:ln>
-            <a:noFill/>
-          </a:ln>
-          <a:effectLst/>
-        </p:spPr>
-        <p:style>
-          <a:lnRef idx="1">
-            <a:schemeClr val="accent1"/>
-          </a:lnRef>
-          <a:fillRef idx="3">
-            <a:schemeClr val="accent1"/>
-          </a:fillRef>
-          <a:effectRef idx="2">
-            <a:schemeClr val="accent1"/>
-          </a:effectRef>
-          <a:fontRef idx="minor">
-            <a:schemeClr val="lt1"/>
-          </a:fontRef>
-        </p:style>
-        <p:txBody>
-          <a:bodyPr rtlCol="0" anchor="ctr"/>
-          <a:lstStyle/>
-          <a:p>
-            <a:pPr algn="ctr"/>
-          </a:p>
-        </p:txBody>
-      </p:sp>
-      <p:sp>
-        <p:nvSpPr>
-          <p:cNvPr id="17" name="Oval 16"/>
-          <p:cNvSpPr/>
-          <p:nvPr/>
-        </p:nvSpPr>
-        <p:spPr>
-          <a:xfrm>
-            <a:off x="1033272" y="3771900"/>
-            <a:ext cx="457200" cy="457200"/>
-          </a:xfrm>
-          <a:prstGeom prst="ellipse">
-            <a:avLst/>
-          </a:prstGeom>
-          <a:solidFill>
-            <a:srgbClr val="14B8A6"/>
-          </a:solidFill>
-          <a:ln>
-            <a:noFill/>
-          </a:ln>
-          <a:effectLst/>
-        </p:spPr>
-        <p:style>
-          <a:lnRef idx="1">
-            <a:schemeClr val="accent1"/>
-          </a:lnRef>
-          <a:fillRef idx="3">
-            <a:schemeClr val="accent1"/>
-          </a:fillRef>
-          <a:effectRef idx="2">
-            <a:schemeClr val="accent1"/>
-          </a:effectRef>
-          <a:fontRef idx="minor">
-            <a:schemeClr val="lt1"/>
-          </a:fontRef>
-        </p:style>
-        <p:txBody>
-          <a:bodyPr rtlCol="0" anchor="ctr"/>
-          <a:lstStyle/>
-          <a:p>
-            <a:pPr algn="ctr"/>
-          </a:p>
-        </p:txBody>
-      </p:sp>
-      <p:sp>
-        <p:nvSpPr>
-          <p:cNvPr id="18" name="TextBox 17"/>
-          <p:cNvSpPr txBox="1"/>
-          <p:nvPr/>
-        </p:nvSpPr>
-        <p:spPr>
-          <a:xfrm>
-            <a:off x="1033272" y="3771900"/>
-            <a:ext cx="457200" cy="457200"/>
-          </a:xfrm>
-          <a:prstGeom prst="rect">
-            <a:avLst/>
-          </a:prstGeom>
-          <a:noFill/>
-        </p:spPr>
-        <p:txBody>
-          <a:bodyPr wrap="square" anchor="ctr" lIns="0" rIns="0" tIns="0" bIns="0">
-            <a:spAutoFit/>
-          </a:bodyPr>
-          <a:lstStyle/>
-          <a:p>
-            <a:pPr algn="ctr">
-              <a:lnSpc>
-                <a:spcPct val="100000"/>
-              </a:lnSpc>
-              <a:spcBef>
-                <a:spcPts val="0"/>
-              </a:spcBef>
-              <a:spcAft>
-                <a:spcPts val="600"/>
-              </a:spcAft>
-            </a:pPr>
-            <a:r>
-              <a:rPr sz="1700" b="1" i="0">
-                <a:solidFill>
-                  <a:srgbClr val="FFFFFF"/>
-                </a:solidFill>
-                <a:latin typeface="Microsoft YaHei"/>
-              </a:rPr>
-              <a:t>2</a:t>
-            </a:r>
-          </a:p>
-        </p:txBody>
-      </p:sp>
-      <p:sp>
-        <p:nvSpPr>
-          <p:cNvPr id="19" name="TextBox 18"/>
-          <p:cNvSpPr txBox="1"/>
-          <p:nvPr/>
-        </p:nvSpPr>
-        <p:spPr>
-          <a:xfrm>
-            <a:off x="1691640" y="3191256"/>
-            <a:ext cx="2743200" cy="1618488"/>
-          </a:xfrm>
-          <a:prstGeom prst="rect">
-            <a:avLst/>
-          </a:prstGeom>
-          <a:noFill/>
-        </p:spPr>
-        <p:txBody>
-          <a:bodyPr wrap="square" anchor="ctr" lIns="0" rIns="0" tIns="0" bIns="0">
+          <a:bodyPr wrap="square" anchor="t" lIns="0" rIns="0" tIns="0" bIns="0">
             <a:spAutoFit/>
           </a:bodyPr>
           <a:lstStyle/>
@@ -15365,71 +22292,27 @@
               </a:spcAft>
             </a:pPr>
             <a:r>
-              <a:rPr sz="1450" b="1" i="0">
+              <a:rPr sz="1900" b="1" i="0">
                 <a:solidFill>
                   <a:srgbClr val="0B1F33"/>
                 </a:solidFill>
                 <a:latin typeface="Microsoft YaHei"/>
               </a:rPr>
-              <a:t>数据是新护城河</a:t>
-            </a:r>
-          </a:p>
-        </p:txBody>
-      </p:sp>
-      <p:sp>
-        <p:nvSpPr>
-          <p:cNvPr id="20" name="Rectangle 19"/>
-          <p:cNvSpPr/>
-          <p:nvPr/>
-        </p:nvSpPr>
-        <p:spPr>
-          <a:xfrm>
-            <a:off x="4389120" y="3355848"/>
-            <a:ext cx="15240" cy="1289304"/>
-          </a:xfrm>
-          <a:prstGeom prst="rect">
-            <a:avLst/>
-          </a:prstGeom>
-          <a:solidFill>
-            <a:srgbClr val="D7DEE6"/>
-          </a:solidFill>
-          <a:ln>
-            <a:noFill/>
-          </a:ln>
-          <a:effectLst/>
-        </p:spPr>
-        <p:style>
-          <a:lnRef idx="1">
-            <a:schemeClr val="accent1"/>
-          </a:lnRef>
-          <a:fillRef idx="3">
-            <a:schemeClr val="accent1"/>
-          </a:fillRef>
-          <a:effectRef idx="2">
-            <a:schemeClr val="accent1"/>
-          </a:effectRef>
-          <a:fontRef idx="minor">
-            <a:schemeClr val="lt1"/>
-          </a:fontRef>
-        </p:style>
-        <p:txBody>
-          <a:bodyPr rtlCol="0" anchor="ctr"/>
-          <a:lstStyle/>
-          <a:p>
-            <a:pPr algn="ctr"/>
-          </a:p>
-        </p:txBody>
-      </p:sp>
-      <p:sp>
-        <p:nvSpPr>
-          <p:cNvPr id="21" name="TextBox 20"/>
+              <a:t>Sales + Agentforce</a:t>
+            </a:r>
+          </a:p>
+        </p:txBody>
+      </p:sp>
+      <p:sp>
+        <p:nvSpPr>
+          <p:cNvPr id="15" name="TextBox 14"/>
           <p:cNvSpPr txBox="1"/>
           <p:nvPr/>
         </p:nvSpPr>
         <p:spPr>
           <a:xfrm>
-            <a:off x="4617720" y="3191256"/>
-            <a:ext cx="6492240" cy="1618488"/>
+            <a:off x="1097280" y="2807208"/>
+            <a:ext cx="4572000" cy="1083564"/>
           </a:xfrm>
           <a:prstGeom prst="rect">
             <a:avLst/>
@@ -15437,14 +22320,14 @@
           <a:noFill/>
         </p:spPr>
         <p:txBody>
-          <a:bodyPr wrap="square" anchor="ctr" lIns="0" rIns="0" tIns="0" bIns="0">
+          <a:bodyPr wrap="square" anchor="t" lIns="0" rIns="0" tIns="0" bIns="0">
             <a:spAutoFit/>
           </a:bodyPr>
           <a:lstStyle/>
           <a:p>
             <a:pPr algn="l">
               <a:lnSpc>
-                <a:spcPct val="112000"/>
+                <a:spcPct val="120000"/>
               </a:lnSpc>
               <a:spcBef>
                 <a:spcPts val="0"/>
@@ -15454,27 +22337,27 @@
               </a:spcAft>
             </a:pPr>
             <a:r>
-              <a:rPr sz="1250" b="0" i="0">
+              <a:rPr sz="1200" b="0" i="0">
                 <a:solidFill>
                   <a:srgbClr val="5B6B7B"/>
                 </a:solidFill>
                 <a:latin typeface="Microsoft YaHei"/>
               </a:rPr>
-              <a:t>界面可复刻、能力会被比价，独有客户数据与可靠执行才是壁垒。</a:t>
-            </a:r>
-          </a:p>
-        </p:txBody>
-      </p:sp>
-      <p:sp>
-        <p:nvSpPr>
-          <p:cNvPr id="22" name="Rounded Rectangle 21"/>
+              <a:t>Agent 自动跟进线索、更新 CRM、生成话术</a:t>
+            </a:r>
+          </a:p>
+        </p:txBody>
+      </p:sp>
+      <p:sp>
+        <p:nvSpPr>
+          <p:cNvPr id="16" name="Rounded Rectangle 15"/>
           <p:cNvSpPr/>
           <p:nvPr/>
         </p:nvSpPr>
         <p:spPr>
           <a:xfrm>
-            <a:off x="777240" y="4919472"/>
-            <a:ext cx="10607040" cy="1618488"/>
+            <a:off x="6263640" y="1783080"/>
+            <a:ext cx="5120640" cy="2272284"/>
           </a:xfrm>
           <a:prstGeom prst="roundRect">
             <a:avLst>
@@ -15482,7 +22365,62 @@
             </a:avLst>
           </a:prstGeom>
           <a:solidFill>
-            <a:srgbClr val="F4F7FB"/>
+            <a:srgbClr val="FFFFFF"/>
+          </a:solidFill>
+          <a:ln w="9525">
+            <a:solidFill>
+              <a:srgbClr val="D7DEE6"/>
+            </a:solidFill>
+          </a:ln>
+          <a:effectLst/>
+          <a:effectLst>
+            <a:outerShdw blurRad="90000" dist="40000" dir="5400000" rotWithShape="0">
+              <a:srgbClr val="0B1F33">
+                <a:alpha val="18000"/>
+              </a:srgbClr>
+            </a:outerShdw>
+          </a:effectLst>
+        </p:spPr>
+        <p:style>
+          <a:lnRef idx="1">
+            <a:schemeClr val="accent1"/>
+          </a:lnRef>
+          <a:fillRef idx="3">
+            <a:schemeClr val="accent1"/>
+          </a:fillRef>
+          <a:effectRef idx="2">
+            <a:schemeClr val="accent1"/>
+          </a:effectRef>
+          <a:fontRef idx="minor">
+            <a:schemeClr val="lt1"/>
+          </a:fontRef>
+        </p:style>
+        <p:txBody>
+          <a:bodyPr rtlCol="0" anchor="ctr"/>
+          <a:lstStyle/>
+          <a:p>
+            <a:pPr algn="ctr"/>
+          </a:p>
+        </p:txBody>
+      </p:sp>
+      <p:sp>
+        <p:nvSpPr>
+          <p:cNvPr id="17" name="Rounded Rectangle 16"/>
+          <p:cNvSpPr/>
+          <p:nvPr/>
+        </p:nvSpPr>
+        <p:spPr>
+          <a:xfrm>
+            <a:off x="6263640" y="1783080"/>
+            <a:ext cx="91440" cy="2272284"/>
+          </a:xfrm>
+          <a:prstGeom prst="roundRect">
+            <a:avLst>
+              <a:gd name="adj" fmla="val 6000"/>
+            </a:avLst>
+          </a:prstGeom>
+          <a:solidFill>
+            <a:srgbClr val="14B8A6"/>
           </a:solidFill>
           <a:ln>
             <a:noFill/>
@@ -15513,58 +22451,14 @@
       </p:sp>
       <p:sp>
         <p:nvSpPr>
-          <p:cNvPr id="23" name="Oval 22"/>
-          <p:cNvSpPr/>
-          <p:nvPr/>
-        </p:nvSpPr>
-        <p:spPr>
-          <a:xfrm>
-            <a:off x="1033272" y="5500116"/>
-            <a:ext cx="457200" cy="457200"/>
-          </a:xfrm>
-          <a:prstGeom prst="ellipse">
-            <a:avLst/>
-          </a:prstGeom>
-          <a:solidFill>
-            <a:srgbClr val="7C5CFF"/>
-          </a:solidFill>
-          <a:ln>
-            <a:noFill/>
-          </a:ln>
-          <a:effectLst/>
-        </p:spPr>
-        <p:style>
-          <a:lnRef idx="1">
-            <a:schemeClr val="accent1"/>
-          </a:lnRef>
-          <a:fillRef idx="3">
-            <a:schemeClr val="accent1"/>
-          </a:fillRef>
-          <a:effectRef idx="2">
-            <a:schemeClr val="accent1"/>
-          </a:effectRef>
-          <a:fontRef idx="minor">
-            <a:schemeClr val="lt1"/>
-          </a:fontRef>
-        </p:style>
-        <p:txBody>
-          <a:bodyPr rtlCol="0" anchor="ctr"/>
-          <a:lstStyle/>
-          <a:p>
-            <a:pPr algn="ctr"/>
-          </a:p>
-        </p:txBody>
-      </p:sp>
-      <p:sp>
-        <p:nvSpPr>
-          <p:cNvPr id="24" name="TextBox 23"/>
+          <p:cNvPr id="18" name="TextBox 17"/>
           <p:cNvSpPr txBox="1"/>
           <p:nvPr/>
         </p:nvSpPr>
         <p:spPr>
           <a:xfrm>
-            <a:off x="1033272" y="5500116"/>
-            <a:ext cx="457200" cy="457200"/>
+            <a:off x="6583680" y="1965960"/>
+            <a:ext cx="4572000" cy="320040"/>
           </a:xfrm>
           <a:prstGeom prst="rect">
             <a:avLst/>
@@ -15572,52 +22466,7 @@
           <a:noFill/>
         </p:spPr>
         <p:txBody>
-          <a:bodyPr wrap="square" anchor="ctr" lIns="0" rIns="0" tIns="0" bIns="0">
-            <a:spAutoFit/>
-          </a:bodyPr>
-          <a:lstStyle/>
-          <a:p>
-            <a:pPr algn="ctr">
-              <a:lnSpc>
-                <a:spcPct val="100000"/>
-              </a:lnSpc>
-              <a:spcBef>
-                <a:spcPts val="0"/>
-              </a:spcBef>
-              <a:spcAft>
-                <a:spcPts val="600"/>
-              </a:spcAft>
-            </a:pPr>
-            <a:r>
-              <a:rPr sz="1700" b="1" i="0">
-                <a:solidFill>
-                  <a:srgbClr val="FFFFFF"/>
-                </a:solidFill>
-                <a:latin typeface="Microsoft YaHei"/>
-              </a:rPr>
-              <a:t>3</a:t>
-            </a:r>
-          </a:p>
-        </p:txBody>
-      </p:sp>
-      <p:sp>
-        <p:nvSpPr>
-          <p:cNvPr id="25" name="TextBox 24"/>
-          <p:cNvSpPr txBox="1"/>
-          <p:nvPr/>
-        </p:nvSpPr>
-        <p:spPr>
-          <a:xfrm>
-            <a:off x="1691640" y="4919472"/>
-            <a:ext cx="2743200" cy="1618488"/>
-          </a:xfrm>
-          <a:prstGeom prst="rect">
-            <a:avLst/>
-          </a:prstGeom>
-          <a:noFill/>
-        </p:spPr>
-        <p:txBody>
-          <a:bodyPr wrap="square" anchor="ctr" lIns="0" rIns="0" tIns="0" bIns="0">
+          <a:bodyPr wrap="square" anchor="t" lIns="0" rIns="0" tIns="0" bIns="0">
             <a:spAutoFit/>
           </a:bodyPr>
           <a:lstStyle/>
@@ -15634,71 +22483,27 @@
               </a:spcAft>
             </a:pPr>
             <a:r>
-              <a:rPr sz="1450" b="1" i="0">
-                <a:solidFill>
-                  <a:srgbClr val="0B1F33"/>
-                </a:solidFill>
-                <a:latin typeface="Microsoft YaHei"/>
-              </a:rPr>
-              <a:t>主动拥抱去 UI 化</a:t>
-            </a:r>
-          </a:p>
-        </p:txBody>
-      </p:sp>
-      <p:sp>
-        <p:nvSpPr>
-          <p:cNvPr id="26" name="Rectangle 25"/>
-          <p:cNvSpPr/>
-          <p:nvPr/>
-        </p:nvSpPr>
-        <p:spPr>
-          <a:xfrm>
-            <a:off x="4389120" y="5084064"/>
-            <a:ext cx="15240" cy="1289304"/>
-          </a:xfrm>
-          <a:prstGeom prst="rect">
-            <a:avLst/>
-          </a:prstGeom>
-          <a:solidFill>
-            <a:srgbClr val="D7DEE6"/>
-          </a:solidFill>
-          <a:ln>
-            <a:noFill/>
-          </a:ln>
-          <a:effectLst/>
-        </p:spPr>
-        <p:style>
-          <a:lnRef idx="1">
-            <a:schemeClr val="accent1"/>
-          </a:lnRef>
-          <a:fillRef idx="3">
-            <a:schemeClr val="accent1"/>
-          </a:fillRef>
-          <a:effectRef idx="2">
-            <a:schemeClr val="accent1"/>
-          </a:effectRef>
-          <a:fontRef idx="minor">
-            <a:schemeClr val="lt1"/>
-          </a:fontRef>
-        </p:style>
-        <p:txBody>
-          <a:bodyPr rtlCol="0" anchor="ctr"/>
-          <a:lstStyle/>
-          <a:p>
-            <a:pPr algn="ctr"/>
-          </a:p>
-        </p:txBody>
-      </p:sp>
-      <p:sp>
-        <p:nvSpPr>
-          <p:cNvPr id="27" name="TextBox 26"/>
+              <a:rPr sz="1200" b="1" i="0">
+                <a:solidFill>
+                  <a:srgbClr val="14B8A6"/>
+                </a:solidFill>
+                <a:latin typeface="Microsoft YaHei"/>
+              </a:rPr>
+              <a:t>客户服务</a:t>
+            </a:r>
+          </a:p>
+        </p:txBody>
+      </p:sp>
+      <p:sp>
+        <p:nvSpPr>
+          <p:cNvPr id="19" name="TextBox 18"/>
           <p:cNvSpPr txBox="1"/>
           <p:nvPr/>
         </p:nvSpPr>
         <p:spPr>
           <a:xfrm>
-            <a:off x="4617720" y="4919472"/>
-            <a:ext cx="6492240" cy="1618488"/>
+            <a:off x="6583680" y="2276856"/>
+            <a:ext cx="4572000" cy="457200"/>
           </a:xfrm>
           <a:prstGeom prst="rect">
             <a:avLst/>
@@ -15706,14 +22511,14 @@
           <a:noFill/>
         </p:spPr>
         <p:txBody>
-          <a:bodyPr wrap="square" anchor="ctr" lIns="0" rIns="0" tIns="0" bIns="0">
+          <a:bodyPr wrap="square" anchor="t" lIns="0" rIns="0" tIns="0" bIns="0">
             <a:spAutoFit/>
           </a:bodyPr>
           <a:lstStyle/>
           <a:p>
             <a:pPr algn="l">
               <a:lnSpc>
-                <a:spcPct val="112000"/>
+                <a:spcPct val="100000"/>
               </a:lnSpc>
               <a:spcBef>
                 <a:spcPts val="0"/>
@@ -15723,13 +22528,530 @@
               </a:spcAft>
             </a:pPr>
             <a:r>
-              <a:rPr sz="1250" b="0" i="0">
+              <a:rPr sz="1900" b="1" i="0">
+                <a:solidFill>
+                  <a:srgbClr val="0B1F33"/>
+                </a:solidFill>
+                <a:latin typeface="Microsoft YaHei"/>
+              </a:rPr>
+              <a:t>Service Cloud</a:t>
+            </a:r>
+          </a:p>
+        </p:txBody>
+      </p:sp>
+      <p:sp>
+        <p:nvSpPr>
+          <p:cNvPr id="20" name="TextBox 19"/>
+          <p:cNvSpPr txBox="1"/>
+          <p:nvPr/>
+        </p:nvSpPr>
+        <p:spPr>
+          <a:xfrm>
+            <a:off x="6583680" y="2807208"/>
+            <a:ext cx="4572000" cy="1083564"/>
+          </a:xfrm>
+          <a:prstGeom prst="rect">
+            <a:avLst/>
+          </a:prstGeom>
+          <a:noFill/>
+        </p:spPr>
+        <p:txBody>
+          <a:bodyPr wrap="square" anchor="t" lIns="0" rIns="0" tIns="0" bIns="0">
+            <a:spAutoFit/>
+          </a:bodyPr>
+          <a:lstStyle/>
+          <a:p>
+            <a:pPr algn="l">
+              <a:lnSpc>
+                <a:spcPct val="120000"/>
+              </a:lnSpc>
+              <a:spcBef>
+                <a:spcPts val="0"/>
+              </a:spcBef>
+              <a:spcAft>
+                <a:spcPts val="600"/>
+              </a:spcAft>
+            </a:pPr>
+            <a:r>
+              <a:rPr sz="1200" b="0" i="0">
                 <a:solidFill>
                   <a:srgbClr val="5B6B7B"/>
                 </a:solidFill>
                 <a:latin typeface="Microsoft YaHei"/>
               </a:rPr>
-              <a:t>与其被平台 Agent 中介化，不如主动成为被调用的能力供给方。</a:t>
+              <a:t>Agent 自主处理工单、查订单、办退换货</a:t>
+            </a:r>
+          </a:p>
+        </p:txBody>
+      </p:sp>
+      <p:sp>
+        <p:nvSpPr>
+          <p:cNvPr id="21" name="Rounded Rectangle 20"/>
+          <p:cNvSpPr/>
+          <p:nvPr/>
+        </p:nvSpPr>
+        <p:spPr>
+          <a:xfrm>
+            <a:off x="777240" y="4311396"/>
+            <a:ext cx="5120640" cy="2272284"/>
+          </a:xfrm>
+          <a:prstGeom prst="roundRect">
+            <a:avLst>
+              <a:gd name="adj" fmla="val 6000"/>
+            </a:avLst>
+          </a:prstGeom>
+          <a:solidFill>
+            <a:srgbClr val="FFFFFF"/>
+          </a:solidFill>
+          <a:ln w="9525">
+            <a:solidFill>
+              <a:srgbClr val="D7DEE6"/>
+            </a:solidFill>
+          </a:ln>
+          <a:effectLst/>
+          <a:effectLst>
+            <a:outerShdw blurRad="90000" dist="40000" dir="5400000" rotWithShape="0">
+              <a:srgbClr val="0B1F33">
+                <a:alpha val="18000"/>
+              </a:srgbClr>
+            </a:outerShdw>
+          </a:effectLst>
+        </p:spPr>
+        <p:style>
+          <a:lnRef idx="1">
+            <a:schemeClr val="accent1"/>
+          </a:lnRef>
+          <a:fillRef idx="3">
+            <a:schemeClr val="accent1"/>
+          </a:fillRef>
+          <a:effectRef idx="2">
+            <a:schemeClr val="accent1"/>
+          </a:effectRef>
+          <a:fontRef idx="minor">
+            <a:schemeClr val="lt1"/>
+          </a:fontRef>
+        </p:style>
+        <p:txBody>
+          <a:bodyPr rtlCol="0" anchor="ctr"/>
+          <a:lstStyle/>
+          <a:p>
+            <a:pPr algn="ctr"/>
+          </a:p>
+        </p:txBody>
+      </p:sp>
+      <p:sp>
+        <p:nvSpPr>
+          <p:cNvPr id="22" name="Rounded Rectangle 21"/>
+          <p:cNvSpPr/>
+          <p:nvPr/>
+        </p:nvSpPr>
+        <p:spPr>
+          <a:xfrm>
+            <a:off x="777240" y="4311396"/>
+            <a:ext cx="91440" cy="2272284"/>
+          </a:xfrm>
+          <a:prstGeom prst="roundRect">
+            <a:avLst>
+              <a:gd name="adj" fmla="val 6000"/>
+            </a:avLst>
+          </a:prstGeom>
+          <a:solidFill>
+            <a:srgbClr val="7C5CFF"/>
+          </a:solidFill>
+          <a:ln>
+            <a:noFill/>
+          </a:ln>
+          <a:effectLst/>
+        </p:spPr>
+        <p:style>
+          <a:lnRef idx="1">
+            <a:schemeClr val="accent1"/>
+          </a:lnRef>
+          <a:fillRef idx="3">
+            <a:schemeClr val="accent1"/>
+          </a:fillRef>
+          <a:effectRef idx="2">
+            <a:schemeClr val="accent1"/>
+          </a:effectRef>
+          <a:fontRef idx="minor">
+            <a:schemeClr val="lt1"/>
+          </a:fontRef>
+        </p:style>
+        <p:txBody>
+          <a:bodyPr rtlCol="0" anchor="ctr"/>
+          <a:lstStyle/>
+          <a:p>
+            <a:pPr algn="ctr"/>
+          </a:p>
+        </p:txBody>
+      </p:sp>
+      <p:sp>
+        <p:nvSpPr>
+          <p:cNvPr id="23" name="TextBox 22"/>
+          <p:cNvSpPr txBox="1"/>
+          <p:nvPr/>
+        </p:nvSpPr>
+        <p:spPr>
+          <a:xfrm>
+            <a:off x="1097280" y="4494276"/>
+            <a:ext cx="4572000" cy="320040"/>
+          </a:xfrm>
+          <a:prstGeom prst="rect">
+            <a:avLst/>
+          </a:prstGeom>
+          <a:noFill/>
+        </p:spPr>
+        <p:txBody>
+          <a:bodyPr wrap="square" anchor="t" lIns="0" rIns="0" tIns="0" bIns="0">
+            <a:spAutoFit/>
+          </a:bodyPr>
+          <a:lstStyle/>
+          <a:p>
+            <a:pPr algn="l">
+              <a:lnSpc>
+                <a:spcPct val="100000"/>
+              </a:lnSpc>
+              <a:spcBef>
+                <a:spcPts val="0"/>
+              </a:spcBef>
+              <a:spcAft>
+                <a:spcPts val="600"/>
+              </a:spcAft>
+            </a:pPr>
+            <a:r>
+              <a:rPr sz="1200" b="1" i="0">
+                <a:solidFill>
+                  <a:srgbClr val="7C5CFF"/>
+                </a:solidFill>
+                <a:latin typeface="Microsoft YaHei"/>
+              </a:rPr>
+              <a:t>营销</a:t>
+            </a:r>
+          </a:p>
+        </p:txBody>
+      </p:sp>
+      <p:sp>
+        <p:nvSpPr>
+          <p:cNvPr id="24" name="TextBox 23"/>
+          <p:cNvSpPr txBox="1"/>
+          <p:nvPr/>
+        </p:nvSpPr>
+        <p:spPr>
+          <a:xfrm>
+            <a:off x="1097280" y="4805172"/>
+            <a:ext cx="4572000" cy="457200"/>
+          </a:xfrm>
+          <a:prstGeom prst="rect">
+            <a:avLst/>
+          </a:prstGeom>
+          <a:noFill/>
+        </p:spPr>
+        <p:txBody>
+          <a:bodyPr wrap="square" anchor="t" lIns="0" rIns="0" tIns="0" bIns="0">
+            <a:spAutoFit/>
+          </a:bodyPr>
+          <a:lstStyle/>
+          <a:p>
+            <a:pPr algn="l">
+              <a:lnSpc>
+                <a:spcPct val="100000"/>
+              </a:lnSpc>
+              <a:spcBef>
+                <a:spcPts val="0"/>
+              </a:spcBef>
+              <a:spcAft>
+                <a:spcPts val="600"/>
+              </a:spcAft>
+            </a:pPr>
+            <a:r>
+              <a:rPr sz="1900" b="1" i="0">
+                <a:solidFill>
+                  <a:srgbClr val="0B1F33"/>
+                </a:solidFill>
+                <a:latin typeface="Microsoft YaHei"/>
+              </a:rPr>
+              <a:t>Marketing+Data Cloud</a:t>
+            </a:r>
+          </a:p>
+        </p:txBody>
+      </p:sp>
+      <p:sp>
+        <p:nvSpPr>
+          <p:cNvPr id="25" name="TextBox 24"/>
+          <p:cNvSpPr txBox="1"/>
+          <p:nvPr/>
+        </p:nvSpPr>
+        <p:spPr>
+          <a:xfrm>
+            <a:off x="1097280" y="5335524"/>
+            <a:ext cx="4572000" cy="1083564"/>
+          </a:xfrm>
+          <a:prstGeom prst="rect">
+            <a:avLst/>
+          </a:prstGeom>
+          <a:noFill/>
+        </p:spPr>
+        <p:txBody>
+          <a:bodyPr wrap="square" anchor="t" lIns="0" rIns="0" tIns="0" bIns="0">
+            <a:spAutoFit/>
+          </a:bodyPr>
+          <a:lstStyle/>
+          <a:p>
+            <a:pPr algn="l">
+              <a:lnSpc>
+                <a:spcPct val="120000"/>
+              </a:lnSpc>
+              <a:spcBef>
+                <a:spcPts val="0"/>
+              </a:spcBef>
+              <a:spcAft>
+                <a:spcPts val="600"/>
+              </a:spcAft>
+            </a:pPr>
+            <a:r>
+              <a:rPr sz="1200" b="0" i="0">
+                <a:solidFill>
+                  <a:srgbClr val="5B6B7B"/>
+                </a:solidFill>
+                <a:latin typeface="Microsoft YaHei"/>
+              </a:rPr>
+              <a:t>基于统一客户数据做精准营销与个性化</a:t>
+            </a:r>
+          </a:p>
+        </p:txBody>
+      </p:sp>
+      <p:sp>
+        <p:nvSpPr>
+          <p:cNvPr id="26" name="Rounded Rectangle 25"/>
+          <p:cNvSpPr/>
+          <p:nvPr/>
+        </p:nvSpPr>
+        <p:spPr>
+          <a:xfrm>
+            <a:off x="6263640" y="4311396"/>
+            <a:ext cx="5120640" cy="2272284"/>
+          </a:xfrm>
+          <a:prstGeom prst="roundRect">
+            <a:avLst>
+              <a:gd name="adj" fmla="val 6000"/>
+            </a:avLst>
+          </a:prstGeom>
+          <a:solidFill>
+            <a:srgbClr val="FFFFFF"/>
+          </a:solidFill>
+          <a:ln w="9525">
+            <a:solidFill>
+              <a:srgbClr val="D7DEE6"/>
+            </a:solidFill>
+          </a:ln>
+          <a:effectLst/>
+          <a:effectLst>
+            <a:outerShdw blurRad="90000" dist="40000" dir="5400000" rotWithShape="0">
+              <a:srgbClr val="0B1F33">
+                <a:alpha val="18000"/>
+              </a:srgbClr>
+            </a:outerShdw>
+          </a:effectLst>
+        </p:spPr>
+        <p:style>
+          <a:lnRef idx="1">
+            <a:schemeClr val="accent1"/>
+          </a:lnRef>
+          <a:fillRef idx="3">
+            <a:schemeClr val="accent1"/>
+          </a:fillRef>
+          <a:effectRef idx="2">
+            <a:schemeClr val="accent1"/>
+          </a:effectRef>
+          <a:fontRef idx="minor">
+            <a:schemeClr val="lt1"/>
+          </a:fontRef>
+        </p:style>
+        <p:txBody>
+          <a:bodyPr rtlCol="0" anchor="ctr"/>
+          <a:lstStyle/>
+          <a:p>
+            <a:pPr algn="ctr"/>
+          </a:p>
+        </p:txBody>
+      </p:sp>
+      <p:sp>
+        <p:nvSpPr>
+          <p:cNvPr id="27" name="Rounded Rectangle 26"/>
+          <p:cNvSpPr/>
+          <p:nvPr/>
+        </p:nvSpPr>
+        <p:spPr>
+          <a:xfrm>
+            <a:off x="6263640" y="4311396"/>
+            <a:ext cx="91440" cy="2272284"/>
+          </a:xfrm>
+          <a:prstGeom prst="roundRect">
+            <a:avLst>
+              <a:gd name="adj" fmla="val 6000"/>
+            </a:avLst>
+          </a:prstGeom>
+          <a:solidFill>
+            <a:srgbClr val="F59E0B"/>
+          </a:solidFill>
+          <a:ln>
+            <a:noFill/>
+          </a:ln>
+          <a:effectLst/>
+        </p:spPr>
+        <p:style>
+          <a:lnRef idx="1">
+            <a:schemeClr val="accent1"/>
+          </a:lnRef>
+          <a:fillRef idx="3">
+            <a:schemeClr val="accent1"/>
+          </a:fillRef>
+          <a:effectRef idx="2">
+            <a:schemeClr val="accent1"/>
+          </a:effectRef>
+          <a:fontRef idx="minor">
+            <a:schemeClr val="lt1"/>
+          </a:fontRef>
+        </p:style>
+        <p:txBody>
+          <a:bodyPr rtlCol="0" anchor="ctr"/>
+          <a:lstStyle/>
+          <a:p>
+            <a:pPr algn="ctr"/>
+          </a:p>
+        </p:txBody>
+      </p:sp>
+      <p:sp>
+        <p:nvSpPr>
+          <p:cNvPr id="28" name="TextBox 27"/>
+          <p:cNvSpPr txBox="1"/>
+          <p:nvPr/>
+        </p:nvSpPr>
+        <p:spPr>
+          <a:xfrm>
+            <a:off x="6583680" y="4494276"/>
+            <a:ext cx="4572000" cy="320040"/>
+          </a:xfrm>
+          <a:prstGeom prst="rect">
+            <a:avLst/>
+          </a:prstGeom>
+          <a:noFill/>
+        </p:spPr>
+        <p:txBody>
+          <a:bodyPr wrap="square" anchor="t" lIns="0" rIns="0" tIns="0" bIns="0">
+            <a:spAutoFit/>
+          </a:bodyPr>
+          <a:lstStyle/>
+          <a:p>
+            <a:pPr algn="l">
+              <a:lnSpc>
+                <a:spcPct val="100000"/>
+              </a:lnSpc>
+              <a:spcBef>
+                <a:spcPts val="0"/>
+              </a:spcBef>
+              <a:spcAft>
+                <a:spcPts val="600"/>
+              </a:spcAft>
+            </a:pPr>
+            <a:r>
+              <a:rPr sz="1200" b="1" i="0">
+                <a:solidFill>
+                  <a:srgbClr val="F59E0B"/>
+                </a:solidFill>
+                <a:latin typeface="Microsoft YaHei"/>
+              </a:rPr>
+              <a:t>跨行业</a:t>
+            </a:r>
+          </a:p>
+        </p:txBody>
+      </p:sp>
+      <p:sp>
+        <p:nvSpPr>
+          <p:cNvPr id="29" name="TextBox 28"/>
+          <p:cNvSpPr txBox="1"/>
+          <p:nvPr/>
+        </p:nvSpPr>
+        <p:spPr>
+          <a:xfrm>
+            <a:off x="6583680" y="4805172"/>
+            <a:ext cx="4572000" cy="457200"/>
+          </a:xfrm>
+          <a:prstGeom prst="rect">
+            <a:avLst/>
+          </a:prstGeom>
+          <a:noFill/>
+        </p:spPr>
+        <p:txBody>
+          <a:bodyPr wrap="square" anchor="t" lIns="0" rIns="0" tIns="0" bIns="0">
+            <a:spAutoFit/>
+          </a:bodyPr>
+          <a:lstStyle/>
+          <a:p>
+            <a:pPr algn="l">
+              <a:lnSpc>
+                <a:spcPct val="100000"/>
+              </a:lnSpc>
+              <a:spcBef>
+                <a:spcPts val="0"/>
+              </a:spcBef>
+              <a:spcAft>
+                <a:spcPts val="600"/>
+              </a:spcAft>
+            </a:pPr>
+            <a:r>
+              <a:rPr sz="1900" b="1" i="0">
+                <a:solidFill>
+                  <a:srgbClr val="0B1F33"/>
+                </a:solidFill>
+                <a:latin typeface="Microsoft YaHei"/>
+              </a:rPr>
+              <a:t>金融/零售/制造</a:t>
+            </a:r>
+          </a:p>
+        </p:txBody>
+      </p:sp>
+      <p:sp>
+        <p:nvSpPr>
+          <p:cNvPr id="30" name="TextBox 29"/>
+          <p:cNvSpPr txBox="1"/>
+          <p:nvPr/>
+        </p:nvSpPr>
+        <p:spPr>
+          <a:xfrm>
+            <a:off x="6583680" y="5335524"/>
+            <a:ext cx="4572000" cy="1083564"/>
+          </a:xfrm>
+          <a:prstGeom prst="rect">
+            <a:avLst/>
+          </a:prstGeom>
+          <a:noFill/>
+        </p:spPr>
+        <p:txBody>
+          <a:bodyPr wrap="square" anchor="t" lIns="0" rIns="0" tIns="0" bIns="0">
+            <a:spAutoFit/>
+          </a:bodyPr>
+          <a:lstStyle/>
+          <a:p>
+            <a:pPr algn="l">
+              <a:lnSpc>
+                <a:spcPct val="120000"/>
+              </a:lnSpc>
+              <a:spcBef>
+                <a:spcPts val="0"/>
+              </a:spcBef>
+              <a:spcAft>
+                <a:spcPts val="600"/>
+              </a:spcAft>
+            </a:pPr>
+            <a:r>
+              <a:rPr sz="1200" b="0" i="0">
+                <a:solidFill>
+                  <a:srgbClr val="5B6B7B"/>
+                </a:solidFill>
+                <a:latin typeface="Microsoft YaHei"/>
+              </a:rPr>
+              <a:t>各行业 CRM 场景嵌入 Agentforce 办事</a:t>
             </a:r>
           </a:p>
         </p:txBody>
